--- a/slides/1st_stage/G_sme_management_policy.pptx
+++ b/slides/1st_stage/G_sme_management_policy.pptx
@@ -11421,45 +11421,87 @@
         <p:spPr>
           <a:xfrm>
             <a:off x="502920" y="1691640"/>
-            <a:ext cx="2286000" cy="329184"/>
-          </a:xfrm>
-          <a:prstGeom prst="rect">
-            <a:avLst/>
-          </a:prstGeom>
-          <a:noFill/>
-          <a:ln/>
-        </p:spPr>
-        <p:txBody>
-          <a:bodyPr wrap="square" lIns="0" tIns="0" rIns="0" bIns="0" rtlCol="0" anchor="t"/>
-          <a:lstStyle/>
-          <a:p>
-            <a:pPr indent="0" marL="0">
-              <a:buNone/>
-            </a:pPr>
-            <a:r>
-              <a:rPr lang="en-US" sz="1000" b="1" dirty="0">
-                <a:solidFill>
-                  <a:srgbClr val="171717"/>
+            <a:ext cx="6766560" cy="822960"/>
+          </a:xfrm>
+          <a:prstGeom prst="rect">
+            <a:avLst/>
+          </a:prstGeom>
+          <a:noFill/>
+          <a:ln/>
+        </p:spPr>
+        <p:txBody>
+          <a:bodyPr wrap="square" lIns="0" tIns="0" rIns="0" bIns="0" rtlCol="0" anchor="ctr"/>
+          <a:lstStyle/>
+          <a:p>
+            <a:pPr indent="0" marL="0">
+              <a:lnSpc>
+                <a:spcPct val="130000"/>
+              </a:lnSpc>
+              <a:buNone/>
+            </a:pPr>
+            <a:r>
+              <a:rPr lang="en-US" sz="1000" dirty="0">
+                <a:solidFill>
+                  <a:srgbClr val="8A8A8A"/>
                 </a:solidFill>
                 <a:latin typeface="Yu Gothic" pitchFamily="34" charset="0"/>
                 <a:ea typeface="Yu Gothic" pitchFamily="34" charset="-122"/>
                 <a:cs typeface="Yu Gothic" pitchFamily="34" charset="-120"/>
               </a:rPr>
+              <a:t>中小企業は信用力が乏しく間接金融（借入）に依存しがちなため、信用保証協会が保証人になる信用保証制度（詳細はG-24）が整備されている。税制面では、右図のとおり「どの法律の基準で判定するか」を混同しないことが最大のポイント。</a:t>
+            </a:r>
+            <a:endParaRPr lang="en-US" sz="1000" dirty="0"/>
+          </a:p>
+        </p:txBody>
+      </p:sp>
+      <p:sp>
+        <p:nvSpPr>
+          <p:cNvPr id="9" name="Text 7"/>
+          <p:cNvSpPr txBox="1"/>
+          <p:nvPr/>
+        </p:nvSpPr>
+        <p:spPr>
+          <a:xfrm>
+            <a:off x="502920" y="2606040"/>
+            <a:ext cx="1920240" cy="365760"/>
+          </a:xfrm>
+          <a:prstGeom prst="rect">
+            <a:avLst/>
+          </a:prstGeom>
+          <a:noFill/>
+          <a:ln/>
+        </p:spPr>
+        <p:txBody>
+          <a:bodyPr wrap="square" lIns="0" tIns="0" rIns="0" bIns="0" rtlCol="0" anchor="t"/>
+          <a:lstStyle/>
+          <a:p>
+            <a:pPr indent="0" marL="0">
+              <a:buNone/>
+            </a:pPr>
+            <a:r>
+              <a:rPr lang="en-US" sz="950" b="1" dirty="0">
+                <a:solidFill>
+                  <a:srgbClr val="171717"/>
+                </a:solidFill>
+                <a:latin typeface="Yu Gothic" pitchFamily="34" charset="0"/>
+                <a:ea typeface="Yu Gothic" pitchFamily="34" charset="-122"/>
+                <a:cs typeface="Yu Gothic" pitchFamily="34" charset="-120"/>
+              </a:rPr>
               <a:t>間接金融依存</a:t>
             </a:r>
-            <a:endParaRPr lang="en-US" sz="1000" dirty="0"/>
-          </a:p>
-        </p:txBody>
-      </p:sp>
-      <p:sp>
-        <p:nvSpPr>
-          <p:cNvPr id="9" name="Shape 7"/>
-          <p:cNvSpPr/>
-          <p:nvPr/>
-        </p:nvSpPr>
-        <p:spPr>
-          <a:xfrm>
-            <a:off x="2770632" y="1691640"/>
+            <a:endParaRPr lang="en-US" sz="950" dirty="0"/>
+          </a:p>
+        </p:txBody>
+      </p:sp>
+      <p:sp>
+        <p:nvSpPr>
+          <p:cNvPr id="10" name="Shape 8"/>
+          <p:cNvSpPr/>
+          <p:nvPr/>
+        </p:nvSpPr>
+        <p:spPr>
+          <a:xfrm>
+            <a:off x="2404872" y="2606040"/>
             <a:ext cx="0" cy="256032"/>
           </a:xfrm>
           <a:prstGeom prst="line">
@@ -11476,14 +11518,14 @@
       </p:sp>
       <p:sp>
         <p:nvSpPr>
-          <p:cNvPr id="10" name="Text 8"/>
-          <p:cNvSpPr txBox="1"/>
-          <p:nvPr/>
-        </p:nvSpPr>
-        <p:spPr>
-          <a:xfrm>
-            <a:off x="2926080" y="1691640"/>
-            <a:ext cx="8778240" cy="329184"/>
+          <p:cNvPr id="11" name="Text 9"/>
+          <p:cNvSpPr txBox="1"/>
+          <p:nvPr/>
+        </p:nvSpPr>
+        <p:spPr>
+          <a:xfrm>
+            <a:off x="2560320" y="2606040"/>
+            <a:ext cx="4709160" cy="365760"/>
           </a:xfrm>
           <a:prstGeom prst="rect">
             <a:avLst/>
@@ -11499,7 +11541,7 @@
               <a:buNone/>
             </a:pPr>
             <a:r>
-              <a:rPr lang="en-US" sz="1000" dirty="0">
+              <a:rPr lang="en-US" sz="950" dirty="0">
                 <a:solidFill>
                   <a:srgbClr val="8A8A8A"/>
                 </a:solidFill>
@@ -11507,22 +11549,22 @@
                 <a:ea typeface="Yu Gothic" pitchFamily="34" charset="-122"/>
                 <a:cs typeface="Yu Gothic" pitchFamily="34" charset="-120"/>
               </a:rPr>
-              <a:t>中小企業は担保力・情報開示力が乏しく、直接金融より銀行借入への依存度が高い</a:t>
-            </a:r>
-            <a:endParaRPr lang="en-US" sz="1000" dirty="0"/>
-          </a:p>
-        </p:txBody>
-      </p:sp>
-      <p:sp>
-        <p:nvSpPr>
-          <p:cNvPr id="11" name="Text 9"/>
-          <p:cNvSpPr txBox="1"/>
-          <p:nvPr/>
-        </p:nvSpPr>
-        <p:spPr>
-          <a:xfrm>
-            <a:off x="502920" y="2039112"/>
-            <a:ext cx="2286000" cy="329184"/>
+              <a:t>担保力・情報開示力が乏しく、直接金融より銀行借入への依存度が高い</a:t>
+            </a:r>
+            <a:endParaRPr lang="en-US" sz="950" dirty="0"/>
+          </a:p>
+        </p:txBody>
+      </p:sp>
+      <p:sp>
+        <p:nvSpPr>
+          <p:cNvPr id="12" name="Text 10"/>
+          <p:cNvSpPr txBox="1"/>
+          <p:nvPr/>
+        </p:nvSpPr>
+        <p:spPr>
+          <a:xfrm>
+            <a:off x="502920" y="2990088"/>
+            <a:ext cx="1920240" cy="365760"/>
           </a:xfrm>
           <a:prstGeom prst="rect">
             <a:avLst/>
@@ -11538,7 +11580,7 @@
               <a:buNone/>
             </a:pPr>
             <a:r>
-              <a:rPr lang="en-US" sz="1000" b="1" dirty="0">
+              <a:rPr lang="en-US" sz="950" b="1" dirty="0">
                 <a:solidFill>
                   <a:srgbClr val="171717"/>
                 </a:solidFill>
@@ -11548,19 +11590,19 @@
               </a:rPr>
               <a:t>信用保証制度</a:t>
             </a:r>
-            <a:endParaRPr lang="en-US" sz="1000" dirty="0"/>
-          </a:p>
-        </p:txBody>
-      </p:sp>
-      <p:sp>
-        <p:nvSpPr>
-          <p:cNvPr id="12" name="Shape 10"/>
-          <p:cNvSpPr/>
-          <p:nvPr/>
-        </p:nvSpPr>
-        <p:spPr>
-          <a:xfrm>
-            <a:off x="2770632" y="2039112"/>
+            <a:endParaRPr lang="en-US" sz="950" dirty="0"/>
+          </a:p>
+        </p:txBody>
+      </p:sp>
+      <p:sp>
+        <p:nvSpPr>
+          <p:cNvPr id="13" name="Shape 11"/>
+          <p:cNvSpPr/>
+          <p:nvPr/>
+        </p:nvSpPr>
+        <p:spPr>
+          <a:xfrm>
+            <a:off x="2404872" y="2990088"/>
             <a:ext cx="0" cy="256032"/>
           </a:xfrm>
           <a:prstGeom prst="line">
@@ -11577,14 +11619,14 @@
       </p:sp>
       <p:sp>
         <p:nvSpPr>
-          <p:cNvPr id="13" name="Text 11"/>
-          <p:cNvSpPr txBox="1"/>
-          <p:nvPr/>
-        </p:nvSpPr>
-        <p:spPr>
-          <a:xfrm>
-            <a:off x="2926080" y="2039112"/>
-            <a:ext cx="8778240" cy="329184"/>
+          <p:cNvPr id="14" name="Text 12"/>
+          <p:cNvSpPr txBox="1"/>
+          <p:nvPr/>
+        </p:nvSpPr>
+        <p:spPr>
+          <a:xfrm>
+            <a:off x="2560320" y="2990088"/>
+            <a:ext cx="4709160" cy="365760"/>
           </a:xfrm>
           <a:prstGeom prst="rect">
             <a:avLst/>
@@ -11600,7 +11642,7 @@
               <a:buNone/>
             </a:pPr>
             <a:r>
-              <a:rPr lang="en-US" sz="1000" dirty="0">
+              <a:rPr lang="en-US" sz="950" dirty="0">
                 <a:solidFill>
                   <a:srgbClr val="8A8A8A"/>
                 </a:solidFill>
@@ -11608,48 +11650,9 @@
                 <a:ea typeface="Yu Gothic" pitchFamily="34" charset="-122"/>
                 <a:cs typeface="Yu Gothic" pitchFamily="34" charset="-120"/>
               </a:rPr>
-              <a:t>信用保証協会が公的な保証人になり、金融機関が融資をしやすくする仕組み（G-24）</a:t>
-            </a:r>
-            <a:endParaRPr lang="en-US" sz="1000" dirty="0"/>
-          </a:p>
-        </p:txBody>
-      </p:sp>
-      <p:sp>
-        <p:nvSpPr>
-          <p:cNvPr id="14" name="Text 12"/>
-          <p:cNvSpPr txBox="1"/>
-          <p:nvPr/>
-        </p:nvSpPr>
-        <p:spPr>
-          <a:xfrm>
-            <a:off x="502920" y="2386584"/>
-            <a:ext cx="2286000" cy="329184"/>
-          </a:xfrm>
-          <a:prstGeom prst="rect">
-            <a:avLst/>
-          </a:prstGeom>
-          <a:noFill/>
-          <a:ln/>
-        </p:spPr>
-        <p:txBody>
-          <a:bodyPr wrap="square" lIns="0" tIns="0" rIns="0" bIns="0" rtlCol="0" anchor="t"/>
-          <a:lstStyle/>
-          <a:p>
-            <a:pPr indent="0" marL="0">
-              <a:buNone/>
-            </a:pPr>
-            <a:r>
-              <a:rPr lang="en-US" sz="1000" b="1" dirty="0">
-                <a:solidFill>
-                  <a:srgbClr val="171717"/>
-                </a:solidFill>
-                <a:latin typeface="Yu Gothic" pitchFamily="34" charset="0"/>
-                <a:ea typeface="Yu Gothic" pitchFamily="34" charset="-122"/>
-                <a:cs typeface="Yu Gothic" pitchFamily="34" charset="-120"/>
-              </a:rPr>
-              <a:t>中小企業基本法の基準</a:t>
-            </a:r>
-            <a:endParaRPr lang="en-US" sz="1000" dirty="0"/>
+              <a:t>信用保証協会が公的な保証人になり融資を後押しする仕組み</a:t>
+            </a:r>
+            <a:endParaRPr lang="en-US" sz="950" dirty="0"/>
           </a:p>
         </p:txBody>
       </p:sp>
@@ -11661,8 +11664,8 @@
         </p:nvSpPr>
         <p:spPr>
           <a:xfrm>
-            <a:off x="2770632" y="2386584"/>
-            <a:ext cx="0" cy="256032"/>
+            <a:off x="502920" y="3447288"/>
+            <a:ext cx="6766560" cy="0"/>
           </a:xfrm>
           <a:prstGeom prst="line">
             <a:avLst/>
@@ -11684,94 +11687,77 @@
         </p:nvSpPr>
         <p:spPr>
           <a:xfrm>
-            <a:off x="2926080" y="2386584"/>
-            <a:ext cx="8778240" cy="329184"/>
-          </a:xfrm>
-          <a:prstGeom prst="rect">
-            <a:avLst/>
-          </a:prstGeom>
-          <a:noFill/>
-          <a:ln/>
-        </p:spPr>
-        <p:txBody>
-          <a:bodyPr wrap="square" lIns="0" tIns="0" rIns="0" bIns="0" rtlCol="0" anchor="t"/>
-          <a:lstStyle/>
-          <a:p>
-            <a:pPr indent="0" marL="0">
-              <a:buNone/>
-            </a:pPr>
-            <a:r>
-              <a:rPr lang="en-US" sz="1000" dirty="0">
-                <a:solidFill>
-                  <a:srgbClr val="8A8A8A"/>
+            <a:off x="502920" y="3520440"/>
+            <a:ext cx="6766560" cy="548640"/>
+          </a:xfrm>
+          <a:prstGeom prst="rect">
+            <a:avLst/>
+          </a:prstGeom>
+          <a:noFill/>
+          <a:ln/>
+        </p:spPr>
+        <p:txBody>
+          <a:bodyPr wrap="square" lIns="0" tIns="0" rIns="0" bIns="0" rtlCol="0" anchor="ctr"/>
+          <a:lstStyle/>
+          <a:p>
+            <a:pPr indent="0" marL="0">
+              <a:lnSpc>
+                <a:spcPct val="120000"/>
+              </a:lnSpc>
+              <a:buNone/>
+            </a:pPr>
+            <a:r>
+              <a:rPr lang="en-US" sz="900" b="1" dirty="0">
+                <a:solidFill>
+                  <a:srgbClr val="FF3B1F"/>
                 </a:solidFill>
                 <a:latin typeface="Yu Gothic" pitchFamily="34" charset="0"/>
                 <a:ea typeface="Yu Gothic" pitchFamily="34" charset="-122"/>
                 <a:cs typeface="Yu Gothic" pitchFamily="34" charset="-120"/>
               </a:rPr>
-              <a:t>業種ごとに資本金または従業員数のいずれかで判定（G-1）</a:t>
-            </a:r>
-            <a:endParaRPr lang="en-US" sz="1000" dirty="0"/>
-          </a:p>
-        </p:txBody>
-      </p:sp>
-      <p:sp>
-        <p:nvSpPr>
-          <p:cNvPr id="17" name="Text 15"/>
-          <p:cNvSpPr txBox="1"/>
-          <p:nvPr/>
-        </p:nvSpPr>
-        <p:spPr>
-          <a:xfrm>
-            <a:off x="502920" y="2734056"/>
-            <a:ext cx="2286000" cy="329184"/>
-          </a:xfrm>
-          <a:prstGeom prst="rect">
-            <a:avLst/>
-          </a:prstGeom>
-          <a:noFill/>
-          <a:ln/>
-        </p:spPr>
-        <p:txBody>
-          <a:bodyPr wrap="square" lIns="0" tIns="0" rIns="0" bIns="0" rtlCol="0" anchor="t"/>
-          <a:lstStyle/>
-          <a:p>
-            <a:pPr indent="0" marL="0">
-              <a:buNone/>
-            </a:pPr>
-            <a:r>
-              <a:rPr lang="en-US" sz="1000" b="1" dirty="0">
-                <a:solidFill>
-                  <a:srgbClr val="171717"/>
+              <a:t>ひっかけ：</a:t>
+            </a:r>
+            <a:pPr indent="0" marL="0">
+              <a:lnSpc>
+                <a:spcPct val="120000"/>
+              </a:lnSpc>
+              <a:buNone/>
+            </a:pPr>
+            <a:r>
+              <a:rPr lang="en-US" sz="900" dirty="0">
+                <a:solidFill>
+                  <a:srgbClr val="FF3B1F"/>
                 </a:solidFill>
                 <a:latin typeface="Yu Gothic" pitchFamily="34" charset="0"/>
                 <a:ea typeface="Yu Gothic" pitchFamily="34" charset="-122"/>
                 <a:cs typeface="Yu Gothic" pitchFamily="34" charset="-120"/>
               </a:rPr>
-              <a:t>租税特別措置法の基準</a:t>
-            </a:r>
-            <a:endParaRPr lang="en-US" sz="1000" dirty="0"/>
-          </a:p>
-        </p:txBody>
-      </p:sp>
-      <p:sp>
-        <p:nvSpPr>
-          <p:cNvPr id="18" name="Shape 16"/>
-          <p:cNvSpPr/>
-          <p:nvPr/>
-        </p:nvSpPr>
-        <p:spPr>
-          <a:xfrm>
-            <a:off x="2770632" y="2734056"/>
-            <a:ext cx="0" cy="256032"/>
-          </a:xfrm>
-          <a:prstGeom prst="line">
-            <a:avLst/>
-          </a:prstGeom>
-          <a:noFill/>
+              <a:t>「中小企業基本法上の中小企業者」と「租税特別措置法上の中小法人」は判定基準が異なる別概念。税制の話は必ずどちらの基準か確認する。</a:t>
+            </a:r>
+            <a:endParaRPr lang="en-US" sz="900" dirty="0"/>
+          </a:p>
+        </p:txBody>
+      </p:sp>
+      <p:sp>
+        <p:nvSpPr>
+          <p:cNvPr id="17" name="Shape 15"/>
+          <p:cNvSpPr/>
+          <p:nvPr/>
+        </p:nvSpPr>
+        <p:spPr>
+          <a:xfrm>
+            <a:off x="7543800" y="1737360"/>
+            <a:ext cx="1783080" cy="3566160"/>
+          </a:xfrm>
+          <a:prstGeom prst="rect">
+            <a:avLst/>
+          </a:prstGeom>
+          <a:solidFill>
+            <a:srgbClr val="F4F4F4"/>
+          </a:solidFill>
           <a:ln w="12700">
             <a:solidFill>
-              <a:srgbClr val="E6E6E6"/>
+              <a:srgbClr val="171717"/>
             </a:solidFill>
             <a:prstDash val="solid"/>
           </a:ln>
@@ -11779,122 +11765,272 @@
       </p:sp>
       <p:sp>
         <p:nvSpPr>
-          <p:cNvPr id="19" name="Text 17"/>
-          <p:cNvSpPr txBox="1"/>
-          <p:nvPr/>
-        </p:nvSpPr>
-        <p:spPr>
-          <a:xfrm>
-            <a:off x="2926080" y="2734056"/>
-            <a:ext cx="8778240" cy="329184"/>
-          </a:xfrm>
-          <a:prstGeom prst="rect">
-            <a:avLst/>
-          </a:prstGeom>
-          <a:noFill/>
-          <a:ln/>
-        </p:spPr>
-        <p:txBody>
-          <a:bodyPr wrap="square" lIns="0" tIns="0" rIns="0" bIns="0" rtlCol="0" anchor="t"/>
-          <a:lstStyle/>
-          <a:p>
-            <a:pPr indent="0" marL="0">
-              <a:buNone/>
-            </a:pPr>
-            <a:r>
-              <a:rPr lang="en-US" sz="1000" dirty="0">
-                <a:solidFill>
-                  <a:srgbClr val="8A8A8A"/>
+          <p:cNvPr id="18" name="Text 16"/>
+          <p:cNvSpPr txBox="1"/>
+          <p:nvPr/>
+        </p:nvSpPr>
+        <p:spPr>
+          <a:xfrm>
+            <a:off x="7589520" y="1737360"/>
+            <a:ext cx="1691640" cy="3566160"/>
+          </a:xfrm>
+          <a:prstGeom prst="rect">
+            <a:avLst/>
+          </a:prstGeom>
+          <a:noFill/>
+          <a:ln/>
+        </p:spPr>
+        <p:txBody>
+          <a:bodyPr wrap="square" lIns="0" tIns="0" rIns="0" bIns="0" rtlCol="0" anchor="ctr"/>
+          <a:lstStyle/>
+          <a:p>
+            <a:pPr algn="ctr" indent="0" marL="0">
+              <a:lnSpc>
+                <a:spcPct val="115000"/>
+              </a:lnSpc>
+              <a:buNone/>
+            </a:pPr>
+            <a:r>
+              <a:rPr lang="en-US" sz="1100" b="1" dirty="0">
+                <a:solidFill>
+                  <a:srgbClr val="171717"/>
                 </a:solidFill>
                 <a:latin typeface="Yu Gothic" pitchFamily="34" charset="0"/>
                 <a:ea typeface="Yu Gothic" pitchFamily="34" charset="-122"/>
                 <a:cs typeface="Yu Gothic" pitchFamily="34" charset="-120"/>
               </a:rPr>
-              <a:t>業種問わず資本金1億円以下で一律判定（中小法人）。軽減税率や交際費特例等に適用</a:t>
-            </a:r>
-            <a:endParaRPr lang="en-US" sz="1000" dirty="0"/>
-          </a:p>
-        </p:txBody>
-      </p:sp>
-      <p:sp>
-        <p:nvSpPr>
-          <p:cNvPr id="20" name="Shape 18"/>
-          <p:cNvSpPr/>
-          <p:nvPr/>
-        </p:nvSpPr>
-        <p:spPr>
-          <a:xfrm>
-            <a:off x="502920" y="3154680"/>
-            <a:ext cx="11201400" cy="0"/>
-          </a:xfrm>
-          <a:prstGeom prst="line">
-            <a:avLst/>
-          </a:prstGeom>
-          <a:noFill/>
-          <a:ln w="12700">
-            <a:solidFill>
-              <a:srgbClr val="E6E6E6"/>
-            </a:solidFill>
-            <a:prstDash val="solid"/>
-          </a:ln>
-        </p:spPr>
-      </p:sp>
-      <p:sp>
-        <p:nvSpPr>
-          <p:cNvPr id="21" name="Text 19"/>
-          <p:cNvSpPr txBox="1"/>
-          <p:nvPr/>
-        </p:nvSpPr>
-        <p:spPr>
-          <a:xfrm>
-            <a:off x="502920" y="3227832"/>
-            <a:ext cx="11201400" cy="457200"/>
-          </a:xfrm>
-          <a:prstGeom prst="rect">
-            <a:avLst/>
-          </a:prstGeom>
-          <a:noFill/>
-          <a:ln/>
-        </p:spPr>
-        <p:txBody>
-          <a:bodyPr wrap="square" lIns="0" tIns="0" rIns="0" bIns="0" rtlCol="0" anchor="ctr"/>
-          <a:lstStyle/>
-          <a:p>
-            <a:pPr indent="0" marL="0">
+              <a:t>中小企業基本法
+</a:t>
+            </a:r>
+            <a:endParaRPr lang="en-US" sz="1100" dirty="0"/>
+          </a:p>
+          <a:p>
+            <a:pPr algn="ctr" indent="0" marL="0">
               <a:lnSpc>
-                <a:spcPct val="120000"/>
+                <a:spcPct val="115000"/>
               </a:lnSpc>
               <a:buNone/>
             </a:pPr>
             <a:r>
-              <a:rPr lang="en-US" sz="950" b="1" dirty="0">
-                <a:solidFill>
-                  <a:srgbClr val="FF3B1F"/>
+              <a:rPr lang="en-US" sz="850" dirty="0">
+                <a:solidFill>
+                  <a:srgbClr val="8A8A8A"/>
                 </a:solidFill>
                 <a:latin typeface="Yu Gothic" pitchFamily="34" charset="0"/>
                 <a:ea typeface="Yu Gothic" pitchFamily="34" charset="-122"/>
                 <a:cs typeface="Yu Gothic" pitchFamily="34" charset="-120"/>
               </a:rPr>
-              <a:t>ひっかけ：</a:t>
-            </a:r>
-            <a:pPr indent="0" marL="0">
+              <a:t>業種ごとに
+資本金 or 従業員数
+</a:t>
+            </a:r>
+            <a:endParaRPr lang="en-US" sz="1100" dirty="0"/>
+          </a:p>
+          <a:p>
+            <a:pPr algn="ctr" indent="0" marL="0">
               <a:lnSpc>
-                <a:spcPct val="120000"/>
+                <a:spcPct val="115000"/>
               </a:lnSpc>
               <a:buNone/>
             </a:pPr>
             <a:r>
-              <a:rPr lang="en-US" sz="950" dirty="0">
-                <a:solidFill>
-                  <a:srgbClr val="FF3B1F"/>
+              <a:rPr lang="en-US" sz="950" b="1" dirty="0">
+                <a:solidFill>
+                  <a:srgbClr val="171717"/>
                 </a:solidFill>
                 <a:latin typeface="Yu Gothic" pitchFamily="34" charset="0"/>
                 <a:ea typeface="Yu Gothic" pitchFamily="34" charset="-122"/>
                 <a:cs typeface="Yu Gothic" pitchFamily="34" charset="-120"/>
               </a:rPr>
-              <a:t>「中小企業基本法上の中小企業者」と「租税特別措置法上の中小法人」は判定基準が異なる別概念。税制の話は必ずどちらの基準か確認する。</a:t>
-            </a:r>
-            <a:endParaRPr lang="en-US" sz="950" dirty="0"/>
+              <a:t>「中小企業者」
+</a:t>
+            </a:r>
+            <a:endParaRPr lang="en-US" sz="1100" dirty="0"/>
+          </a:p>
+          <a:p>
+            <a:pPr algn="ctr" indent="0" marL="0">
+              <a:lnSpc>
+                <a:spcPct val="115000"/>
+              </a:lnSpc>
+              <a:buNone/>
+            </a:pPr>
+            <a:r>
+              <a:rPr lang="en-US" sz="750" dirty="0">
+                <a:solidFill>
+                  <a:srgbClr val="8A8A8A"/>
+                </a:solidFill>
+                <a:latin typeface="Yu Gothic" pitchFamily="34" charset="0"/>
+                <a:ea typeface="Yu Gothic" pitchFamily="34" charset="-122"/>
+                <a:cs typeface="Yu Gothic" pitchFamily="34" charset="-120"/>
+              </a:rPr>
+              <a:t>（業種別・G-1）</a:t>
+            </a:r>
+            <a:endParaRPr lang="en-US" sz="1100" dirty="0"/>
+          </a:p>
+        </p:txBody>
+      </p:sp>
+      <p:sp>
+        <p:nvSpPr>
+          <p:cNvPr id="19" name="Shape 17"/>
+          <p:cNvSpPr/>
+          <p:nvPr/>
+        </p:nvSpPr>
+        <p:spPr>
+          <a:xfrm>
+            <a:off x="9464040" y="1737360"/>
+            <a:ext cx="1783080" cy="3566160"/>
+          </a:xfrm>
+          <a:prstGeom prst="rect">
+            <a:avLst/>
+          </a:prstGeom>
+          <a:solidFill>
+            <a:srgbClr val="FF3B1F"/>
+          </a:solidFill>
+          <a:ln/>
+        </p:spPr>
+      </p:sp>
+      <p:sp>
+        <p:nvSpPr>
+          <p:cNvPr id="20" name="Text 18"/>
+          <p:cNvSpPr txBox="1"/>
+          <p:nvPr/>
+        </p:nvSpPr>
+        <p:spPr>
+          <a:xfrm>
+            <a:off x="9509760" y="1737360"/>
+            <a:ext cx="1691640" cy="3566160"/>
+          </a:xfrm>
+          <a:prstGeom prst="rect">
+            <a:avLst/>
+          </a:prstGeom>
+          <a:noFill/>
+          <a:ln/>
+        </p:spPr>
+        <p:txBody>
+          <a:bodyPr wrap="square" lIns="0" tIns="0" rIns="0" bIns="0" rtlCol="0" anchor="ctr"/>
+          <a:lstStyle/>
+          <a:p>
+            <a:pPr algn="ctr" indent="0" marL="0">
+              <a:lnSpc>
+                <a:spcPct val="115000"/>
+              </a:lnSpc>
+              <a:buNone/>
+            </a:pPr>
+            <a:r>
+              <a:rPr lang="en-US" sz="1100" b="1" dirty="0">
+                <a:solidFill>
+                  <a:srgbClr val="FFFFFF"/>
+                </a:solidFill>
+                <a:latin typeface="Yu Gothic" pitchFamily="34" charset="0"/>
+                <a:ea typeface="Yu Gothic" pitchFamily="34" charset="-122"/>
+                <a:cs typeface="Yu Gothic" pitchFamily="34" charset="-120"/>
+              </a:rPr>
+              <a:t>租税特別措置法
+</a:t>
+            </a:r>
+            <a:endParaRPr lang="en-US" sz="1100" dirty="0"/>
+          </a:p>
+          <a:p>
+            <a:pPr algn="ctr" indent="0" marL="0">
+              <a:lnSpc>
+                <a:spcPct val="115000"/>
+              </a:lnSpc>
+              <a:buNone/>
+            </a:pPr>
+            <a:r>
+              <a:rPr lang="en-US" sz="850" dirty="0">
+                <a:solidFill>
+                  <a:srgbClr val="FFFFFF"/>
+                </a:solidFill>
+                <a:latin typeface="Yu Gothic" pitchFamily="34" charset="0"/>
+                <a:ea typeface="Yu Gothic" pitchFamily="34" charset="-122"/>
+                <a:cs typeface="Yu Gothic" pitchFamily="34" charset="-120"/>
+              </a:rPr>
+              <a:t>業種問わず
+資本金1億円以下
+</a:t>
+            </a:r>
+            <a:endParaRPr lang="en-US" sz="1100" dirty="0"/>
+          </a:p>
+          <a:p>
+            <a:pPr algn="ctr" indent="0" marL="0">
+              <a:lnSpc>
+                <a:spcPct val="115000"/>
+              </a:lnSpc>
+              <a:buNone/>
+            </a:pPr>
+            <a:r>
+              <a:rPr lang="en-US" sz="950" b="1" dirty="0">
+                <a:solidFill>
+                  <a:srgbClr val="FFFFFF"/>
+                </a:solidFill>
+                <a:latin typeface="Yu Gothic" pitchFamily="34" charset="0"/>
+                <a:ea typeface="Yu Gothic" pitchFamily="34" charset="-122"/>
+                <a:cs typeface="Yu Gothic" pitchFamily="34" charset="-120"/>
+              </a:rPr>
+              <a:t>「中小法人」
+</a:t>
+            </a:r>
+            <a:endParaRPr lang="en-US" sz="1100" dirty="0"/>
+          </a:p>
+          <a:p>
+            <a:pPr algn="ctr" indent="0" marL="0">
+              <a:lnSpc>
+                <a:spcPct val="115000"/>
+              </a:lnSpc>
+              <a:buNone/>
+            </a:pPr>
+            <a:r>
+              <a:rPr lang="en-US" sz="750" dirty="0">
+                <a:solidFill>
+                  <a:srgbClr val="FFFFFF"/>
+                </a:solidFill>
+                <a:latin typeface="Yu Gothic" pitchFamily="34" charset="0"/>
+                <a:ea typeface="Yu Gothic" pitchFamily="34" charset="-122"/>
+                <a:cs typeface="Yu Gothic" pitchFamily="34" charset="-120"/>
+              </a:rPr>
+              <a:t>（一律・税制優遇）</a:t>
+            </a:r>
+            <a:endParaRPr lang="en-US" sz="1100" dirty="0"/>
+          </a:p>
+        </p:txBody>
+      </p:sp>
+      <p:sp>
+        <p:nvSpPr>
+          <p:cNvPr id="21" name="Text 19"/>
+          <p:cNvSpPr txBox="1"/>
+          <p:nvPr/>
+        </p:nvSpPr>
+        <p:spPr>
+          <a:xfrm>
+            <a:off x="7543800" y="5394960"/>
+            <a:ext cx="3703320" cy="274320"/>
+          </a:xfrm>
+          <a:prstGeom prst="rect">
+            <a:avLst/>
+          </a:prstGeom>
+          <a:noFill/>
+          <a:ln/>
+        </p:spPr>
+        <p:txBody>
+          <a:bodyPr wrap="square" lIns="0" tIns="0" rIns="0" bIns="0" rtlCol="0" anchor="ctr"/>
+          <a:lstStyle/>
+          <a:p>
+            <a:pPr algn="ctr" indent="0" marL="0">
+              <a:buNone/>
+            </a:pPr>
+            <a:r>
+              <a:rPr lang="en-US" sz="850" dirty="0">
+                <a:solidFill>
+                  <a:srgbClr val="8A8A8A"/>
+                </a:solidFill>
+                <a:latin typeface="Yu Gothic" pitchFamily="34" charset="0"/>
+                <a:ea typeface="Yu Gothic" pitchFamily="34" charset="-122"/>
+                <a:cs typeface="Yu Gothic" pitchFamily="34" charset="-120"/>
+              </a:rPr>
+              <a:t>判定基準が違う「別の中小企業」の話</a:t>
+            </a:r>
+            <a:endParaRPr lang="en-US" sz="850" dirty="0"/>
           </a:p>
         </p:txBody>
       </p:sp>
@@ -19373,45 +19509,87 @@
         <p:spPr>
           <a:xfrm>
             <a:off x="502920" y="1691640"/>
-            <a:ext cx="2194560" cy="347472"/>
-          </a:xfrm>
-          <a:prstGeom prst="rect">
-            <a:avLst/>
-          </a:prstGeom>
-          <a:noFill/>
-          <a:ln/>
-        </p:spPr>
-        <p:txBody>
-          <a:bodyPr wrap="square" lIns="0" tIns="0" rIns="0" bIns="0" rtlCol="0" anchor="t"/>
-          <a:lstStyle/>
-          <a:p>
-            <a:pPr indent="0" marL="0">
-              <a:buNone/>
-            </a:pPr>
-            <a:r>
-              <a:rPr lang="en-US" sz="950" b="1" dirty="0">
-                <a:solidFill>
-                  <a:srgbClr val="171717"/>
+            <a:ext cx="6766560" cy="777240"/>
+          </a:xfrm>
+          <a:prstGeom prst="rect">
+            <a:avLst/>
+          </a:prstGeom>
+          <a:noFill/>
+          <a:ln/>
+        </p:spPr>
+        <p:txBody>
+          <a:bodyPr wrap="square" lIns="0" tIns="0" rIns="0" bIns="0" rtlCol="0" anchor="ctr"/>
+          <a:lstStyle/>
+          <a:p>
+            <a:pPr indent="0" marL="0">
+              <a:lnSpc>
+                <a:spcPct val="130000"/>
+              </a:lnSpc>
+              <a:buNone/>
+            </a:pPr>
+            <a:r>
+              <a:rPr lang="en-US" sz="1050" dirty="0">
+                <a:solidFill>
+                  <a:srgbClr val="8A8A8A"/>
                 </a:solidFill>
                 <a:latin typeface="Yu Gothic" pitchFamily="34" charset="0"/>
                 <a:ea typeface="Yu Gothic" pitchFamily="34" charset="-122"/>
                 <a:cs typeface="Yu Gothic" pitchFamily="34" charset="-120"/>
               </a:rPr>
-              <a:t>DX</a:t>
-            </a:r>
-            <a:endParaRPr lang="en-US" sz="950" dirty="0"/>
-          </a:p>
-        </p:txBody>
-      </p:sp>
-      <p:sp>
-        <p:nvSpPr>
-          <p:cNvPr id="9" name="Shape 7"/>
-          <p:cNvSpPr/>
-          <p:nvPr/>
-        </p:nvSpPr>
-        <p:spPr>
-          <a:xfrm>
-            <a:off x="2679192" y="1691640"/>
+              <a:t>DXは「ITツールを導入すること」自体ではなく、デジタル技術を土台に業務プロセスやビジネスモデルそのものを変革し、競争優位を確立する取り組みを指す。右図の3段階のうち、どこまで進んでいるかが問われる。</a:t>
+            </a:r>
+            <a:endParaRPr lang="en-US" sz="1050" dirty="0"/>
+          </a:p>
+        </p:txBody>
+      </p:sp>
+      <p:sp>
+        <p:nvSpPr>
+          <p:cNvPr id="9" name="Text 7"/>
+          <p:cNvSpPr txBox="1"/>
+          <p:nvPr/>
+        </p:nvSpPr>
+        <p:spPr>
+          <a:xfrm>
+            <a:off x="502920" y="2560320"/>
+            <a:ext cx="2103120" cy="347472"/>
+          </a:xfrm>
+          <a:prstGeom prst="rect">
+            <a:avLst/>
+          </a:prstGeom>
+          <a:noFill/>
+          <a:ln/>
+        </p:spPr>
+        <p:txBody>
+          <a:bodyPr wrap="square" lIns="0" tIns="0" rIns="0" bIns="0" rtlCol="0" anchor="t"/>
+          <a:lstStyle/>
+          <a:p>
+            <a:pPr indent="0" marL="0">
+              <a:buNone/>
+            </a:pPr>
+            <a:r>
+              <a:rPr lang="en-US" sz="1000" b="1" dirty="0">
+                <a:solidFill>
+                  <a:srgbClr val="171717"/>
+                </a:solidFill>
+                <a:latin typeface="Yu Gothic" pitchFamily="34" charset="0"/>
+                <a:ea typeface="Yu Gothic" pitchFamily="34" charset="-122"/>
+                <a:cs typeface="Yu Gothic" pitchFamily="34" charset="-120"/>
+              </a:rPr>
+              <a:t>DX認定制度</a:t>
+            </a:r>
+            <a:endParaRPr lang="en-US" sz="1000" dirty="0"/>
+          </a:p>
+        </p:txBody>
+      </p:sp>
+      <p:sp>
+        <p:nvSpPr>
+          <p:cNvPr id="10" name="Shape 8"/>
+          <p:cNvSpPr/>
+          <p:nvPr/>
+        </p:nvSpPr>
+        <p:spPr>
+          <a:xfrm>
+            <a:off x="2587752" y="2560320"/>
             <a:ext cx="0" cy="256032"/>
           </a:xfrm>
           <a:prstGeom prst="line">
@@ -19428,14 +19606,14 @@
       </p:sp>
       <p:sp>
         <p:nvSpPr>
-          <p:cNvPr id="10" name="Text 8"/>
-          <p:cNvSpPr txBox="1"/>
-          <p:nvPr/>
-        </p:nvSpPr>
-        <p:spPr>
-          <a:xfrm>
-            <a:off x="2834640" y="1691640"/>
-            <a:ext cx="8869680" cy="347472"/>
+          <p:cNvPr id="11" name="Text 9"/>
+          <p:cNvSpPr txBox="1"/>
+          <p:nvPr/>
+        </p:nvSpPr>
+        <p:spPr>
+          <a:xfrm>
+            <a:off x="2743200" y="2560320"/>
+            <a:ext cx="4526280" cy="347472"/>
           </a:xfrm>
           <a:prstGeom prst="rect">
             <a:avLst/>
@@ -19451,7 +19629,7 @@
               <a:buNone/>
             </a:pPr>
             <a:r>
-              <a:rPr lang="en-US" sz="950" dirty="0">
+              <a:rPr lang="en-US" sz="1000" dirty="0">
                 <a:solidFill>
                   <a:srgbClr val="8A8A8A"/>
                 </a:solidFill>
@@ -19459,22 +19637,22 @@
                 <a:ea typeface="Yu Gothic" pitchFamily="34" charset="-122"/>
                 <a:cs typeface="Yu Gothic" pitchFamily="34" charset="-120"/>
               </a:rPr>
-              <a:t>デジタル技術で業務プロセス・ビジネスモデルを変革し競争優位を確立</a:t>
-            </a:r>
-            <a:endParaRPr lang="en-US" sz="950" dirty="0"/>
-          </a:p>
-        </p:txBody>
-      </p:sp>
-      <p:sp>
-        <p:nvSpPr>
-          <p:cNvPr id="11" name="Text 9"/>
-          <p:cNvSpPr txBox="1"/>
-          <p:nvPr/>
-        </p:nvSpPr>
-        <p:spPr>
-          <a:xfrm>
-            <a:off x="502920" y="2057400"/>
-            <a:ext cx="2194560" cy="347472"/>
+              <a:t>企業のDXへの取り組み方針を経済産業省が認定する制度</a:t>
+            </a:r>
+            <a:endParaRPr lang="en-US" sz="1000" dirty="0"/>
+          </a:p>
+        </p:txBody>
+      </p:sp>
+      <p:sp>
+        <p:nvSpPr>
+          <p:cNvPr id="12" name="Text 10"/>
+          <p:cNvSpPr txBox="1"/>
+          <p:nvPr/>
+        </p:nvSpPr>
+        <p:spPr>
+          <a:xfrm>
+            <a:off x="502920" y="2926080"/>
+            <a:ext cx="2103120" cy="347472"/>
           </a:xfrm>
           <a:prstGeom prst="rect">
             <a:avLst/>
@@ -19490,7 +19668,7 @@
               <a:buNone/>
             </a:pPr>
             <a:r>
-              <a:rPr lang="en-US" sz="950" b="1" dirty="0">
+              <a:rPr lang="en-US" sz="1000" b="1" dirty="0">
                 <a:solidFill>
                   <a:srgbClr val="171717"/>
                 </a:solidFill>
@@ -19498,21 +19676,21 @@
                 <a:ea typeface="Yu Gothic" pitchFamily="34" charset="-122"/>
                 <a:cs typeface="Yu Gothic" pitchFamily="34" charset="-120"/>
               </a:rPr>
-              <a:t>段階の違い</a:t>
-            </a:r>
-            <a:endParaRPr lang="en-US" sz="950" dirty="0"/>
-          </a:p>
-        </p:txBody>
-      </p:sp>
-      <p:sp>
-        <p:nvSpPr>
-          <p:cNvPr id="12" name="Shape 10"/>
-          <p:cNvSpPr/>
-          <p:nvPr/>
-        </p:nvSpPr>
-        <p:spPr>
-          <a:xfrm>
-            <a:off x="2679192" y="2057400"/>
+              <a:t>中小企業のDXの遅れ</a:t>
+            </a:r>
+            <a:endParaRPr lang="en-US" sz="1000" dirty="0"/>
+          </a:p>
+        </p:txBody>
+      </p:sp>
+      <p:sp>
+        <p:nvSpPr>
+          <p:cNvPr id="13" name="Shape 11"/>
+          <p:cNvSpPr/>
+          <p:nvPr/>
+        </p:nvSpPr>
+        <p:spPr>
+          <a:xfrm>
+            <a:off x="2587752" y="2926080"/>
             <a:ext cx="0" cy="256032"/>
           </a:xfrm>
           <a:prstGeom prst="line">
@@ -19529,14 +19707,14 @@
       </p:sp>
       <p:sp>
         <p:nvSpPr>
-          <p:cNvPr id="13" name="Text 11"/>
-          <p:cNvSpPr txBox="1"/>
-          <p:nvPr/>
-        </p:nvSpPr>
-        <p:spPr>
-          <a:xfrm>
-            <a:off x="2834640" y="2057400"/>
-            <a:ext cx="8869680" cy="347472"/>
+          <p:cNvPr id="14" name="Text 12"/>
+          <p:cNvSpPr txBox="1"/>
+          <p:nvPr/>
+        </p:nvSpPr>
+        <p:spPr>
+          <a:xfrm>
+            <a:off x="2743200" y="2926080"/>
+            <a:ext cx="4526280" cy="347472"/>
           </a:xfrm>
           <a:prstGeom prst="rect">
             <a:avLst/>
@@ -19552,7 +19730,7 @@
               <a:buNone/>
             </a:pPr>
             <a:r>
-              <a:rPr lang="en-US" sz="950" dirty="0">
+              <a:rPr lang="en-US" sz="1000" dirty="0">
                 <a:solidFill>
                   <a:srgbClr val="8A8A8A"/>
                 </a:solidFill>
@@ -19560,48 +19738,9 @@
                 <a:ea typeface="Yu Gothic" pitchFamily="34" charset="-122"/>
                 <a:cs typeface="Yu Gothic" pitchFamily="34" charset="-120"/>
               </a:rPr>
-              <a:t>デジタイゼーション（単純デジタル化）→デジタライゼーション（業務効率化）→DX（事業変革）の順に広がる</a:t>
-            </a:r>
-            <a:endParaRPr lang="en-US" sz="950" dirty="0"/>
-          </a:p>
-        </p:txBody>
-      </p:sp>
-      <p:sp>
-        <p:nvSpPr>
-          <p:cNvPr id="14" name="Text 12"/>
-          <p:cNvSpPr txBox="1"/>
-          <p:nvPr/>
-        </p:nvSpPr>
-        <p:spPr>
-          <a:xfrm>
-            <a:off x="502920" y="2423160"/>
-            <a:ext cx="2194560" cy="347472"/>
-          </a:xfrm>
-          <a:prstGeom prst="rect">
-            <a:avLst/>
-          </a:prstGeom>
-          <a:noFill/>
-          <a:ln/>
-        </p:spPr>
-        <p:txBody>
-          <a:bodyPr wrap="square" lIns="0" tIns="0" rIns="0" bIns="0" rtlCol="0" anchor="t"/>
-          <a:lstStyle/>
-          <a:p>
-            <a:pPr indent="0" marL="0">
-              <a:buNone/>
-            </a:pPr>
-            <a:r>
-              <a:rPr lang="en-US" sz="950" b="1" dirty="0">
-                <a:solidFill>
-                  <a:srgbClr val="171717"/>
-                </a:solidFill>
-                <a:latin typeface="Yu Gothic" pitchFamily="34" charset="0"/>
-                <a:ea typeface="Yu Gothic" pitchFamily="34" charset="-122"/>
-                <a:cs typeface="Yu Gothic" pitchFamily="34" charset="-120"/>
-              </a:rPr>
-              <a:t>DX認定制度</a:t>
-            </a:r>
-            <a:endParaRPr lang="en-US" sz="950" dirty="0"/>
+              <a:t>大企業に比べ人材・予算の制約から取り組みが遅れがち</a:t>
+            </a:r>
+            <a:endParaRPr lang="en-US" sz="1000" dirty="0"/>
           </a:p>
         </p:txBody>
       </p:sp>
@@ -19613,8 +19752,8 @@
         </p:nvSpPr>
         <p:spPr>
           <a:xfrm>
-            <a:off x="2679192" y="2423160"/>
-            <a:ext cx="0" cy="256032"/>
+            <a:off x="502920" y="3383280"/>
+            <a:ext cx="6766560" cy="0"/>
           </a:xfrm>
           <a:prstGeom prst="line">
             <a:avLst/>
@@ -19636,71 +19775,52 @@
         </p:nvSpPr>
         <p:spPr>
           <a:xfrm>
-            <a:off x="2834640" y="2423160"/>
-            <a:ext cx="8869680" cy="347472"/>
-          </a:xfrm>
-          <a:prstGeom prst="rect">
-            <a:avLst/>
-          </a:prstGeom>
-          <a:noFill/>
-          <a:ln/>
-        </p:spPr>
-        <p:txBody>
-          <a:bodyPr wrap="square" lIns="0" tIns="0" rIns="0" bIns="0" rtlCol="0" anchor="t"/>
-          <a:lstStyle/>
-          <a:p>
-            <a:pPr indent="0" marL="0">
-              <a:buNone/>
-            </a:pPr>
-            <a:r>
-              <a:rPr lang="en-US" sz="950" dirty="0">
-                <a:solidFill>
-                  <a:srgbClr val="8A8A8A"/>
+            <a:off x="502920" y="3456432"/>
+            <a:ext cx="6766560" cy="548640"/>
+          </a:xfrm>
+          <a:prstGeom prst="rect">
+            <a:avLst/>
+          </a:prstGeom>
+          <a:noFill/>
+          <a:ln/>
+        </p:spPr>
+        <p:txBody>
+          <a:bodyPr wrap="square" lIns="0" tIns="0" rIns="0" bIns="0" rtlCol="0" anchor="ctr"/>
+          <a:lstStyle/>
+          <a:p>
+            <a:pPr indent="0" marL="0">
+              <a:lnSpc>
+                <a:spcPct val="120000"/>
+              </a:lnSpc>
+              <a:buNone/>
+            </a:pPr>
+            <a:r>
+              <a:rPr lang="en-US" sz="950" b="1" dirty="0">
+                <a:solidFill>
+                  <a:srgbClr val="FF3B1F"/>
                 </a:solidFill>
                 <a:latin typeface="Yu Gothic" pitchFamily="34" charset="0"/>
                 <a:ea typeface="Yu Gothic" pitchFamily="34" charset="-122"/>
                 <a:cs typeface="Yu Gothic" pitchFamily="34" charset="-120"/>
               </a:rPr>
-              <a:t>企業のDXへの取り組み方針を経済産業省が認定する制度</a:t>
-            </a:r>
-            <a:endParaRPr lang="en-US" sz="950" dirty="0"/>
-          </a:p>
-        </p:txBody>
-      </p:sp>
-      <p:sp>
-        <p:nvSpPr>
-          <p:cNvPr id="17" name="Text 15"/>
-          <p:cNvSpPr txBox="1"/>
-          <p:nvPr/>
-        </p:nvSpPr>
-        <p:spPr>
-          <a:xfrm>
-            <a:off x="502920" y="2788920"/>
-            <a:ext cx="2194560" cy="347472"/>
-          </a:xfrm>
-          <a:prstGeom prst="rect">
-            <a:avLst/>
-          </a:prstGeom>
-          <a:noFill/>
-          <a:ln/>
-        </p:spPr>
-        <p:txBody>
-          <a:bodyPr wrap="square" lIns="0" tIns="0" rIns="0" bIns="0" rtlCol="0" anchor="t"/>
-          <a:lstStyle/>
-          <a:p>
-            <a:pPr indent="0" marL="0">
-              <a:buNone/>
-            </a:pPr>
-            <a:r>
-              <a:rPr lang="en-US" sz="950" b="1" dirty="0">
-                <a:solidFill>
-                  <a:srgbClr val="171717"/>
+              <a:t>ひっかけ：</a:t>
+            </a:r>
+            <a:pPr indent="0" marL="0">
+              <a:lnSpc>
+                <a:spcPct val="120000"/>
+              </a:lnSpc>
+              <a:buNone/>
+            </a:pPr>
+            <a:r>
+              <a:rPr lang="en-US" sz="950" dirty="0">
+                <a:solidFill>
+                  <a:srgbClr val="FF3B1F"/>
                 </a:solidFill>
                 <a:latin typeface="Yu Gothic" pitchFamily="34" charset="0"/>
                 <a:ea typeface="Yu Gothic" pitchFamily="34" charset="-122"/>
                 <a:cs typeface="Yu Gothic" pitchFamily="34" charset="-120"/>
               </a:rPr>
-              <a:t>中小企業のDXの遅れ</a:t>
+              <a:t>ツール導入自体はDXの手段の一つ。業務プロセス・事業モデルの変革を伴って初めてDXと呼べる。</a:t>
             </a:r>
             <a:endParaRPr lang="en-US" sz="950" dirty="0"/>
           </a:p>
@@ -19708,19 +19828,21 @@
       </p:sp>
       <p:sp>
         <p:nvSpPr>
-          <p:cNvPr id="18" name="Shape 16"/>
-          <p:cNvSpPr/>
-          <p:nvPr/>
-        </p:nvSpPr>
-        <p:spPr>
-          <a:xfrm>
-            <a:off x="2679192" y="2788920"/>
-            <a:ext cx="0" cy="256032"/>
-          </a:xfrm>
-          <a:prstGeom prst="line">
-            <a:avLst/>
-          </a:prstGeom>
-          <a:noFill/>
+          <p:cNvPr id="17" name="Shape 15"/>
+          <p:cNvSpPr/>
+          <p:nvPr/>
+        </p:nvSpPr>
+        <p:spPr>
+          <a:xfrm>
+            <a:off x="7543800" y="1737360"/>
+            <a:ext cx="3703320" cy="1085088"/>
+          </a:xfrm>
+          <a:prstGeom prst="rect">
+            <a:avLst/>
+          </a:prstGeom>
+          <a:solidFill>
+            <a:srgbClr val="F4F4F4"/>
+          </a:solidFill>
           <a:ln w="12700">
             <a:solidFill>
               <a:srgbClr val="E6E6E6"/>
@@ -19731,40 +19853,129 @@
       </p:sp>
       <p:sp>
         <p:nvSpPr>
-          <p:cNvPr id="19" name="Text 17"/>
-          <p:cNvSpPr txBox="1"/>
-          <p:nvPr/>
-        </p:nvSpPr>
-        <p:spPr>
-          <a:xfrm>
-            <a:off x="2834640" y="2788920"/>
-            <a:ext cx="8869680" cy="347472"/>
-          </a:xfrm>
-          <a:prstGeom prst="rect">
-            <a:avLst/>
-          </a:prstGeom>
-          <a:noFill/>
-          <a:ln/>
-        </p:spPr>
-        <p:txBody>
-          <a:bodyPr wrap="square" lIns="0" tIns="0" rIns="0" bIns="0" rtlCol="0" anchor="t"/>
-          <a:lstStyle/>
-          <a:p>
-            <a:pPr indent="0" marL="0">
-              <a:buNone/>
-            </a:pPr>
-            <a:r>
-              <a:rPr lang="en-US" sz="950" dirty="0">
-                <a:solidFill>
-                  <a:srgbClr val="8A8A8A"/>
+          <p:cNvPr id="18" name="Text 16"/>
+          <p:cNvSpPr txBox="1"/>
+          <p:nvPr/>
+        </p:nvSpPr>
+        <p:spPr>
+          <a:xfrm>
+            <a:off x="7543800" y="1737360"/>
+            <a:ext cx="3703320" cy="1085088"/>
+          </a:xfrm>
+          <a:prstGeom prst="rect">
+            <a:avLst/>
+          </a:prstGeom>
+          <a:noFill/>
+          <a:ln/>
+        </p:spPr>
+        <p:txBody>
+          <a:bodyPr wrap="square" lIns="0" tIns="0" rIns="0" bIns="0" rtlCol="0" anchor="ctr"/>
+          <a:lstStyle/>
+          <a:p>
+            <a:pPr algn="ctr" indent="0" marL="0">
+              <a:lnSpc>
+                <a:spcPct val="115000"/>
+              </a:lnSpc>
+              <a:buNone/>
+            </a:pPr>
+            <a:r>
+              <a:rPr lang="en-US" sz="900" b="1" dirty="0">
+                <a:solidFill>
+                  <a:srgbClr val="FF3B1F"/>
+                </a:solidFill>
+                <a:latin typeface="Consolas" pitchFamily="34" charset="0"/>
+                <a:ea typeface="Consolas" pitchFamily="34" charset="-122"/>
+                <a:cs typeface="Consolas" pitchFamily="34" charset="-120"/>
+              </a:rPr>
+              <a:t>①
+</a:t>
+            </a:r>
+            <a:endParaRPr lang="en-US" sz="900" dirty="0"/>
+          </a:p>
+          <a:p>
+            <a:pPr algn="ctr" indent="0" marL="0">
+              <a:lnSpc>
+                <a:spcPct val="115000"/>
+              </a:lnSpc>
+              <a:buNone/>
+            </a:pPr>
+            <a:r>
+              <a:rPr lang="en-US" sz="1600" b="1" dirty="0">
+                <a:solidFill>
+                  <a:srgbClr val="171717"/>
                 </a:solidFill>
                 <a:latin typeface="Yu Gothic" pitchFamily="34" charset="0"/>
                 <a:ea typeface="Yu Gothic" pitchFamily="34" charset="-122"/>
                 <a:cs typeface="Yu Gothic" pitchFamily="34" charset="-120"/>
               </a:rPr>
-              <a:t>大企業に比べ人材・予算の制約から取り組みが遅れがちと白書で繰り返し指摘される</a:t>
-            </a:r>
-            <a:endParaRPr lang="en-US" sz="950" dirty="0"/>
+              <a:t>デジタイゼーション</a:t>
+            </a:r>
+            <a:pPr algn="ctr" indent="0" marL="0">
+              <a:lnSpc>
+                <a:spcPct val="115000"/>
+              </a:lnSpc>
+              <a:buNone/>
+            </a:pPr>
+            <a:endParaRPr lang="en-US" sz="900" dirty="0"/>
+          </a:p>
+          <a:p>
+            <a:pPr algn="ctr" indent="0" marL="0">
+              <a:lnSpc>
+                <a:spcPct val="115000"/>
+              </a:lnSpc>
+              <a:buNone/>
+            </a:pPr>
+            <a:r>
+              <a:rPr lang="en-US" sz="1000" b="1" dirty="0">
+                <a:solidFill>
+                  <a:srgbClr val="FF3B1F"/>
+                </a:solidFill>
+                <a:latin typeface="Yu Gothic" pitchFamily="34" charset="0"/>
+                <a:ea typeface="Yu Gothic" pitchFamily="34" charset="-122"/>
+                <a:cs typeface="Yu Gothic" pitchFamily="34" charset="-120"/>
+              </a:rPr>
+              <a:t>紙を単純にデータ化するだけ</a:t>
+            </a:r>
+            <a:endParaRPr lang="en-US" sz="900" dirty="0"/>
+          </a:p>
+        </p:txBody>
+      </p:sp>
+      <p:sp>
+        <p:nvSpPr>
+          <p:cNvPr id="19" name="Text 17"/>
+          <p:cNvSpPr txBox="1"/>
+          <p:nvPr/>
+        </p:nvSpPr>
+        <p:spPr>
+          <a:xfrm>
+            <a:off x="7543800" y="2822448"/>
+            <a:ext cx="3703320" cy="201168"/>
+          </a:xfrm>
+          <a:prstGeom prst="rect">
+            <a:avLst/>
+          </a:prstGeom>
+          <a:noFill/>
+          <a:ln/>
+        </p:spPr>
+        <p:txBody>
+          <a:bodyPr wrap="square" lIns="0" tIns="0" rIns="0" bIns="0" rtlCol="0" anchor="ctr"/>
+          <a:lstStyle/>
+          <a:p>
+            <a:pPr algn="ctr" indent="0" marL="0">
+              <a:buNone/>
+            </a:pPr>
+            <a:r>
+              <a:rPr lang="en-US" sz="1300" dirty="0">
+                <a:solidFill>
+                  <a:srgbClr val="8A8A8A"/>
+                </a:solidFill>
+                <a:latin typeface="Yu Gothic" pitchFamily="34" charset="0"/>
+                <a:ea typeface="Yu Gothic" pitchFamily="34" charset="-122"/>
+                <a:cs typeface="Yu Gothic" pitchFamily="34" charset="-120"/>
+              </a:rPr>
+              <a:t>↓</a:t>
+            </a:r>
+            <a:endParaRPr lang="en-US" sz="1300" dirty="0"/>
           </a:p>
         </p:txBody>
       </p:sp>
@@ -19776,13 +19987,15 @@
         </p:nvSpPr>
         <p:spPr>
           <a:xfrm>
-            <a:off x="502920" y="3246120"/>
-            <a:ext cx="11201400" cy="0"/>
-          </a:xfrm>
-          <a:prstGeom prst="line">
-            <a:avLst/>
-          </a:prstGeom>
-          <a:noFill/>
+            <a:off x="7543800" y="3023616"/>
+            <a:ext cx="3703320" cy="1085088"/>
+          </a:xfrm>
+          <a:prstGeom prst="rect">
+            <a:avLst/>
+          </a:prstGeom>
+          <a:solidFill>
+            <a:srgbClr val="F4F4F4"/>
+          </a:solidFill>
           <a:ln w="12700">
             <a:solidFill>
               <a:srgbClr val="E6E6E6"/>
@@ -19799,44 +20012,74 @@
         </p:nvSpPr>
         <p:spPr>
           <a:xfrm>
-            <a:off x="502920" y="3319272"/>
-            <a:ext cx="11201400" cy="457200"/>
-          </a:xfrm>
-          <a:prstGeom prst="rect">
-            <a:avLst/>
-          </a:prstGeom>
-          <a:noFill/>
-          <a:ln/>
-        </p:spPr>
-        <p:txBody>
-          <a:bodyPr wrap="square" lIns="0" tIns="0" rIns="0" bIns="0" rtlCol="0" anchor="ctr"/>
-          <a:lstStyle/>
-          <a:p>
-            <a:pPr indent="0" marL="0">
+            <a:off x="7543800" y="3023616"/>
+            <a:ext cx="3703320" cy="1085088"/>
+          </a:xfrm>
+          <a:prstGeom prst="rect">
+            <a:avLst/>
+          </a:prstGeom>
+          <a:noFill/>
+          <a:ln/>
+        </p:spPr>
+        <p:txBody>
+          <a:bodyPr wrap="square" lIns="0" tIns="0" rIns="0" bIns="0" rtlCol="0" anchor="ctr"/>
+          <a:lstStyle/>
+          <a:p>
+            <a:pPr algn="ctr" indent="0" marL="0">
               <a:lnSpc>
-                <a:spcPct val="120000"/>
+                <a:spcPct val="115000"/>
               </a:lnSpc>
               <a:buNone/>
             </a:pPr>
             <a:r>
-              <a:rPr lang="en-US" sz="950" b="1" dirty="0">
+              <a:rPr lang="en-US" sz="900" b="1" dirty="0">
                 <a:solidFill>
                   <a:srgbClr val="FF3B1F"/>
+                </a:solidFill>
+                <a:latin typeface="Consolas" pitchFamily="34" charset="0"/>
+                <a:ea typeface="Consolas" pitchFamily="34" charset="-122"/>
+                <a:cs typeface="Consolas" pitchFamily="34" charset="-120"/>
+              </a:rPr>
+              <a:t>②
+</a:t>
+            </a:r>
+            <a:endParaRPr lang="en-US" sz="900" dirty="0"/>
+          </a:p>
+          <a:p>
+            <a:pPr algn="ctr" indent="0" marL="0">
+              <a:lnSpc>
+                <a:spcPct val="115000"/>
+              </a:lnSpc>
+              <a:buNone/>
+            </a:pPr>
+            <a:r>
+              <a:rPr lang="en-US" sz="1600" b="1" dirty="0">
+                <a:solidFill>
+                  <a:srgbClr val="171717"/>
                 </a:solidFill>
                 <a:latin typeface="Yu Gothic" pitchFamily="34" charset="0"/>
                 <a:ea typeface="Yu Gothic" pitchFamily="34" charset="-122"/>
                 <a:cs typeface="Yu Gothic" pitchFamily="34" charset="-120"/>
               </a:rPr>
-              <a:t>ひっかけ：</a:t>
-            </a:r>
-            <a:pPr indent="0" marL="0">
+              <a:t>デジタライゼーション</a:t>
+            </a:r>
+            <a:pPr algn="ctr" indent="0" marL="0">
               <a:lnSpc>
-                <a:spcPct val="120000"/>
+                <a:spcPct val="115000"/>
               </a:lnSpc>
               <a:buNone/>
             </a:pPr>
-            <a:r>
-              <a:rPr lang="en-US" sz="950" dirty="0">
+            <a:endParaRPr lang="en-US" sz="900" dirty="0"/>
+          </a:p>
+          <a:p>
+            <a:pPr algn="ctr" indent="0" marL="0">
+              <a:lnSpc>
+                <a:spcPct val="115000"/>
+              </a:lnSpc>
+              <a:buNone/>
+            </a:pPr>
+            <a:r>
+              <a:rPr lang="en-US" sz="1000" b="1" dirty="0">
                 <a:solidFill>
                   <a:srgbClr val="FF3B1F"/>
                 </a:solidFill>
@@ -19844,15 +20087,168 @@
                 <a:ea typeface="Yu Gothic" pitchFamily="34" charset="-122"/>
                 <a:cs typeface="Yu Gothic" pitchFamily="34" charset="-120"/>
               </a:rPr>
-              <a:t>ツール導入自体はDXの手段の一つ。業務プロセス・事業モデルの変革を伴って初めてDXと呼べる。</a:t>
-            </a:r>
-            <a:endParaRPr lang="en-US" sz="950" dirty="0"/>
-          </a:p>
-        </p:txBody>
-      </p:sp>
-      <p:sp>
-        <p:nvSpPr>
-          <p:cNvPr id="22" name="Shape 20"/>
+              <a:t>個々の業務プロセスを効率化</a:t>
+            </a:r>
+            <a:endParaRPr lang="en-US" sz="900" dirty="0"/>
+          </a:p>
+        </p:txBody>
+      </p:sp>
+      <p:sp>
+        <p:nvSpPr>
+          <p:cNvPr id="22" name="Text 20"/>
+          <p:cNvSpPr txBox="1"/>
+          <p:nvPr/>
+        </p:nvSpPr>
+        <p:spPr>
+          <a:xfrm>
+            <a:off x="7543800" y="4108704"/>
+            <a:ext cx="3703320" cy="201168"/>
+          </a:xfrm>
+          <a:prstGeom prst="rect">
+            <a:avLst/>
+          </a:prstGeom>
+          <a:noFill/>
+          <a:ln/>
+        </p:spPr>
+        <p:txBody>
+          <a:bodyPr wrap="square" lIns="0" tIns="0" rIns="0" bIns="0" rtlCol="0" anchor="ctr"/>
+          <a:lstStyle/>
+          <a:p>
+            <a:pPr algn="ctr" indent="0" marL="0">
+              <a:buNone/>
+            </a:pPr>
+            <a:r>
+              <a:rPr lang="en-US" sz="1300" dirty="0">
+                <a:solidFill>
+                  <a:srgbClr val="8A8A8A"/>
+                </a:solidFill>
+                <a:latin typeface="Yu Gothic" pitchFamily="34" charset="0"/>
+                <a:ea typeface="Yu Gothic" pitchFamily="34" charset="-122"/>
+                <a:cs typeface="Yu Gothic" pitchFamily="34" charset="-120"/>
+              </a:rPr>
+              <a:t>↓</a:t>
+            </a:r>
+            <a:endParaRPr lang="en-US" sz="1300" dirty="0"/>
+          </a:p>
+        </p:txBody>
+      </p:sp>
+      <p:sp>
+        <p:nvSpPr>
+          <p:cNvPr id="23" name="Shape 21"/>
+          <p:cNvSpPr/>
+          <p:nvPr/>
+        </p:nvSpPr>
+        <p:spPr>
+          <a:xfrm>
+            <a:off x="7543800" y="4309872"/>
+            <a:ext cx="3703320" cy="1085088"/>
+          </a:xfrm>
+          <a:prstGeom prst="rect">
+            <a:avLst/>
+          </a:prstGeom>
+          <a:solidFill>
+            <a:srgbClr val="F4F4F4"/>
+          </a:solidFill>
+          <a:ln w="12700">
+            <a:solidFill>
+              <a:srgbClr val="E6E6E6"/>
+            </a:solidFill>
+            <a:prstDash val="solid"/>
+          </a:ln>
+        </p:spPr>
+      </p:sp>
+      <p:sp>
+        <p:nvSpPr>
+          <p:cNvPr id="24" name="Text 22"/>
+          <p:cNvSpPr txBox="1"/>
+          <p:nvPr/>
+        </p:nvSpPr>
+        <p:spPr>
+          <a:xfrm>
+            <a:off x="7543800" y="4309872"/>
+            <a:ext cx="3703320" cy="1085088"/>
+          </a:xfrm>
+          <a:prstGeom prst="rect">
+            <a:avLst/>
+          </a:prstGeom>
+          <a:noFill/>
+          <a:ln/>
+        </p:spPr>
+        <p:txBody>
+          <a:bodyPr wrap="square" lIns="0" tIns="0" rIns="0" bIns="0" rtlCol="0" anchor="ctr"/>
+          <a:lstStyle/>
+          <a:p>
+            <a:pPr algn="ctr" indent="0" marL="0">
+              <a:lnSpc>
+                <a:spcPct val="115000"/>
+              </a:lnSpc>
+              <a:buNone/>
+            </a:pPr>
+            <a:r>
+              <a:rPr lang="en-US" sz="900" b="1" dirty="0">
+                <a:solidFill>
+                  <a:srgbClr val="FF3B1F"/>
+                </a:solidFill>
+                <a:latin typeface="Consolas" pitchFamily="34" charset="0"/>
+                <a:ea typeface="Consolas" pitchFamily="34" charset="-122"/>
+                <a:cs typeface="Consolas" pitchFamily="34" charset="-120"/>
+              </a:rPr>
+              <a:t>③
+</a:t>
+            </a:r>
+            <a:endParaRPr lang="en-US" sz="900" dirty="0"/>
+          </a:p>
+          <a:p>
+            <a:pPr algn="ctr" indent="0" marL="0">
+              <a:lnSpc>
+                <a:spcPct val="115000"/>
+              </a:lnSpc>
+              <a:buNone/>
+            </a:pPr>
+            <a:r>
+              <a:rPr lang="en-US" sz="1600" b="1" dirty="0">
+                <a:solidFill>
+                  <a:srgbClr val="171717"/>
+                </a:solidFill>
+                <a:latin typeface="Yu Gothic" pitchFamily="34" charset="0"/>
+                <a:ea typeface="Yu Gothic" pitchFamily="34" charset="-122"/>
+                <a:cs typeface="Yu Gothic" pitchFamily="34" charset="-120"/>
+              </a:rPr>
+              <a:t>DX（事業変革）</a:t>
+            </a:r>
+            <a:pPr algn="ctr" indent="0" marL="0">
+              <a:lnSpc>
+                <a:spcPct val="115000"/>
+              </a:lnSpc>
+              <a:buNone/>
+            </a:pPr>
+            <a:endParaRPr lang="en-US" sz="900" dirty="0"/>
+          </a:p>
+          <a:p>
+            <a:pPr algn="ctr" indent="0" marL="0">
+              <a:lnSpc>
+                <a:spcPct val="115000"/>
+              </a:lnSpc>
+              <a:buNone/>
+            </a:pPr>
+            <a:r>
+              <a:rPr lang="en-US" sz="1000" b="1" dirty="0">
+                <a:solidFill>
+                  <a:srgbClr val="FF3B1F"/>
+                </a:solidFill>
+                <a:latin typeface="Yu Gothic" pitchFamily="34" charset="0"/>
+                <a:ea typeface="Yu Gothic" pitchFamily="34" charset="-122"/>
+                <a:cs typeface="Yu Gothic" pitchFamily="34" charset="-120"/>
+              </a:rPr>
+              <a:t>組織・ビジネスモデルを変革</a:t>
+            </a:r>
+            <a:endParaRPr lang="en-US" sz="900" dirty="0"/>
+          </a:p>
+        </p:txBody>
+      </p:sp>
+      <p:sp>
+        <p:nvSpPr>
+          <p:cNvPr id="25" name="Shape 23"/>
           <p:cNvSpPr/>
           <p:nvPr/>
         </p:nvSpPr>
@@ -19875,7 +20271,7 @@
       </p:sp>
       <p:sp>
         <p:nvSpPr>
-          <p:cNvPr id="23" name="Shape 21"/>
+          <p:cNvPr id="26" name="Shape 24"/>
           <p:cNvSpPr/>
           <p:nvPr/>
         </p:nvSpPr>
@@ -19895,7 +20291,7 @@
       </p:sp>
       <p:sp>
         <p:nvSpPr>
-          <p:cNvPr id="24" name="Text 22"/>
+          <p:cNvPr id="27" name="Text 25"/>
           <p:cNvSpPr txBox="1"/>
           <p:nvPr/>
         </p:nvSpPr>
@@ -19934,7 +20330,7 @@
       </p:sp>
       <p:sp>
         <p:nvSpPr>
-          <p:cNvPr id="25" name="Text 23"/>
+          <p:cNvPr id="28" name="Text 26"/>
           <p:cNvSpPr txBox="1"/>
           <p:nvPr/>
         </p:nvSpPr>
@@ -19973,7 +20369,7 @@
       </p:sp>
       <p:sp>
         <p:nvSpPr>
-          <p:cNvPr id="26" name="Shape 24"/>
+          <p:cNvPr id="29" name="Shape 27"/>
           <p:cNvSpPr/>
           <p:nvPr/>
         </p:nvSpPr>
@@ -19996,7 +20392,7 @@
       </p:sp>
       <p:sp>
         <p:nvSpPr>
-          <p:cNvPr id="27" name="Text 25"/>
+          <p:cNvPr id="30" name="Text 28"/>
           <p:cNvSpPr txBox="1"/>
           <p:nvPr/>
         </p:nvSpPr>
@@ -20035,7 +20431,7 @@
       </p:sp>
       <p:sp>
         <p:nvSpPr>
-          <p:cNvPr id="28" name="Text 26"/>
+          <p:cNvPr id="31" name="Text 29"/>
           <p:cNvSpPr txBox="1"/>
           <p:nvPr/>
         </p:nvSpPr>
@@ -20074,7 +20470,7 @@
       </p:sp>
       <p:sp>
         <p:nvSpPr>
-          <p:cNvPr id="29" name="Shape 27"/>
+          <p:cNvPr id="32" name="Shape 30"/>
           <p:cNvSpPr/>
           <p:nvPr/>
         </p:nvSpPr>
@@ -20099,7 +20495,7 @@
       </p:sp>
       <p:sp>
         <p:nvSpPr>
-          <p:cNvPr id="30" name="Text 28"/>
+          <p:cNvPr id="33" name="Text 31"/>
           <p:cNvSpPr txBox="1"/>
           <p:nvPr/>
         </p:nvSpPr>
@@ -20138,7 +20534,7 @@
       </p:sp>
       <p:sp>
         <p:nvSpPr>
-          <p:cNvPr id="31" name="Shape 29"/>
+          <p:cNvPr id="34" name="Shape 32"/>
           <p:cNvSpPr/>
           <p:nvPr/>
         </p:nvSpPr>
@@ -20163,7 +20559,7 @@
       </p:sp>
       <p:sp>
         <p:nvSpPr>
-          <p:cNvPr id="32" name="Text 30"/>
+          <p:cNvPr id="35" name="Text 33"/>
           <p:cNvSpPr txBox="1"/>
           <p:nvPr/>
         </p:nvSpPr>
@@ -20202,7 +20598,7 @@
       </p:sp>
       <p:sp>
         <p:nvSpPr>
-          <p:cNvPr id="33" name="Shape 31"/>
+          <p:cNvPr id="36" name="Shape 34"/>
           <p:cNvSpPr/>
           <p:nvPr/>
         </p:nvSpPr>
@@ -20227,7 +20623,7 @@
       </p:sp>
       <p:sp>
         <p:nvSpPr>
-          <p:cNvPr id="34" name="Text 32"/>
+          <p:cNvPr id="37" name="Text 35"/>
           <p:cNvSpPr txBox="1"/>
           <p:nvPr/>
         </p:nvSpPr>
@@ -20266,7 +20662,7 @@
       </p:sp>
       <p:sp>
         <p:nvSpPr>
-          <p:cNvPr id="35" name="Shape 33"/>
+          <p:cNvPr id="38" name="Shape 36"/>
           <p:cNvSpPr/>
           <p:nvPr/>
         </p:nvSpPr>
@@ -20291,7 +20687,7 @@
       </p:sp>
       <p:sp>
         <p:nvSpPr>
-          <p:cNvPr id="36" name="Text 34"/>
+          <p:cNvPr id="39" name="Text 37"/>
           <p:cNvSpPr txBox="1"/>
           <p:nvPr/>
         </p:nvSpPr>
@@ -20330,7 +20726,7 @@
       </p:sp>
       <p:sp>
         <p:nvSpPr>
-          <p:cNvPr id="37" name="Shape 35"/>
+          <p:cNvPr id="40" name="Shape 38"/>
           <p:cNvSpPr/>
           <p:nvPr/>
         </p:nvSpPr>
@@ -20355,7 +20751,7 @@
       </p:sp>
       <p:sp>
         <p:nvSpPr>
-          <p:cNvPr id="38" name="Text 36"/>
+          <p:cNvPr id="41" name="Text 39"/>
           <p:cNvSpPr txBox="1"/>
           <p:nvPr/>
         </p:nvSpPr>
@@ -20394,7 +20790,7 @@
       </p:sp>
       <p:sp>
         <p:nvSpPr>
-          <p:cNvPr id="39" name="Shape 37"/>
+          <p:cNvPr id="42" name="Shape 40"/>
           <p:cNvSpPr/>
           <p:nvPr/>
         </p:nvSpPr>
@@ -20419,7 +20815,7 @@
       </p:sp>
       <p:sp>
         <p:nvSpPr>
-          <p:cNvPr id="40" name="Text 38"/>
+          <p:cNvPr id="43" name="Text 41"/>
           <p:cNvSpPr txBox="1"/>
           <p:nvPr/>
         </p:nvSpPr>
@@ -20458,7 +20854,7 @@
       </p:sp>
       <p:sp>
         <p:nvSpPr>
-          <p:cNvPr id="41" name="Shape 39"/>
+          <p:cNvPr id="44" name="Shape 42"/>
           <p:cNvSpPr/>
           <p:nvPr/>
         </p:nvSpPr>
@@ -20483,7 +20879,7 @@
       </p:sp>
       <p:sp>
         <p:nvSpPr>
-          <p:cNvPr id="42" name="Text 40"/>
+          <p:cNvPr id="45" name="Text 43"/>
           <p:cNvSpPr txBox="1"/>
           <p:nvPr/>
         </p:nvSpPr>
@@ -20522,7 +20918,7 @@
       </p:sp>
       <p:sp>
         <p:nvSpPr>
-          <p:cNvPr id="43" name="Shape 41"/>
+          <p:cNvPr id="46" name="Shape 44"/>
           <p:cNvSpPr/>
           <p:nvPr/>
         </p:nvSpPr>
@@ -20547,7 +20943,7 @@
       </p:sp>
       <p:sp>
         <p:nvSpPr>
-          <p:cNvPr id="44" name="Text 42"/>
+          <p:cNvPr id="47" name="Text 45"/>
           <p:cNvSpPr txBox="1"/>
           <p:nvPr/>
         </p:nvSpPr>
@@ -20586,7 +20982,7 @@
       </p:sp>
       <p:sp>
         <p:nvSpPr>
-          <p:cNvPr id="45" name="Shape 43"/>
+          <p:cNvPr id="48" name="Shape 46"/>
           <p:cNvSpPr/>
           <p:nvPr/>
         </p:nvSpPr>
@@ -20611,7 +21007,7 @@
       </p:sp>
       <p:sp>
         <p:nvSpPr>
-          <p:cNvPr id="46" name="Text 44"/>
+          <p:cNvPr id="49" name="Text 47"/>
           <p:cNvSpPr txBox="1"/>
           <p:nvPr/>
         </p:nvSpPr>
@@ -20650,7 +21046,7 @@
       </p:sp>
       <p:sp>
         <p:nvSpPr>
-          <p:cNvPr id="47" name="Shape 45"/>
+          <p:cNvPr id="50" name="Shape 48"/>
           <p:cNvSpPr/>
           <p:nvPr/>
         </p:nvSpPr>
@@ -20675,7 +21071,7 @@
       </p:sp>
       <p:sp>
         <p:nvSpPr>
-          <p:cNvPr id="48" name="Text 46"/>
+          <p:cNvPr id="51" name="Text 49"/>
           <p:cNvSpPr txBox="1"/>
           <p:nvPr/>
         </p:nvSpPr>
@@ -40726,45 +41122,87 @@
         <p:spPr>
           <a:xfrm>
             <a:off x="502920" y="1691640"/>
-            <a:ext cx="1920240" cy="365760"/>
-          </a:xfrm>
-          <a:prstGeom prst="rect">
-            <a:avLst/>
-          </a:prstGeom>
-          <a:noFill/>
-          <a:ln/>
-        </p:spPr>
-        <p:txBody>
-          <a:bodyPr wrap="square" lIns="0" tIns="0" rIns="0" bIns="0" rtlCol="0" anchor="t"/>
-          <a:lstStyle/>
-          <a:p>
-            <a:pPr indent="0" marL="0">
-              <a:buNone/>
-            </a:pPr>
-            <a:r>
-              <a:rPr lang="en-US" sz="1100" b="1" dirty="0">
-                <a:solidFill>
-                  <a:srgbClr val="171717"/>
+            <a:ext cx="6766560" cy="868680"/>
+          </a:xfrm>
+          <a:prstGeom prst="rect">
+            <a:avLst/>
+          </a:prstGeom>
+          <a:noFill/>
+          <a:ln/>
+        </p:spPr>
+        <p:txBody>
+          <a:bodyPr wrap="square" lIns="0" tIns="0" rIns="0" bIns="0" rtlCol="0" anchor="ctr"/>
+          <a:lstStyle/>
+          <a:p>
+            <a:pPr indent="0" marL="0">
+              <a:lnSpc>
+                <a:spcPct val="125000"/>
+              </a:lnSpc>
+              <a:buNone/>
+            </a:pPr>
+            <a:r>
+              <a:rPr lang="en-US" sz="1050" dirty="0">
+                <a:solidFill>
+                  <a:srgbClr val="8A8A8A"/>
                 </a:solidFill>
                 <a:latin typeface="Yu Gothic" pitchFamily="34" charset="0"/>
                 <a:ea typeface="Yu Gothic" pitchFamily="34" charset="-122"/>
                 <a:cs typeface="Yu Gothic" pitchFamily="34" charset="-120"/>
               </a:rPr>
-              <a:t>普通保証</a:t>
-            </a:r>
-            <a:endParaRPr lang="en-US" sz="1100" dirty="0"/>
-          </a:p>
-        </p:txBody>
-      </p:sp>
-      <p:sp>
-        <p:nvSpPr>
-          <p:cNvPr id="9" name="Shape 7"/>
-          <p:cNvSpPr/>
-          <p:nvPr/>
-        </p:nvSpPr>
-        <p:spPr>
-          <a:xfrm>
-            <a:off x="2404872" y="1691640"/>
+              <a:t>一般保証は「担保の有無」で2つの枠に分かれ、さらに小規模事業者向けにもう一段小さい枠がある。3種類の限度額の大小関係を右図のイメージで押さえておくと、名称の入れ替えに惑わされにくい。</a:t>
+            </a:r>
+            <a:endParaRPr lang="en-US" sz="1050" dirty="0"/>
+          </a:p>
+        </p:txBody>
+      </p:sp>
+      <p:sp>
+        <p:nvSpPr>
+          <p:cNvPr id="9" name="Text 7"/>
+          <p:cNvSpPr txBox="1"/>
+          <p:nvPr/>
+        </p:nvSpPr>
+        <p:spPr>
+          <a:xfrm>
+            <a:off x="502920" y="2651760"/>
+            <a:ext cx="1920240" cy="365760"/>
+          </a:xfrm>
+          <a:prstGeom prst="rect">
+            <a:avLst/>
+          </a:prstGeom>
+          <a:noFill/>
+          <a:ln/>
+        </p:spPr>
+        <p:txBody>
+          <a:bodyPr wrap="square" lIns="0" tIns="0" rIns="0" bIns="0" rtlCol="0" anchor="t"/>
+          <a:lstStyle/>
+          <a:p>
+            <a:pPr indent="0" marL="0">
+              <a:buNone/>
+            </a:pPr>
+            <a:r>
+              <a:rPr lang="en-US" sz="1050" b="1" dirty="0">
+                <a:solidFill>
+                  <a:srgbClr val="171717"/>
+                </a:solidFill>
+                <a:latin typeface="Yu Gothic" pitchFamily="34" charset="0"/>
+                <a:ea typeface="Yu Gothic" pitchFamily="34" charset="-122"/>
+                <a:cs typeface="Yu Gothic" pitchFamily="34" charset="-120"/>
+              </a:rPr>
+              <a:t>日本政策金融公庫</a:t>
+            </a:r>
+            <a:endParaRPr lang="en-US" sz="1050" dirty="0"/>
+          </a:p>
+        </p:txBody>
+      </p:sp>
+      <p:sp>
+        <p:nvSpPr>
+          <p:cNvPr id="10" name="Shape 8"/>
+          <p:cNvSpPr/>
+          <p:nvPr/>
+        </p:nvSpPr>
+        <p:spPr>
+          <a:xfrm>
+            <a:off x="2404872" y="2651760"/>
             <a:ext cx="0" cy="256032"/>
           </a:xfrm>
           <a:prstGeom prst="line">
@@ -40781,14 +41219,14 @@
       </p:sp>
       <p:sp>
         <p:nvSpPr>
-          <p:cNvPr id="10" name="Text 8"/>
-          <p:cNvSpPr txBox="1"/>
-          <p:nvPr/>
-        </p:nvSpPr>
-        <p:spPr>
-          <a:xfrm>
-            <a:off x="2560320" y="1691640"/>
-            <a:ext cx="9144000" cy="365760"/>
+          <p:cNvPr id="11" name="Text 9"/>
+          <p:cNvSpPr txBox="1"/>
+          <p:nvPr/>
+        </p:nvSpPr>
+        <p:spPr>
+          <a:xfrm>
+            <a:off x="2560320" y="2651760"/>
+            <a:ext cx="4709160" cy="365760"/>
           </a:xfrm>
           <a:prstGeom prst="rect">
             <a:avLst/>
@@ -40804,7 +41242,7 @@
               <a:buNone/>
             </a:pPr>
             <a:r>
-              <a:rPr lang="en-US" sz="1100" dirty="0">
+              <a:rPr lang="en-US" sz="1050" dirty="0">
                 <a:solidFill>
                   <a:srgbClr val="8A8A8A"/>
                 </a:solidFill>
@@ -40812,48 +41250,9 @@
                 <a:ea typeface="Yu Gothic" pitchFamily="34" charset="-122"/>
                 <a:cs typeface="Yu Gothic" pitchFamily="34" charset="-120"/>
               </a:rPr>
-              <a:t>限度額2億円以内</a:t>
-            </a:r>
-            <a:endParaRPr lang="en-US" sz="1100" dirty="0"/>
-          </a:p>
-        </p:txBody>
-      </p:sp>
-      <p:sp>
-        <p:nvSpPr>
-          <p:cNvPr id="11" name="Text 9"/>
-          <p:cNvSpPr txBox="1"/>
-          <p:nvPr/>
-        </p:nvSpPr>
-        <p:spPr>
-          <a:xfrm>
-            <a:off x="502920" y="2075688"/>
-            <a:ext cx="1920240" cy="365760"/>
-          </a:xfrm>
-          <a:prstGeom prst="rect">
-            <a:avLst/>
-          </a:prstGeom>
-          <a:noFill/>
-          <a:ln/>
-        </p:spPr>
-        <p:txBody>
-          <a:bodyPr wrap="square" lIns="0" tIns="0" rIns="0" bIns="0" rtlCol="0" anchor="t"/>
-          <a:lstStyle/>
-          <a:p>
-            <a:pPr indent="0" marL="0">
-              <a:buNone/>
-            </a:pPr>
-            <a:r>
-              <a:rPr lang="en-US" sz="1100" b="1" dirty="0">
-                <a:solidFill>
-                  <a:srgbClr val="171717"/>
-                </a:solidFill>
-                <a:latin typeface="Yu Gothic" pitchFamily="34" charset="0"/>
-                <a:ea typeface="Yu Gothic" pitchFamily="34" charset="-122"/>
-                <a:cs typeface="Yu Gothic" pitchFamily="34" charset="-120"/>
-              </a:rPr>
-              <a:t>無担保保証</a:t>
-            </a:r>
-            <a:endParaRPr lang="en-US" sz="1100" dirty="0"/>
+              <a:t>国民生活事業（個人・小規模）と中小企業事業の2部門</a:t>
+            </a:r>
+            <a:endParaRPr lang="en-US" sz="1050" dirty="0"/>
           </a:p>
         </p:txBody>
       </p:sp>
@@ -40865,8 +41264,8 @@
         </p:nvSpPr>
         <p:spPr>
           <a:xfrm>
-            <a:off x="2404872" y="2075688"/>
-            <a:ext cx="0" cy="256032"/>
+            <a:off x="502920" y="3108960"/>
+            <a:ext cx="6766560" cy="0"/>
           </a:xfrm>
           <a:prstGeom prst="line">
             <a:avLst/>
@@ -40888,75 +41287,79 @@
         </p:nvSpPr>
         <p:spPr>
           <a:xfrm>
-            <a:off x="2560320" y="2075688"/>
-            <a:ext cx="9144000" cy="365760"/>
-          </a:xfrm>
-          <a:prstGeom prst="rect">
-            <a:avLst/>
-          </a:prstGeom>
-          <a:noFill/>
-          <a:ln/>
-        </p:spPr>
-        <p:txBody>
-          <a:bodyPr wrap="square" lIns="0" tIns="0" rIns="0" bIns="0" rtlCol="0" anchor="t"/>
-          <a:lstStyle/>
-          <a:p>
-            <a:pPr indent="0" marL="0">
-              <a:buNone/>
-            </a:pPr>
-            <a:r>
-              <a:rPr lang="en-US" sz="1100" dirty="0">
-                <a:solidFill>
-                  <a:srgbClr val="8A8A8A"/>
+            <a:off x="502920" y="3182112"/>
+            <a:ext cx="6766560" cy="640080"/>
+          </a:xfrm>
+          <a:prstGeom prst="rect">
+            <a:avLst/>
+          </a:prstGeom>
+          <a:noFill/>
+          <a:ln/>
+        </p:spPr>
+        <p:txBody>
+          <a:bodyPr wrap="square" lIns="0" tIns="0" rIns="0" bIns="0" rtlCol="0" anchor="ctr"/>
+          <a:lstStyle/>
+          <a:p>
+            <a:pPr indent="0" marL="0">
+              <a:lnSpc>
+                <a:spcPct val="120000"/>
+              </a:lnSpc>
+              <a:buNone/>
+            </a:pPr>
+            <a:r>
+              <a:rPr lang="en-US" sz="950" b="1" dirty="0">
+                <a:solidFill>
+                  <a:srgbClr val="FF3B1F"/>
                 </a:solidFill>
                 <a:latin typeface="Yu Gothic" pitchFamily="34" charset="0"/>
                 <a:ea typeface="Yu Gothic" pitchFamily="34" charset="-122"/>
                 <a:cs typeface="Yu Gothic" pitchFamily="34" charset="-120"/>
               </a:rPr>
-              <a:t>限度額8,000万円以内。担保不要</a:t>
-            </a:r>
-            <a:endParaRPr lang="en-US" sz="1100" dirty="0"/>
-          </a:p>
-        </p:txBody>
-      </p:sp>
-      <p:sp>
-        <p:nvSpPr>
-          <p:cNvPr id="14" name="Text 12"/>
-          <p:cNvSpPr txBox="1"/>
-          <p:nvPr/>
-        </p:nvSpPr>
-        <p:spPr>
-          <a:xfrm>
-            <a:off x="502920" y="2459736"/>
-            <a:ext cx="1920240" cy="365760"/>
-          </a:xfrm>
-          <a:prstGeom prst="rect">
-            <a:avLst/>
-          </a:prstGeom>
-          <a:noFill/>
-          <a:ln/>
-        </p:spPr>
-        <p:txBody>
-          <a:bodyPr wrap="square" lIns="0" tIns="0" rIns="0" bIns="0" rtlCol="0" anchor="t"/>
-          <a:lstStyle/>
-          <a:p>
-            <a:pPr indent="0" marL="0">
-              <a:buNone/>
-            </a:pPr>
-            <a:r>
-              <a:rPr lang="en-US" sz="1100" b="1" dirty="0">
-                <a:solidFill>
-                  <a:srgbClr val="171717"/>
+              <a:t>ひっかけ：</a:t>
+            </a:r>
+            <a:pPr indent="0" marL="0">
+              <a:lnSpc>
+                <a:spcPct val="120000"/>
+              </a:lnSpc>
+              <a:buNone/>
+            </a:pPr>
+            <a:r>
+              <a:rPr lang="en-US" sz="950" dirty="0">
+                <a:solidFill>
+                  <a:srgbClr val="FF3B1F"/>
                 </a:solidFill>
                 <a:latin typeface="Yu Gothic" pitchFamily="34" charset="0"/>
                 <a:ea typeface="Yu Gothic" pitchFamily="34" charset="-122"/>
                 <a:cs typeface="Yu Gothic" pitchFamily="34" charset="-120"/>
               </a:rPr>
-              <a:t>日本政策金融公庫</a:t>
-            </a:r>
-            <a:endParaRPr lang="en-US" sz="1100" dirty="0"/>
-          </a:p>
-        </p:txBody>
+              <a:t>普通保証・無担保保証・無担保無保証人保証（小口零細企業保証）の限度額と名称を正確に区別する。</a:t>
+            </a:r>
+            <a:endParaRPr lang="en-US" sz="950" dirty="0"/>
+          </a:p>
+        </p:txBody>
+      </p:sp>
+      <p:sp>
+        <p:nvSpPr>
+          <p:cNvPr id="14" name="Shape 12"/>
+          <p:cNvSpPr/>
+          <p:nvPr/>
+        </p:nvSpPr>
+        <p:spPr>
+          <a:xfrm>
+            <a:off x="7543800" y="5074920"/>
+            <a:ext cx="3703320" cy="0"/>
+          </a:xfrm>
+          <a:prstGeom prst="line">
+            <a:avLst/>
+          </a:prstGeom>
+          <a:noFill/>
+          <a:ln w="15875">
+            <a:solidFill>
+              <a:srgbClr val="171717"/>
+            </a:solidFill>
+            <a:prstDash val="solid"/>
+          </a:ln>
+        </p:spPr>
       </p:sp>
       <p:sp>
         <p:nvSpPr>
@@ -40966,8 +41369,462 @@
         </p:nvSpPr>
         <p:spPr>
           <a:xfrm>
-            <a:off x="2404872" y="2459736"/>
-            <a:ext cx="0" cy="256032"/>
+            <a:off x="7818120" y="2423160"/>
+            <a:ext cx="868680" cy="2651760"/>
+          </a:xfrm>
+          <a:prstGeom prst="rect">
+            <a:avLst/>
+          </a:prstGeom>
+          <a:solidFill>
+            <a:srgbClr val="FF3B1F"/>
+          </a:solidFill>
+          <a:ln/>
+        </p:spPr>
+      </p:sp>
+      <p:sp>
+        <p:nvSpPr>
+          <p:cNvPr id="16" name="Text 14"/>
+          <p:cNvSpPr txBox="1"/>
+          <p:nvPr/>
+        </p:nvSpPr>
+        <p:spPr>
+          <a:xfrm>
+            <a:off x="7680960" y="2130552"/>
+            <a:ext cx="1143000" cy="256032"/>
+          </a:xfrm>
+          <a:prstGeom prst="rect">
+            <a:avLst/>
+          </a:prstGeom>
+          <a:noFill/>
+          <a:ln/>
+        </p:spPr>
+        <p:txBody>
+          <a:bodyPr wrap="square" lIns="0" tIns="0" rIns="0" bIns="0" rtlCol="0" anchor="ctr"/>
+          <a:lstStyle/>
+          <a:p>
+            <a:pPr algn="ctr" indent="0" marL="0">
+              <a:buNone/>
+            </a:pPr>
+            <a:r>
+              <a:rPr lang="en-US" sz="950" b="1" dirty="0">
+                <a:solidFill>
+                  <a:srgbClr val="FF3B1F"/>
+                </a:solidFill>
+                <a:latin typeface="Yu Gothic" pitchFamily="34" charset="0"/>
+                <a:ea typeface="Yu Gothic" pitchFamily="34" charset="-122"/>
+                <a:cs typeface="Yu Gothic" pitchFamily="34" charset="-120"/>
+              </a:rPr>
+              <a:t>2億円</a:t>
+            </a:r>
+            <a:endParaRPr lang="en-US" sz="950" dirty="0"/>
+          </a:p>
+        </p:txBody>
+      </p:sp>
+      <p:sp>
+        <p:nvSpPr>
+          <p:cNvPr id="17" name="Text 15"/>
+          <p:cNvSpPr txBox="1"/>
+          <p:nvPr/>
+        </p:nvSpPr>
+        <p:spPr>
+          <a:xfrm>
+            <a:off x="7726680" y="5129784"/>
+            <a:ext cx="1051560" cy="457200"/>
+          </a:xfrm>
+          <a:prstGeom prst="rect">
+            <a:avLst/>
+          </a:prstGeom>
+          <a:noFill/>
+          <a:ln/>
+        </p:spPr>
+        <p:txBody>
+          <a:bodyPr wrap="square" lIns="0" tIns="0" rIns="0" bIns="0" rtlCol="0" anchor="ctr"/>
+          <a:lstStyle/>
+          <a:p>
+            <a:pPr algn="ctr" indent="0" marL="0">
+              <a:lnSpc>
+                <a:spcPct val="110000"/>
+              </a:lnSpc>
+              <a:buNone/>
+            </a:pPr>
+            <a:r>
+              <a:rPr lang="en-US" sz="750" dirty="0">
+                <a:solidFill>
+                  <a:srgbClr val="171717"/>
+                </a:solidFill>
+                <a:latin typeface="Yu Gothic" pitchFamily="34" charset="0"/>
+                <a:ea typeface="Yu Gothic" pitchFamily="34" charset="-122"/>
+                <a:cs typeface="Yu Gothic" pitchFamily="34" charset="-120"/>
+              </a:rPr>
+              <a:t>普通保証</a:t>
+            </a:r>
+            <a:endParaRPr lang="en-US" sz="750" dirty="0"/>
+          </a:p>
+        </p:txBody>
+      </p:sp>
+      <p:sp>
+        <p:nvSpPr>
+          <p:cNvPr id="18" name="Shape 16"/>
+          <p:cNvSpPr/>
+          <p:nvPr/>
+        </p:nvSpPr>
+        <p:spPr>
+          <a:xfrm>
+            <a:off x="8961120" y="3657600"/>
+            <a:ext cx="868680" cy="1417320"/>
+          </a:xfrm>
+          <a:prstGeom prst="rect">
+            <a:avLst/>
+          </a:prstGeom>
+          <a:solidFill>
+            <a:srgbClr val="F4F4F4"/>
+          </a:solidFill>
+          <a:ln w="12700">
+            <a:solidFill>
+              <a:srgbClr val="171717"/>
+            </a:solidFill>
+            <a:prstDash val="solid"/>
+          </a:ln>
+        </p:spPr>
+      </p:sp>
+      <p:sp>
+        <p:nvSpPr>
+          <p:cNvPr id="19" name="Text 17"/>
+          <p:cNvSpPr txBox="1"/>
+          <p:nvPr/>
+        </p:nvSpPr>
+        <p:spPr>
+          <a:xfrm>
+            <a:off x="8823960" y="3364992"/>
+            <a:ext cx="1143000" cy="256032"/>
+          </a:xfrm>
+          <a:prstGeom prst="rect">
+            <a:avLst/>
+          </a:prstGeom>
+          <a:noFill/>
+          <a:ln/>
+        </p:spPr>
+        <p:txBody>
+          <a:bodyPr wrap="square" lIns="0" tIns="0" rIns="0" bIns="0" rtlCol="0" anchor="ctr"/>
+          <a:lstStyle/>
+          <a:p>
+            <a:pPr algn="ctr" indent="0" marL="0">
+              <a:buNone/>
+            </a:pPr>
+            <a:r>
+              <a:rPr lang="en-US" sz="950" b="1" dirty="0">
+                <a:solidFill>
+                  <a:srgbClr val="171717"/>
+                </a:solidFill>
+                <a:latin typeface="Yu Gothic" pitchFamily="34" charset="0"/>
+                <a:ea typeface="Yu Gothic" pitchFamily="34" charset="-122"/>
+                <a:cs typeface="Yu Gothic" pitchFamily="34" charset="-120"/>
+              </a:rPr>
+              <a:t>8,000万円</a:t>
+            </a:r>
+            <a:endParaRPr lang="en-US" sz="950" dirty="0"/>
+          </a:p>
+        </p:txBody>
+      </p:sp>
+      <p:sp>
+        <p:nvSpPr>
+          <p:cNvPr id="20" name="Text 18"/>
+          <p:cNvSpPr txBox="1"/>
+          <p:nvPr/>
+        </p:nvSpPr>
+        <p:spPr>
+          <a:xfrm>
+            <a:off x="8869680" y="5129784"/>
+            <a:ext cx="1051560" cy="457200"/>
+          </a:xfrm>
+          <a:prstGeom prst="rect">
+            <a:avLst/>
+          </a:prstGeom>
+          <a:noFill/>
+          <a:ln/>
+        </p:spPr>
+        <p:txBody>
+          <a:bodyPr wrap="square" lIns="0" tIns="0" rIns="0" bIns="0" rtlCol="0" anchor="ctr"/>
+          <a:lstStyle/>
+          <a:p>
+            <a:pPr algn="ctr" indent="0" marL="0">
+              <a:lnSpc>
+                <a:spcPct val="110000"/>
+              </a:lnSpc>
+              <a:buNone/>
+            </a:pPr>
+            <a:r>
+              <a:rPr lang="en-US" sz="750" dirty="0">
+                <a:solidFill>
+                  <a:srgbClr val="171717"/>
+                </a:solidFill>
+                <a:latin typeface="Yu Gothic" pitchFamily="34" charset="0"/>
+                <a:ea typeface="Yu Gothic" pitchFamily="34" charset="-122"/>
+                <a:cs typeface="Yu Gothic" pitchFamily="34" charset="-120"/>
+              </a:rPr>
+              <a:t>無担保保証</a:t>
+            </a:r>
+            <a:endParaRPr lang="en-US" sz="750" dirty="0"/>
+          </a:p>
+        </p:txBody>
+      </p:sp>
+      <p:sp>
+        <p:nvSpPr>
+          <p:cNvPr id="21" name="Shape 19"/>
+          <p:cNvSpPr/>
+          <p:nvPr/>
+        </p:nvSpPr>
+        <p:spPr>
+          <a:xfrm>
+            <a:off x="10104120" y="4297680"/>
+            <a:ext cx="868680" cy="777240"/>
+          </a:xfrm>
+          <a:prstGeom prst="rect">
+            <a:avLst/>
+          </a:prstGeom>
+          <a:solidFill>
+            <a:srgbClr val="F4F4F4"/>
+          </a:solidFill>
+          <a:ln w="12700">
+            <a:solidFill>
+              <a:srgbClr val="171717"/>
+            </a:solidFill>
+            <a:prstDash val="solid"/>
+          </a:ln>
+        </p:spPr>
+      </p:sp>
+      <p:sp>
+        <p:nvSpPr>
+          <p:cNvPr id="22" name="Text 20"/>
+          <p:cNvSpPr txBox="1"/>
+          <p:nvPr/>
+        </p:nvSpPr>
+        <p:spPr>
+          <a:xfrm>
+            <a:off x="10012680" y="5129784"/>
+            <a:ext cx="1051560" cy="457200"/>
+          </a:xfrm>
+          <a:prstGeom prst="rect">
+            <a:avLst/>
+          </a:prstGeom>
+          <a:noFill/>
+          <a:ln/>
+        </p:spPr>
+        <p:txBody>
+          <a:bodyPr wrap="square" lIns="0" tIns="0" rIns="0" bIns="0" rtlCol="0" anchor="ctr"/>
+          <a:lstStyle/>
+          <a:p>
+            <a:pPr algn="ctr" indent="0" marL="0">
+              <a:lnSpc>
+                <a:spcPct val="110000"/>
+              </a:lnSpc>
+              <a:buNone/>
+            </a:pPr>
+            <a:r>
+              <a:rPr lang="en-US" sz="750" dirty="0">
+                <a:solidFill>
+                  <a:srgbClr val="171717"/>
+                </a:solidFill>
+                <a:latin typeface="Yu Gothic" pitchFamily="34" charset="0"/>
+                <a:ea typeface="Yu Gothic" pitchFamily="34" charset="-122"/>
+                <a:cs typeface="Yu Gothic" pitchFamily="34" charset="-120"/>
+              </a:rPr>
+              <a:t>無担保無保証人</a:t>
+            </a:r>
+            <a:endParaRPr lang="en-US" sz="750" dirty="0"/>
+          </a:p>
+          <a:p>
+            <a:pPr algn="ctr" indent="0" marL="0">
+              <a:lnSpc>
+                <a:spcPct val="110000"/>
+              </a:lnSpc>
+              <a:buNone/>
+            </a:pPr>
+            <a:r>
+              <a:rPr lang="en-US" sz="750" dirty="0">
+                <a:solidFill>
+                  <a:srgbClr val="171717"/>
+                </a:solidFill>
+                <a:latin typeface="Yu Gothic" pitchFamily="34" charset="0"/>
+                <a:ea typeface="Yu Gothic" pitchFamily="34" charset="-122"/>
+                <a:cs typeface="Yu Gothic" pitchFamily="34" charset="-120"/>
+              </a:rPr>
+              <a:t>（小口零細）</a:t>
+            </a:r>
+            <a:endParaRPr lang="en-US" sz="750" dirty="0"/>
+          </a:p>
+        </p:txBody>
+      </p:sp>
+      <p:sp>
+        <p:nvSpPr>
+          <p:cNvPr id="23" name="Text 21"/>
+          <p:cNvSpPr txBox="1"/>
+          <p:nvPr/>
+        </p:nvSpPr>
+        <p:spPr>
+          <a:xfrm>
+            <a:off x="7543800" y="5641848"/>
+            <a:ext cx="3703320" cy="274320"/>
+          </a:xfrm>
+          <a:prstGeom prst="rect">
+            <a:avLst/>
+          </a:prstGeom>
+          <a:noFill/>
+          <a:ln/>
+        </p:spPr>
+        <p:txBody>
+          <a:bodyPr wrap="square" lIns="0" tIns="0" rIns="0" bIns="0" rtlCol="0" anchor="ctr"/>
+          <a:lstStyle/>
+          <a:p>
+            <a:pPr algn="ctr" indent="0" marL="0">
+              <a:buNone/>
+            </a:pPr>
+            <a:r>
+              <a:rPr lang="en-US" sz="800" dirty="0">
+                <a:solidFill>
+                  <a:srgbClr val="8A8A8A"/>
+                </a:solidFill>
+                <a:latin typeface="Yu Gothic" pitchFamily="34" charset="0"/>
+                <a:ea typeface="Yu Gothic" pitchFamily="34" charset="-122"/>
+                <a:cs typeface="Yu Gothic" pitchFamily="34" charset="-120"/>
+              </a:rPr>
+              <a:t>一般保証の限度額イメージ（担保不要な枠ほど小さい）</a:t>
+            </a:r>
+            <a:endParaRPr lang="en-US" sz="800" dirty="0"/>
+          </a:p>
+        </p:txBody>
+      </p:sp>
+      <p:sp>
+        <p:nvSpPr>
+          <p:cNvPr id="24" name="Shape 22"/>
+          <p:cNvSpPr/>
+          <p:nvPr/>
+        </p:nvSpPr>
+        <p:spPr>
+          <a:xfrm>
+            <a:off x="502920" y="5989320"/>
+            <a:ext cx="11201400" cy="0"/>
+          </a:xfrm>
+          <a:prstGeom prst="line">
+            <a:avLst/>
+          </a:prstGeom>
+          <a:noFill/>
+          <a:ln w="9525">
+            <a:solidFill>
+              <a:srgbClr val="171717"/>
+            </a:solidFill>
+            <a:prstDash val="solid"/>
+          </a:ln>
+        </p:spPr>
+      </p:sp>
+      <p:sp>
+        <p:nvSpPr>
+          <p:cNvPr id="25" name="Shape 23"/>
+          <p:cNvSpPr/>
+          <p:nvPr/>
+        </p:nvSpPr>
+        <p:spPr>
+          <a:xfrm>
+            <a:off x="502920" y="6062472"/>
+            <a:ext cx="329184" cy="329184"/>
+          </a:xfrm>
+          <a:prstGeom prst="ellipse">
+            <a:avLst/>
+          </a:prstGeom>
+          <a:solidFill>
+            <a:srgbClr val="FF3B1F"/>
+          </a:solidFill>
+          <a:ln/>
+        </p:spPr>
+      </p:sp>
+      <p:sp>
+        <p:nvSpPr>
+          <p:cNvPr id="26" name="Text 24"/>
+          <p:cNvSpPr txBox="1"/>
+          <p:nvPr/>
+        </p:nvSpPr>
+        <p:spPr>
+          <a:xfrm>
+            <a:off x="502920" y="6062472"/>
+            <a:ext cx="329184" cy="329184"/>
+          </a:xfrm>
+          <a:prstGeom prst="rect">
+            <a:avLst/>
+          </a:prstGeom>
+          <a:noFill/>
+          <a:ln/>
+        </p:spPr>
+        <p:txBody>
+          <a:bodyPr wrap="square" lIns="0" tIns="0" rIns="0" bIns="0" rtlCol="0" anchor="ctr"/>
+          <a:lstStyle/>
+          <a:p>
+            <a:pPr algn="ctr" indent="0" marL="0">
+              <a:buNone/>
+            </a:pPr>
+            <a:r>
+              <a:rPr lang="en-US" sz="1300" b="1" dirty="0">
+                <a:solidFill>
+                  <a:srgbClr val="FFFFFF"/>
+                </a:solidFill>
+                <a:latin typeface="Consolas" pitchFamily="34" charset="0"/>
+                <a:ea typeface="Consolas" pitchFamily="34" charset="-122"/>
+                <a:cs typeface="Consolas" pitchFamily="34" charset="-120"/>
+              </a:rPr>
+              <a:t>A</a:t>
+            </a:r>
+            <a:endParaRPr lang="en-US" sz="1300" dirty="0"/>
+          </a:p>
+        </p:txBody>
+      </p:sp>
+      <p:sp>
+        <p:nvSpPr>
+          <p:cNvPr id="27" name="Text 25"/>
+          <p:cNvSpPr txBox="1"/>
+          <p:nvPr/>
+        </p:nvSpPr>
+        <p:spPr>
+          <a:xfrm>
+            <a:off x="914400" y="6062472"/>
+            <a:ext cx="1371600" cy="329184"/>
+          </a:xfrm>
+          <a:prstGeom prst="rect">
+            <a:avLst/>
+          </a:prstGeom>
+          <a:noFill/>
+          <a:ln/>
+        </p:spPr>
+        <p:txBody>
+          <a:bodyPr wrap="square" lIns="0" tIns="0" rIns="0" bIns="0" rtlCol="0" anchor="ctr"/>
+          <a:lstStyle/>
+          <a:p>
+            <a:pPr indent="0" marL="0">
+              <a:buNone/>
+            </a:pPr>
+            <a:r>
+              <a:rPr lang="en-US" sz="1050" b="1" dirty="0">
+                <a:solidFill>
+                  <a:srgbClr val="171717"/>
+                </a:solidFill>
+                <a:latin typeface="Yu Gothic" pitchFamily="34" charset="0"/>
+                <a:ea typeface="Yu Gothic" pitchFamily="34" charset="-122"/>
+                <a:cs typeface="Yu Gothic" pitchFamily="34" charset="-120"/>
+              </a:rPr>
+              <a:t>最頻出論点</a:t>
+            </a:r>
+            <a:endParaRPr lang="en-US" sz="1050" dirty="0"/>
+          </a:p>
+        </p:txBody>
+      </p:sp>
+      <p:sp>
+        <p:nvSpPr>
+          <p:cNvPr id="28" name="Shape 26"/>
+          <p:cNvSpPr/>
+          <p:nvPr/>
+        </p:nvSpPr>
+        <p:spPr>
+          <a:xfrm>
+            <a:off x="2331720" y="6062472"/>
+            <a:ext cx="0" cy="329184"/>
           </a:xfrm>
           <a:prstGeom prst="line">
             <a:avLst/>
@@ -40983,30 +41840,30 @@
       </p:sp>
       <p:sp>
         <p:nvSpPr>
-          <p:cNvPr id="16" name="Text 14"/>
-          <p:cNvSpPr txBox="1"/>
-          <p:nvPr/>
-        </p:nvSpPr>
-        <p:spPr>
-          <a:xfrm>
-            <a:off x="2560320" y="2459736"/>
-            <a:ext cx="9144000" cy="365760"/>
-          </a:xfrm>
-          <a:prstGeom prst="rect">
-            <a:avLst/>
-          </a:prstGeom>
-          <a:noFill/>
-          <a:ln/>
-        </p:spPr>
-        <p:txBody>
-          <a:bodyPr wrap="square" lIns="0" tIns="0" rIns="0" bIns="0" rtlCol="0" anchor="t"/>
-          <a:lstStyle/>
-          <a:p>
-            <a:pPr indent="0" marL="0">
-              <a:buNone/>
-            </a:pPr>
-            <a:r>
-              <a:rPr lang="en-US" sz="1100" dirty="0">
+          <p:cNvPr id="29" name="Text 27"/>
+          <p:cNvSpPr txBox="1"/>
+          <p:nvPr/>
+        </p:nvSpPr>
+        <p:spPr>
+          <a:xfrm>
+            <a:off x="2514600" y="6044184"/>
+            <a:ext cx="9189720" cy="365760"/>
+          </a:xfrm>
+          <a:prstGeom prst="rect">
+            <a:avLst/>
+          </a:prstGeom>
+          <a:noFill/>
+          <a:ln/>
+        </p:spPr>
+        <p:txBody>
+          <a:bodyPr wrap="square" lIns="0" tIns="0" rIns="0" bIns="0" rtlCol="0" anchor="ctr"/>
+          <a:lstStyle/>
+          <a:p>
+            <a:pPr indent="0" marL="0">
+              <a:buNone/>
+            </a:pPr>
+            <a:r>
+              <a:rPr lang="en-US" sz="1000" dirty="0">
                 <a:solidFill>
                   <a:srgbClr val="8A8A8A"/>
                 </a:solidFill>
@@ -41014,310 +41871,45 @@
                 <a:ea typeface="Yu Gothic" pitchFamily="34" charset="-122"/>
                 <a:cs typeface="Yu Gothic" pitchFamily="34" charset="-120"/>
               </a:rPr>
-              <a:t>国民生活事業（個人・小規模）と中小企業事業の2部門</a:t>
-            </a:r>
-            <a:endParaRPr lang="en-US" sz="1100" dirty="0"/>
-          </a:p>
-        </p:txBody>
-      </p:sp>
-      <p:sp>
-        <p:nvSpPr>
-          <p:cNvPr id="17" name="Shape 15"/>
-          <p:cNvSpPr/>
-          <p:nvPr/>
-        </p:nvSpPr>
-        <p:spPr>
-          <a:xfrm>
-            <a:off x="502920" y="2916936"/>
-            <a:ext cx="11201400" cy="0"/>
-          </a:xfrm>
-          <a:prstGeom prst="line">
-            <a:avLst/>
-          </a:prstGeom>
-          <a:noFill/>
-          <a:ln w="12700">
-            <a:solidFill>
-              <a:srgbClr val="E6E6E6"/>
-            </a:solidFill>
-            <a:prstDash val="solid"/>
-          </a:ln>
-        </p:spPr>
-      </p:sp>
-      <p:sp>
-        <p:nvSpPr>
-          <p:cNvPr id="18" name="Text 16"/>
-          <p:cNvSpPr txBox="1"/>
-          <p:nvPr/>
-        </p:nvSpPr>
-        <p:spPr>
-          <a:xfrm>
-            <a:off x="502920" y="2990088"/>
-            <a:ext cx="11201400" cy="457200"/>
-          </a:xfrm>
-          <a:prstGeom prst="rect">
-            <a:avLst/>
-          </a:prstGeom>
-          <a:noFill/>
-          <a:ln/>
-        </p:spPr>
-        <p:txBody>
-          <a:bodyPr wrap="square" lIns="0" tIns="0" rIns="0" bIns="0" rtlCol="0" anchor="ctr"/>
-          <a:lstStyle/>
-          <a:p>
-            <a:pPr indent="0" marL="0">
-              <a:lnSpc>
-                <a:spcPct val="120000"/>
-              </a:lnSpc>
-              <a:buNone/>
-            </a:pPr>
-            <a:r>
-              <a:rPr lang="en-US" sz="950" b="1" dirty="0">
-                <a:solidFill>
-                  <a:srgbClr val="FF3B1F"/>
+              <a:t>関連：G-9 金融・信用保証、税制（信用保証制度の基礎）。</a:t>
+            </a:r>
+            <a:endParaRPr lang="en-US" sz="1000" dirty="0"/>
+          </a:p>
+        </p:txBody>
+      </p:sp>
+      <p:sp>
+        <p:nvSpPr>
+          <p:cNvPr id="30" name="Text 28"/>
+          <p:cNvSpPr txBox="1"/>
+          <p:nvPr/>
+        </p:nvSpPr>
+        <p:spPr>
+          <a:xfrm>
+            <a:off x="502920" y="6464808"/>
+            <a:ext cx="1417320" cy="219456"/>
+          </a:xfrm>
+          <a:prstGeom prst="rect">
+            <a:avLst/>
+          </a:prstGeom>
+          <a:noFill/>
+          <a:ln/>
+        </p:spPr>
+        <p:txBody>
+          <a:bodyPr wrap="square" lIns="0" tIns="0" rIns="0" bIns="0" rtlCol="0" anchor="ctr"/>
+          <a:lstStyle/>
+          <a:p>
+            <a:pPr indent="0" marL="0">
+              <a:buNone/>
+            </a:pPr>
+            <a:r>
+              <a:rPr lang="en-US" sz="850" dirty="0">
+                <a:solidFill>
+                  <a:srgbClr val="8A8A8A"/>
                 </a:solidFill>
                 <a:latin typeface="Yu Gothic" pitchFamily="34" charset="0"/>
                 <a:ea typeface="Yu Gothic" pitchFamily="34" charset="-122"/>
                 <a:cs typeface="Yu Gothic" pitchFamily="34" charset="-120"/>
               </a:rPr>
-              <a:t>ひっかけ：</a:t>
-            </a:r>
-            <a:pPr indent="0" marL="0">
-              <a:lnSpc>
-                <a:spcPct val="120000"/>
-              </a:lnSpc>
-              <a:buNone/>
-            </a:pPr>
-            <a:r>
-              <a:rPr lang="en-US" sz="950" dirty="0">
-                <a:solidFill>
-                  <a:srgbClr val="FF3B1F"/>
-                </a:solidFill>
-                <a:latin typeface="Yu Gothic" pitchFamily="34" charset="0"/>
-                <a:ea typeface="Yu Gothic" pitchFamily="34" charset="-122"/>
-                <a:cs typeface="Yu Gothic" pitchFamily="34" charset="-120"/>
-              </a:rPr>
-              <a:t>普通保証・無担保保証・無担保無保証人保証（小口零細企業保証）の限度額と名称を正確に区別する。</a:t>
-            </a:r>
-            <a:endParaRPr lang="en-US" sz="950" dirty="0"/>
-          </a:p>
-        </p:txBody>
-      </p:sp>
-      <p:sp>
-        <p:nvSpPr>
-          <p:cNvPr id="19" name="Shape 17"/>
-          <p:cNvSpPr/>
-          <p:nvPr/>
-        </p:nvSpPr>
-        <p:spPr>
-          <a:xfrm>
-            <a:off x="502920" y="5989320"/>
-            <a:ext cx="11201400" cy="0"/>
-          </a:xfrm>
-          <a:prstGeom prst="line">
-            <a:avLst/>
-          </a:prstGeom>
-          <a:noFill/>
-          <a:ln w="9525">
-            <a:solidFill>
-              <a:srgbClr val="171717"/>
-            </a:solidFill>
-            <a:prstDash val="solid"/>
-          </a:ln>
-        </p:spPr>
-      </p:sp>
-      <p:sp>
-        <p:nvSpPr>
-          <p:cNvPr id="20" name="Shape 18"/>
-          <p:cNvSpPr/>
-          <p:nvPr/>
-        </p:nvSpPr>
-        <p:spPr>
-          <a:xfrm>
-            <a:off x="502920" y="6062472"/>
-            <a:ext cx="329184" cy="329184"/>
-          </a:xfrm>
-          <a:prstGeom prst="ellipse">
-            <a:avLst/>
-          </a:prstGeom>
-          <a:solidFill>
-            <a:srgbClr val="FF3B1F"/>
-          </a:solidFill>
-          <a:ln/>
-        </p:spPr>
-      </p:sp>
-      <p:sp>
-        <p:nvSpPr>
-          <p:cNvPr id="21" name="Text 19"/>
-          <p:cNvSpPr txBox="1"/>
-          <p:nvPr/>
-        </p:nvSpPr>
-        <p:spPr>
-          <a:xfrm>
-            <a:off x="502920" y="6062472"/>
-            <a:ext cx="329184" cy="329184"/>
-          </a:xfrm>
-          <a:prstGeom prst="rect">
-            <a:avLst/>
-          </a:prstGeom>
-          <a:noFill/>
-          <a:ln/>
-        </p:spPr>
-        <p:txBody>
-          <a:bodyPr wrap="square" lIns="0" tIns="0" rIns="0" bIns="0" rtlCol="0" anchor="ctr"/>
-          <a:lstStyle/>
-          <a:p>
-            <a:pPr algn="ctr" indent="0" marL="0">
-              <a:buNone/>
-            </a:pPr>
-            <a:r>
-              <a:rPr lang="en-US" sz="1300" b="1" dirty="0">
-                <a:solidFill>
-                  <a:srgbClr val="FFFFFF"/>
-                </a:solidFill>
-                <a:latin typeface="Consolas" pitchFamily="34" charset="0"/>
-                <a:ea typeface="Consolas" pitchFamily="34" charset="-122"/>
-                <a:cs typeface="Consolas" pitchFamily="34" charset="-120"/>
-              </a:rPr>
-              <a:t>A</a:t>
-            </a:r>
-            <a:endParaRPr lang="en-US" sz="1300" dirty="0"/>
-          </a:p>
-        </p:txBody>
-      </p:sp>
-      <p:sp>
-        <p:nvSpPr>
-          <p:cNvPr id="22" name="Text 20"/>
-          <p:cNvSpPr txBox="1"/>
-          <p:nvPr/>
-        </p:nvSpPr>
-        <p:spPr>
-          <a:xfrm>
-            <a:off x="914400" y="6062472"/>
-            <a:ext cx="1371600" cy="329184"/>
-          </a:xfrm>
-          <a:prstGeom prst="rect">
-            <a:avLst/>
-          </a:prstGeom>
-          <a:noFill/>
-          <a:ln/>
-        </p:spPr>
-        <p:txBody>
-          <a:bodyPr wrap="square" lIns="0" tIns="0" rIns="0" bIns="0" rtlCol="0" anchor="ctr"/>
-          <a:lstStyle/>
-          <a:p>
-            <a:pPr indent="0" marL="0">
-              <a:buNone/>
-            </a:pPr>
-            <a:r>
-              <a:rPr lang="en-US" sz="1050" b="1" dirty="0">
-                <a:solidFill>
-                  <a:srgbClr val="171717"/>
-                </a:solidFill>
-                <a:latin typeface="Yu Gothic" pitchFamily="34" charset="0"/>
-                <a:ea typeface="Yu Gothic" pitchFamily="34" charset="-122"/>
-                <a:cs typeface="Yu Gothic" pitchFamily="34" charset="-120"/>
-              </a:rPr>
-              <a:t>最頻出論点</a:t>
-            </a:r>
-            <a:endParaRPr lang="en-US" sz="1050" dirty="0"/>
-          </a:p>
-        </p:txBody>
-      </p:sp>
-      <p:sp>
-        <p:nvSpPr>
-          <p:cNvPr id="23" name="Shape 21"/>
-          <p:cNvSpPr/>
-          <p:nvPr/>
-        </p:nvSpPr>
-        <p:spPr>
-          <a:xfrm>
-            <a:off x="2331720" y="6062472"/>
-            <a:ext cx="0" cy="329184"/>
-          </a:xfrm>
-          <a:prstGeom prst="line">
-            <a:avLst/>
-          </a:prstGeom>
-          <a:noFill/>
-          <a:ln w="12700">
-            <a:solidFill>
-              <a:srgbClr val="E6E6E6"/>
-            </a:solidFill>
-            <a:prstDash val="solid"/>
-          </a:ln>
-        </p:spPr>
-      </p:sp>
-      <p:sp>
-        <p:nvSpPr>
-          <p:cNvPr id="24" name="Text 22"/>
-          <p:cNvSpPr txBox="1"/>
-          <p:nvPr/>
-        </p:nvSpPr>
-        <p:spPr>
-          <a:xfrm>
-            <a:off x="2514600" y="6044184"/>
-            <a:ext cx="9189720" cy="365760"/>
-          </a:xfrm>
-          <a:prstGeom prst="rect">
-            <a:avLst/>
-          </a:prstGeom>
-          <a:noFill/>
-          <a:ln/>
-        </p:spPr>
-        <p:txBody>
-          <a:bodyPr wrap="square" lIns="0" tIns="0" rIns="0" bIns="0" rtlCol="0" anchor="ctr"/>
-          <a:lstStyle/>
-          <a:p>
-            <a:pPr indent="0" marL="0">
-              <a:buNone/>
-            </a:pPr>
-            <a:r>
-              <a:rPr lang="en-US" sz="1000" dirty="0">
-                <a:solidFill>
-                  <a:srgbClr val="8A8A8A"/>
-                </a:solidFill>
-                <a:latin typeface="Yu Gothic" pitchFamily="34" charset="0"/>
-                <a:ea typeface="Yu Gothic" pitchFamily="34" charset="-122"/>
-                <a:cs typeface="Yu Gothic" pitchFamily="34" charset="-120"/>
-              </a:rPr>
-              <a:t>関連：G-9 金融・信用保証、税制（信用保証制度の基礎）。</a:t>
-            </a:r>
-            <a:endParaRPr lang="en-US" sz="1000" dirty="0"/>
-          </a:p>
-        </p:txBody>
-      </p:sp>
-      <p:sp>
-        <p:nvSpPr>
-          <p:cNvPr id="25" name="Text 23"/>
-          <p:cNvSpPr txBox="1"/>
-          <p:nvPr/>
-        </p:nvSpPr>
-        <p:spPr>
-          <a:xfrm>
-            <a:off x="502920" y="6464808"/>
-            <a:ext cx="1417320" cy="219456"/>
-          </a:xfrm>
-          <a:prstGeom prst="rect">
-            <a:avLst/>
-          </a:prstGeom>
-          <a:noFill/>
-          <a:ln/>
-        </p:spPr>
-        <p:txBody>
-          <a:bodyPr wrap="square" lIns="0" tIns="0" rIns="0" bIns="0" rtlCol="0" anchor="ctr"/>
-          <a:lstStyle/>
-          <a:p>
-            <a:pPr indent="0" marL="0">
-              <a:buNone/>
-            </a:pPr>
-            <a:r>
-              <a:rPr lang="en-US" sz="850" dirty="0">
-                <a:solidFill>
-                  <a:srgbClr val="8A8A8A"/>
-                </a:solidFill>
-                <a:latin typeface="Yu Gothic" pitchFamily="34" charset="0"/>
-                <a:ea typeface="Yu Gothic" pitchFamily="34" charset="-122"/>
-                <a:cs typeface="Yu Gothic" pitchFamily="34" charset="-120"/>
-              </a:rPr>
               <a:t>出題年度（過去10年）</a:t>
             </a:r>
             <a:endParaRPr lang="en-US" sz="850" dirty="0"/>
@@ -41326,7 +41918,7 @@
       </p:sp>
       <p:sp>
         <p:nvSpPr>
-          <p:cNvPr id="26" name="Shape 24"/>
+          <p:cNvPr id="31" name="Shape 29"/>
           <p:cNvSpPr/>
           <p:nvPr/>
         </p:nvSpPr>
@@ -41351,7 +41943,7 @@
       </p:sp>
       <p:sp>
         <p:nvSpPr>
-          <p:cNvPr id="27" name="Text 25"/>
+          <p:cNvPr id="32" name="Text 30"/>
           <p:cNvSpPr txBox="1"/>
           <p:nvPr/>
         </p:nvSpPr>
@@ -41390,7 +41982,7 @@
       </p:sp>
       <p:sp>
         <p:nvSpPr>
-          <p:cNvPr id="28" name="Shape 26"/>
+          <p:cNvPr id="33" name="Shape 31"/>
           <p:cNvSpPr/>
           <p:nvPr/>
         </p:nvSpPr>
@@ -41415,7 +42007,7 @@
       </p:sp>
       <p:sp>
         <p:nvSpPr>
-          <p:cNvPr id="29" name="Text 27"/>
+          <p:cNvPr id="34" name="Text 32"/>
           <p:cNvSpPr txBox="1"/>
           <p:nvPr/>
         </p:nvSpPr>
@@ -41454,7 +42046,7 @@
       </p:sp>
       <p:sp>
         <p:nvSpPr>
-          <p:cNvPr id="30" name="Shape 28"/>
+          <p:cNvPr id="35" name="Shape 33"/>
           <p:cNvSpPr/>
           <p:nvPr/>
         </p:nvSpPr>
@@ -41479,7 +42071,7 @@
       </p:sp>
       <p:sp>
         <p:nvSpPr>
-          <p:cNvPr id="31" name="Text 29"/>
+          <p:cNvPr id="36" name="Text 34"/>
           <p:cNvSpPr txBox="1"/>
           <p:nvPr/>
         </p:nvSpPr>
@@ -41518,7 +42110,7 @@
       </p:sp>
       <p:sp>
         <p:nvSpPr>
-          <p:cNvPr id="32" name="Shape 30"/>
+          <p:cNvPr id="37" name="Shape 35"/>
           <p:cNvSpPr/>
           <p:nvPr/>
         </p:nvSpPr>
@@ -41543,7 +42135,7 @@
       </p:sp>
       <p:sp>
         <p:nvSpPr>
-          <p:cNvPr id="33" name="Text 31"/>
+          <p:cNvPr id="38" name="Text 36"/>
           <p:cNvSpPr txBox="1"/>
           <p:nvPr/>
         </p:nvSpPr>
@@ -41582,7 +42174,7 @@
       </p:sp>
       <p:sp>
         <p:nvSpPr>
-          <p:cNvPr id="34" name="Shape 32"/>
+          <p:cNvPr id="39" name="Shape 37"/>
           <p:cNvSpPr/>
           <p:nvPr/>
         </p:nvSpPr>
@@ -41607,7 +42199,7 @@
       </p:sp>
       <p:sp>
         <p:nvSpPr>
-          <p:cNvPr id="35" name="Text 33"/>
+          <p:cNvPr id="40" name="Text 38"/>
           <p:cNvSpPr txBox="1"/>
           <p:nvPr/>
         </p:nvSpPr>
@@ -41646,7 +42238,7 @@
       </p:sp>
       <p:sp>
         <p:nvSpPr>
-          <p:cNvPr id="36" name="Shape 34"/>
+          <p:cNvPr id="41" name="Shape 39"/>
           <p:cNvSpPr/>
           <p:nvPr/>
         </p:nvSpPr>
@@ -41671,7 +42263,7 @@
       </p:sp>
       <p:sp>
         <p:nvSpPr>
-          <p:cNvPr id="37" name="Text 35"/>
+          <p:cNvPr id="42" name="Text 40"/>
           <p:cNvSpPr txBox="1"/>
           <p:nvPr/>
         </p:nvSpPr>
@@ -41710,7 +42302,7 @@
       </p:sp>
       <p:sp>
         <p:nvSpPr>
-          <p:cNvPr id="38" name="Shape 36"/>
+          <p:cNvPr id="43" name="Shape 41"/>
           <p:cNvSpPr/>
           <p:nvPr/>
         </p:nvSpPr>
@@ -41735,7 +42327,7 @@
       </p:sp>
       <p:sp>
         <p:nvSpPr>
-          <p:cNvPr id="39" name="Text 37"/>
+          <p:cNvPr id="44" name="Text 42"/>
           <p:cNvSpPr txBox="1"/>
           <p:nvPr/>
         </p:nvSpPr>
@@ -41774,7 +42366,7 @@
       </p:sp>
       <p:sp>
         <p:nvSpPr>
-          <p:cNvPr id="40" name="Shape 38"/>
+          <p:cNvPr id="45" name="Shape 43"/>
           <p:cNvSpPr/>
           <p:nvPr/>
         </p:nvSpPr>
@@ -41799,7 +42391,7 @@
       </p:sp>
       <p:sp>
         <p:nvSpPr>
-          <p:cNvPr id="41" name="Text 39"/>
+          <p:cNvPr id="46" name="Text 44"/>
           <p:cNvSpPr txBox="1"/>
           <p:nvPr/>
         </p:nvSpPr>
@@ -41838,7 +42430,7 @@
       </p:sp>
       <p:sp>
         <p:nvSpPr>
-          <p:cNvPr id="42" name="Shape 40"/>
+          <p:cNvPr id="47" name="Shape 45"/>
           <p:cNvSpPr/>
           <p:nvPr/>
         </p:nvSpPr>
@@ -41863,7 +42455,7 @@
       </p:sp>
       <p:sp>
         <p:nvSpPr>
-          <p:cNvPr id="43" name="Text 41"/>
+          <p:cNvPr id="48" name="Text 46"/>
           <p:cNvSpPr txBox="1"/>
           <p:nvPr/>
         </p:nvSpPr>
@@ -41902,7 +42494,7 @@
       </p:sp>
       <p:sp>
         <p:nvSpPr>
-          <p:cNvPr id="44" name="Shape 42"/>
+          <p:cNvPr id="49" name="Shape 47"/>
           <p:cNvSpPr/>
           <p:nvPr/>
         </p:nvSpPr>
@@ -41927,7 +42519,7 @@
       </p:sp>
       <p:sp>
         <p:nvSpPr>
-          <p:cNvPr id="45" name="Text 43"/>
+          <p:cNvPr id="50" name="Text 48"/>
           <p:cNvSpPr txBox="1"/>
           <p:nvPr/>
         </p:nvSpPr>

--- a/slides/1st_stage/G_sme_management_policy.pptx
+++ b/slides/1st_stage/G_sme_management_policy.pptx
@@ -8843,7 +8843,70 @@
       </p:sp>
       <p:sp>
         <p:nvSpPr>
-          <p:cNvPr id="19" name="Shape 17"/>
+          <p:cNvPr id="19" name="Text 17"/>
+          <p:cNvSpPr txBox="1"/>
+          <p:nvPr/>
+        </p:nvSpPr>
+        <p:spPr>
+          <a:xfrm>
+            <a:off x="502920" y="5212080"/>
+            <a:ext cx="11201400" cy="640080"/>
+          </a:xfrm>
+          <a:prstGeom prst="rect">
+            <a:avLst/>
+          </a:prstGeom>
+          <a:noFill/>
+          <a:ln/>
+        </p:spPr>
+        <p:txBody>
+          <a:bodyPr wrap="square" lIns="0" tIns="0" rIns="0" bIns="0" rtlCol="0" anchor="ctr"/>
+          <a:lstStyle/>
+          <a:p>
+            <a:pPr indent="0" marL="0">
+              <a:lnSpc>
+                <a:spcPct val="120000"/>
+              </a:lnSpc>
+              <a:buNone/>
+            </a:pPr>
+            <a:r>
+              <a:rPr lang="en-US" sz="850" b="1" dirty="0">
+                <a:solidFill>
+                  <a:srgbClr val="8A8A8A"/>
+                </a:solidFill>
+                <a:latin typeface="Consolas" pitchFamily="34" charset="0"/>
+                <a:ea typeface="Consolas" pitchFamily="34" charset="-122"/>
+                <a:cs typeface="Consolas" pitchFamily="34" charset="-120"/>
+              </a:rPr>
+              <a:t>具体例
+</a:t>
+            </a:r>
+            <a:endParaRPr lang="en-US" sz="850" dirty="0"/>
+          </a:p>
+          <a:p>
+            <a:pPr indent="0" marL="0">
+              <a:lnSpc>
+                <a:spcPct val="120000"/>
+              </a:lnSpc>
+              <a:buNone/>
+            </a:pPr>
+            <a:r>
+              <a:rPr lang="en-US" sz="1000" dirty="0">
+                <a:solidFill>
+                  <a:srgbClr val="171717"/>
+                </a:solidFill>
+                <a:latin typeface="Yu Gothic" pitchFamily="34" charset="0"/>
+                <a:ea typeface="Yu Gothic" pitchFamily="34" charset="-122"/>
+                <a:cs typeface="Yu Gothic" pitchFamily="34" charset="-120"/>
+              </a:rPr>
+              <a:t>ある建設業の中小企業が大手ゼネコンの下請として工事の一部を受注している場合、資材価格が高騰しても元請との契約上、価格転嫁が思うようにできないことがある。重層下請構造ゆえの建設業特有の課題。</a:t>
+            </a:r>
+            <a:endParaRPr lang="en-US" sz="850" dirty="0"/>
+          </a:p>
+        </p:txBody>
+      </p:sp>
+      <p:sp>
+        <p:nvSpPr>
+          <p:cNvPr id="20" name="Shape 18"/>
           <p:cNvSpPr/>
           <p:nvPr/>
         </p:nvSpPr>
@@ -8866,7 +8929,7 @@
       </p:sp>
       <p:sp>
         <p:nvSpPr>
-          <p:cNvPr id="20" name="Shape 18"/>
+          <p:cNvPr id="21" name="Shape 19"/>
           <p:cNvSpPr/>
           <p:nvPr/>
         </p:nvSpPr>
@@ -8886,7 +8949,7 @@
       </p:sp>
       <p:sp>
         <p:nvSpPr>
-          <p:cNvPr id="21" name="Text 19"/>
+          <p:cNvPr id="22" name="Text 20"/>
           <p:cNvSpPr txBox="1"/>
           <p:nvPr/>
         </p:nvSpPr>
@@ -8925,7 +8988,7 @@
       </p:sp>
       <p:sp>
         <p:nvSpPr>
-          <p:cNvPr id="22" name="Text 20"/>
+          <p:cNvPr id="23" name="Text 21"/>
           <p:cNvSpPr txBox="1"/>
           <p:nvPr/>
         </p:nvSpPr>
@@ -8964,7 +9027,7 @@
       </p:sp>
       <p:sp>
         <p:nvSpPr>
-          <p:cNvPr id="23" name="Shape 21"/>
+          <p:cNvPr id="24" name="Shape 22"/>
           <p:cNvSpPr/>
           <p:nvPr/>
         </p:nvSpPr>
@@ -8987,7 +9050,7 @@
       </p:sp>
       <p:sp>
         <p:nvSpPr>
-          <p:cNvPr id="24" name="Text 22"/>
+          <p:cNvPr id="25" name="Text 23"/>
           <p:cNvSpPr txBox="1"/>
           <p:nvPr/>
         </p:nvSpPr>
@@ -9026,7 +9089,7 @@
       </p:sp>
       <p:sp>
         <p:nvSpPr>
-          <p:cNvPr id="25" name="Text 23"/>
+          <p:cNvPr id="26" name="Text 24"/>
           <p:cNvSpPr txBox="1"/>
           <p:nvPr/>
         </p:nvSpPr>
@@ -9065,7 +9128,7 @@
       </p:sp>
       <p:sp>
         <p:nvSpPr>
-          <p:cNvPr id="26" name="Shape 24"/>
+          <p:cNvPr id="27" name="Shape 25"/>
           <p:cNvSpPr/>
           <p:nvPr/>
         </p:nvSpPr>
@@ -9090,7 +9153,7 @@
       </p:sp>
       <p:sp>
         <p:nvSpPr>
-          <p:cNvPr id="27" name="Text 25"/>
+          <p:cNvPr id="28" name="Text 26"/>
           <p:cNvSpPr txBox="1"/>
           <p:nvPr/>
         </p:nvSpPr>
@@ -9129,7 +9192,7 @@
       </p:sp>
       <p:sp>
         <p:nvSpPr>
-          <p:cNvPr id="28" name="Shape 26"/>
+          <p:cNvPr id="29" name="Shape 27"/>
           <p:cNvSpPr/>
           <p:nvPr/>
         </p:nvSpPr>
@@ -9154,7 +9217,7 @@
       </p:sp>
       <p:sp>
         <p:nvSpPr>
-          <p:cNvPr id="29" name="Text 27"/>
+          <p:cNvPr id="30" name="Text 28"/>
           <p:cNvSpPr txBox="1"/>
           <p:nvPr/>
         </p:nvSpPr>
@@ -9193,7 +9256,7 @@
       </p:sp>
       <p:sp>
         <p:nvSpPr>
-          <p:cNvPr id="30" name="Shape 28"/>
+          <p:cNvPr id="31" name="Shape 29"/>
           <p:cNvSpPr/>
           <p:nvPr/>
         </p:nvSpPr>
@@ -9218,7 +9281,7 @@
       </p:sp>
       <p:sp>
         <p:nvSpPr>
-          <p:cNvPr id="31" name="Text 29"/>
+          <p:cNvPr id="32" name="Text 30"/>
           <p:cNvSpPr txBox="1"/>
           <p:nvPr/>
         </p:nvSpPr>
@@ -9257,7 +9320,7 @@
       </p:sp>
       <p:sp>
         <p:nvSpPr>
-          <p:cNvPr id="32" name="Shape 30"/>
+          <p:cNvPr id="33" name="Shape 31"/>
           <p:cNvSpPr/>
           <p:nvPr/>
         </p:nvSpPr>
@@ -9282,7 +9345,7 @@
       </p:sp>
       <p:sp>
         <p:nvSpPr>
-          <p:cNvPr id="33" name="Text 31"/>
+          <p:cNvPr id="34" name="Text 32"/>
           <p:cNvSpPr txBox="1"/>
           <p:nvPr/>
         </p:nvSpPr>
@@ -9321,7 +9384,7 @@
       </p:sp>
       <p:sp>
         <p:nvSpPr>
-          <p:cNvPr id="34" name="Shape 32"/>
+          <p:cNvPr id="35" name="Shape 33"/>
           <p:cNvSpPr/>
           <p:nvPr/>
         </p:nvSpPr>
@@ -9346,7 +9409,7 @@
       </p:sp>
       <p:sp>
         <p:nvSpPr>
-          <p:cNvPr id="35" name="Text 33"/>
+          <p:cNvPr id="36" name="Text 34"/>
           <p:cNvSpPr txBox="1"/>
           <p:nvPr/>
         </p:nvSpPr>
@@ -9385,7 +9448,7 @@
       </p:sp>
       <p:sp>
         <p:nvSpPr>
-          <p:cNvPr id="36" name="Shape 34"/>
+          <p:cNvPr id="37" name="Shape 35"/>
           <p:cNvSpPr/>
           <p:nvPr/>
         </p:nvSpPr>
@@ -9410,7 +9473,7 @@
       </p:sp>
       <p:sp>
         <p:nvSpPr>
-          <p:cNvPr id="37" name="Text 35"/>
+          <p:cNvPr id="38" name="Text 36"/>
           <p:cNvSpPr txBox="1"/>
           <p:nvPr/>
         </p:nvSpPr>
@@ -9449,7 +9512,7 @@
       </p:sp>
       <p:sp>
         <p:nvSpPr>
-          <p:cNvPr id="38" name="Shape 36"/>
+          <p:cNvPr id="39" name="Shape 37"/>
           <p:cNvSpPr/>
           <p:nvPr/>
         </p:nvSpPr>
@@ -9474,7 +9537,7 @@
       </p:sp>
       <p:sp>
         <p:nvSpPr>
-          <p:cNvPr id="39" name="Text 37"/>
+          <p:cNvPr id="40" name="Text 38"/>
           <p:cNvSpPr txBox="1"/>
           <p:nvPr/>
         </p:nvSpPr>
@@ -9513,7 +9576,7 @@
       </p:sp>
       <p:sp>
         <p:nvSpPr>
-          <p:cNvPr id="40" name="Shape 38"/>
+          <p:cNvPr id="41" name="Shape 39"/>
           <p:cNvSpPr/>
           <p:nvPr/>
         </p:nvSpPr>
@@ -9538,7 +9601,7 @@
       </p:sp>
       <p:sp>
         <p:nvSpPr>
-          <p:cNvPr id="41" name="Text 39"/>
+          <p:cNvPr id="42" name="Text 40"/>
           <p:cNvSpPr txBox="1"/>
           <p:nvPr/>
         </p:nvSpPr>
@@ -9577,7 +9640,7 @@
       </p:sp>
       <p:sp>
         <p:nvSpPr>
-          <p:cNvPr id="42" name="Shape 40"/>
+          <p:cNvPr id="43" name="Shape 41"/>
           <p:cNvSpPr/>
           <p:nvPr/>
         </p:nvSpPr>
@@ -9602,7 +9665,7 @@
       </p:sp>
       <p:sp>
         <p:nvSpPr>
-          <p:cNvPr id="43" name="Text 41"/>
+          <p:cNvPr id="44" name="Text 42"/>
           <p:cNvSpPr txBox="1"/>
           <p:nvPr/>
         </p:nvSpPr>
@@ -9641,7 +9704,7 @@
       </p:sp>
       <p:sp>
         <p:nvSpPr>
-          <p:cNvPr id="44" name="Shape 42"/>
+          <p:cNvPr id="45" name="Shape 43"/>
           <p:cNvSpPr/>
           <p:nvPr/>
         </p:nvSpPr>
@@ -9666,7 +9729,7 @@
       </p:sp>
       <p:sp>
         <p:nvSpPr>
-          <p:cNvPr id="45" name="Text 43"/>
+          <p:cNvPr id="46" name="Text 44"/>
           <p:cNvSpPr txBox="1"/>
           <p:nvPr/>
         </p:nvSpPr>
@@ -10321,7 +10384,70 @@
       </p:sp>
       <p:sp>
         <p:nvSpPr>
-          <p:cNvPr id="19" name="Shape 17"/>
+          <p:cNvPr id="19" name="Text 17"/>
+          <p:cNvSpPr txBox="1"/>
+          <p:nvPr/>
+        </p:nvSpPr>
+        <p:spPr>
+          <a:xfrm>
+            <a:off x="502920" y="3511296"/>
+            <a:ext cx="11201400" cy="777240"/>
+          </a:xfrm>
+          <a:prstGeom prst="rect">
+            <a:avLst/>
+          </a:prstGeom>
+          <a:noFill/>
+          <a:ln/>
+        </p:spPr>
+        <p:txBody>
+          <a:bodyPr wrap="square" lIns="0" tIns="0" rIns="0" bIns="0" rtlCol="0" anchor="ctr"/>
+          <a:lstStyle/>
+          <a:p>
+            <a:pPr indent="0" marL="0">
+              <a:lnSpc>
+                <a:spcPct val="120000"/>
+              </a:lnSpc>
+              <a:buNone/>
+            </a:pPr>
+            <a:r>
+              <a:rPr lang="en-US" sz="850" b="1" dirty="0">
+                <a:solidFill>
+                  <a:srgbClr val="8A8A8A"/>
+                </a:solidFill>
+                <a:latin typeface="Consolas" pitchFamily="34" charset="0"/>
+                <a:ea typeface="Consolas" pitchFamily="34" charset="-122"/>
+                <a:cs typeface="Consolas" pitchFamily="34" charset="-120"/>
+              </a:rPr>
+              <a:t>具体例
+</a:t>
+            </a:r>
+            <a:endParaRPr lang="en-US" sz="850" dirty="0"/>
+          </a:p>
+          <a:p>
+            <a:pPr indent="0" marL="0">
+              <a:lnSpc>
+                <a:spcPct val="120000"/>
+              </a:lnSpc>
+              <a:buNone/>
+            </a:pPr>
+            <a:r>
+              <a:rPr lang="en-US" sz="1000" dirty="0">
+                <a:solidFill>
+                  <a:srgbClr val="171717"/>
+                </a:solidFill>
+                <a:latin typeface="Yu Gothic" pitchFamily="34" charset="0"/>
+                <a:ea typeface="Yu Gothic" pitchFamily="34" charset="-122"/>
+                <a:cs typeface="Yu Gothic" pitchFamily="34" charset="-120"/>
+              </a:rPr>
+              <a:t>海外の特定国からの部品調達に依存していた製造業の中小企業が、感染症流行や国際情勢の変化で部品が届かなくなった経験から、調達先を複数の国・地域に分散させ一部の生産を国内に戻すのは、サプライチェーン強靱化の典型例。</a:t>
+            </a:r>
+            <a:endParaRPr lang="en-US" sz="850" dirty="0"/>
+          </a:p>
+        </p:txBody>
+      </p:sp>
+      <p:sp>
+        <p:nvSpPr>
+          <p:cNvPr id="20" name="Shape 18"/>
           <p:cNvSpPr/>
           <p:nvPr/>
         </p:nvSpPr>
@@ -10344,7 +10470,7 @@
       </p:sp>
       <p:sp>
         <p:nvSpPr>
-          <p:cNvPr id="20" name="Shape 18"/>
+          <p:cNvPr id="21" name="Shape 19"/>
           <p:cNvSpPr/>
           <p:nvPr/>
         </p:nvSpPr>
@@ -10364,7 +10490,7 @@
       </p:sp>
       <p:sp>
         <p:nvSpPr>
-          <p:cNvPr id="21" name="Text 19"/>
+          <p:cNvPr id="22" name="Text 20"/>
           <p:cNvSpPr txBox="1"/>
           <p:nvPr/>
         </p:nvSpPr>
@@ -10403,7 +10529,7 @@
       </p:sp>
       <p:sp>
         <p:nvSpPr>
-          <p:cNvPr id="22" name="Text 20"/>
+          <p:cNvPr id="23" name="Text 21"/>
           <p:cNvSpPr txBox="1"/>
           <p:nvPr/>
         </p:nvSpPr>
@@ -10442,7 +10568,7 @@
       </p:sp>
       <p:sp>
         <p:nvSpPr>
-          <p:cNvPr id="23" name="Shape 21"/>
+          <p:cNvPr id="24" name="Shape 22"/>
           <p:cNvSpPr/>
           <p:nvPr/>
         </p:nvSpPr>
@@ -10465,7 +10591,7 @@
       </p:sp>
       <p:sp>
         <p:nvSpPr>
-          <p:cNvPr id="24" name="Text 22"/>
+          <p:cNvPr id="25" name="Text 23"/>
           <p:cNvSpPr txBox="1"/>
           <p:nvPr/>
         </p:nvSpPr>
@@ -10504,7 +10630,7 @@
       </p:sp>
       <p:sp>
         <p:nvSpPr>
-          <p:cNvPr id="25" name="Text 23"/>
+          <p:cNvPr id="26" name="Text 24"/>
           <p:cNvSpPr txBox="1"/>
           <p:nvPr/>
         </p:nvSpPr>
@@ -10543,7 +10669,7 @@
       </p:sp>
       <p:sp>
         <p:nvSpPr>
-          <p:cNvPr id="26" name="Shape 24"/>
+          <p:cNvPr id="27" name="Shape 25"/>
           <p:cNvSpPr/>
           <p:nvPr/>
         </p:nvSpPr>
@@ -10568,7 +10694,7 @@
       </p:sp>
       <p:sp>
         <p:nvSpPr>
-          <p:cNvPr id="27" name="Text 25"/>
+          <p:cNvPr id="28" name="Text 26"/>
           <p:cNvSpPr txBox="1"/>
           <p:nvPr/>
         </p:nvSpPr>
@@ -10607,7 +10733,7 @@
       </p:sp>
       <p:sp>
         <p:nvSpPr>
-          <p:cNvPr id="28" name="Shape 26"/>
+          <p:cNvPr id="29" name="Shape 27"/>
           <p:cNvSpPr/>
           <p:nvPr/>
         </p:nvSpPr>
@@ -10632,7 +10758,7 @@
       </p:sp>
       <p:sp>
         <p:nvSpPr>
-          <p:cNvPr id="29" name="Text 27"/>
+          <p:cNvPr id="30" name="Text 28"/>
           <p:cNvSpPr txBox="1"/>
           <p:nvPr/>
         </p:nvSpPr>
@@ -10671,7 +10797,7 @@
       </p:sp>
       <p:sp>
         <p:nvSpPr>
-          <p:cNvPr id="30" name="Shape 28"/>
+          <p:cNvPr id="31" name="Shape 29"/>
           <p:cNvSpPr/>
           <p:nvPr/>
         </p:nvSpPr>
@@ -10696,7 +10822,7 @@
       </p:sp>
       <p:sp>
         <p:nvSpPr>
-          <p:cNvPr id="31" name="Text 29"/>
+          <p:cNvPr id="32" name="Text 30"/>
           <p:cNvSpPr txBox="1"/>
           <p:nvPr/>
         </p:nvSpPr>
@@ -10735,7 +10861,7 @@
       </p:sp>
       <p:sp>
         <p:nvSpPr>
-          <p:cNvPr id="32" name="Shape 30"/>
+          <p:cNvPr id="33" name="Shape 31"/>
           <p:cNvSpPr/>
           <p:nvPr/>
         </p:nvSpPr>
@@ -10760,7 +10886,7 @@
       </p:sp>
       <p:sp>
         <p:nvSpPr>
-          <p:cNvPr id="33" name="Text 31"/>
+          <p:cNvPr id="34" name="Text 32"/>
           <p:cNvSpPr txBox="1"/>
           <p:nvPr/>
         </p:nvSpPr>
@@ -10799,7 +10925,7 @@
       </p:sp>
       <p:sp>
         <p:nvSpPr>
-          <p:cNvPr id="34" name="Shape 32"/>
+          <p:cNvPr id="35" name="Shape 33"/>
           <p:cNvSpPr/>
           <p:nvPr/>
         </p:nvSpPr>
@@ -10824,7 +10950,7 @@
       </p:sp>
       <p:sp>
         <p:nvSpPr>
-          <p:cNvPr id="35" name="Text 33"/>
+          <p:cNvPr id="36" name="Text 34"/>
           <p:cNvSpPr txBox="1"/>
           <p:nvPr/>
         </p:nvSpPr>
@@ -10863,7 +10989,7 @@
       </p:sp>
       <p:sp>
         <p:nvSpPr>
-          <p:cNvPr id="36" name="Shape 34"/>
+          <p:cNvPr id="37" name="Shape 35"/>
           <p:cNvSpPr/>
           <p:nvPr/>
         </p:nvSpPr>
@@ -10888,7 +11014,7 @@
       </p:sp>
       <p:sp>
         <p:nvSpPr>
-          <p:cNvPr id="37" name="Text 35"/>
+          <p:cNvPr id="38" name="Text 36"/>
           <p:cNvSpPr txBox="1"/>
           <p:nvPr/>
         </p:nvSpPr>
@@ -10927,7 +11053,7 @@
       </p:sp>
       <p:sp>
         <p:nvSpPr>
-          <p:cNvPr id="38" name="Shape 36"/>
+          <p:cNvPr id="39" name="Shape 37"/>
           <p:cNvSpPr/>
           <p:nvPr/>
         </p:nvSpPr>
@@ -10952,7 +11078,7 @@
       </p:sp>
       <p:sp>
         <p:nvSpPr>
-          <p:cNvPr id="39" name="Text 37"/>
+          <p:cNvPr id="40" name="Text 38"/>
           <p:cNvSpPr txBox="1"/>
           <p:nvPr/>
         </p:nvSpPr>
@@ -10991,7 +11117,7 @@
       </p:sp>
       <p:sp>
         <p:nvSpPr>
-          <p:cNvPr id="40" name="Shape 38"/>
+          <p:cNvPr id="41" name="Shape 39"/>
           <p:cNvSpPr/>
           <p:nvPr/>
         </p:nvSpPr>
@@ -11016,7 +11142,7 @@
       </p:sp>
       <p:sp>
         <p:nvSpPr>
-          <p:cNvPr id="41" name="Text 39"/>
+          <p:cNvPr id="42" name="Text 40"/>
           <p:cNvSpPr txBox="1"/>
           <p:nvPr/>
         </p:nvSpPr>
@@ -11055,7 +11181,7 @@
       </p:sp>
       <p:sp>
         <p:nvSpPr>
-          <p:cNvPr id="42" name="Shape 40"/>
+          <p:cNvPr id="43" name="Shape 41"/>
           <p:cNvSpPr/>
           <p:nvPr/>
         </p:nvSpPr>
@@ -11080,7 +11206,7 @@
       </p:sp>
       <p:sp>
         <p:nvSpPr>
-          <p:cNvPr id="43" name="Text 41"/>
+          <p:cNvPr id="44" name="Text 42"/>
           <p:cNvSpPr txBox="1"/>
           <p:nvPr/>
         </p:nvSpPr>
@@ -11119,7 +11245,7 @@
       </p:sp>
       <p:sp>
         <p:nvSpPr>
-          <p:cNvPr id="44" name="Shape 42"/>
+          <p:cNvPr id="45" name="Shape 43"/>
           <p:cNvSpPr/>
           <p:nvPr/>
         </p:nvSpPr>
@@ -11144,7 +11270,7 @@
       </p:sp>
       <p:sp>
         <p:nvSpPr>
-          <p:cNvPr id="45" name="Text 43"/>
+          <p:cNvPr id="46" name="Text 44"/>
           <p:cNvSpPr txBox="1"/>
           <p:nvPr/>
         </p:nvSpPr>
@@ -16442,7 +16568,70 @@
       </p:sp>
       <p:sp>
         <p:nvSpPr>
-          <p:cNvPr id="19" name="Shape 17"/>
+          <p:cNvPr id="19" name="Text 17"/>
+          <p:cNvSpPr txBox="1"/>
+          <p:nvPr/>
+        </p:nvSpPr>
+        <p:spPr>
+          <a:xfrm>
+            <a:off x="502920" y="3511296"/>
+            <a:ext cx="11201400" cy="777240"/>
+          </a:xfrm>
+          <a:prstGeom prst="rect">
+            <a:avLst/>
+          </a:prstGeom>
+          <a:noFill/>
+          <a:ln/>
+        </p:spPr>
+        <p:txBody>
+          <a:bodyPr wrap="square" lIns="0" tIns="0" rIns="0" bIns="0" rtlCol="0" anchor="ctr"/>
+          <a:lstStyle/>
+          <a:p>
+            <a:pPr indent="0" marL="0">
+              <a:lnSpc>
+                <a:spcPct val="120000"/>
+              </a:lnSpc>
+              <a:buNone/>
+            </a:pPr>
+            <a:r>
+              <a:rPr lang="en-US" sz="850" b="1" dirty="0">
+                <a:solidFill>
+                  <a:srgbClr val="8A8A8A"/>
+                </a:solidFill>
+                <a:latin typeface="Consolas" pitchFamily="34" charset="0"/>
+                <a:ea typeface="Consolas" pitchFamily="34" charset="-122"/>
+                <a:cs typeface="Consolas" pitchFamily="34" charset="-120"/>
+              </a:rPr>
+              <a:t>具体例
+</a:t>
+            </a:r>
+            <a:endParaRPr lang="en-US" sz="850" dirty="0"/>
+          </a:p>
+          <a:p>
+            <a:pPr indent="0" marL="0">
+              <a:lnSpc>
+                <a:spcPct val="120000"/>
+              </a:lnSpc>
+              <a:buNone/>
+            </a:pPr>
+            <a:r>
+              <a:rPr lang="en-US" sz="1000" dirty="0">
+                <a:solidFill>
+                  <a:srgbClr val="171717"/>
+                </a:solidFill>
+                <a:latin typeface="Yu Gothic" pitchFamily="34" charset="0"/>
+                <a:ea typeface="Yu Gothic" pitchFamily="34" charset="-122"/>
+                <a:cs typeface="Yu Gothic" pitchFamily="34" charset="-120"/>
+              </a:rPr>
+              <a:t>大手自動車メーカーがサプライチェーン全体のCO2排出量削減を取引先に求めるようになると、部品を供給する中小企業も自社工場の省エネ化やCO2排出量の把握・開示への対応を迫られる。大企業の環境対応方針が中小企業にも波及する例。</a:t>
+            </a:r>
+            <a:endParaRPr lang="en-US" sz="850" dirty="0"/>
+          </a:p>
+        </p:txBody>
+      </p:sp>
+      <p:sp>
+        <p:nvSpPr>
+          <p:cNvPr id="20" name="Shape 18"/>
           <p:cNvSpPr/>
           <p:nvPr/>
         </p:nvSpPr>
@@ -16465,7 +16654,7 @@
       </p:sp>
       <p:sp>
         <p:nvSpPr>
-          <p:cNvPr id="20" name="Shape 18"/>
+          <p:cNvPr id="21" name="Shape 19"/>
           <p:cNvSpPr/>
           <p:nvPr/>
         </p:nvSpPr>
@@ -16485,7 +16674,7 @@
       </p:sp>
       <p:sp>
         <p:nvSpPr>
-          <p:cNvPr id="21" name="Text 19"/>
+          <p:cNvPr id="22" name="Text 20"/>
           <p:cNvSpPr txBox="1"/>
           <p:nvPr/>
         </p:nvSpPr>
@@ -16524,7 +16713,7 @@
       </p:sp>
       <p:sp>
         <p:nvSpPr>
-          <p:cNvPr id="22" name="Text 20"/>
+          <p:cNvPr id="23" name="Text 21"/>
           <p:cNvSpPr txBox="1"/>
           <p:nvPr/>
         </p:nvSpPr>
@@ -16563,7 +16752,7 @@
       </p:sp>
       <p:sp>
         <p:nvSpPr>
-          <p:cNvPr id="23" name="Shape 21"/>
+          <p:cNvPr id="24" name="Shape 22"/>
           <p:cNvSpPr/>
           <p:nvPr/>
         </p:nvSpPr>
@@ -16586,7 +16775,7 @@
       </p:sp>
       <p:sp>
         <p:nvSpPr>
-          <p:cNvPr id="24" name="Text 22"/>
+          <p:cNvPr id="25" name="Text 23"/>
           <p:cNvSpPr txBox="1"/>
           <p:nvPr/>
         </p:nvSpPr>
@@ -16625,7 +16814,7 @@
       </p:sp>
       <p:sp>
         <p:nvSpPr>
-          <p:cNvPr id="25" name="Text 23"/>
+          <p:cNvPr id="26" name="Text 24"/>
           <p:cNvSpPr txBox="1"/>
           <p:nvPr/>
         </p:nvSpPr>
@@ -16664,7 +16853,7 @@
       </p:sp>
       <p:sp>
         <p:nvSpPr>
-          <p:cNvPr id="26" name="Shape 24"/>
+          <p:cNvPr id="27" name="Shape 25"/>
           <p:cNvSpPr/>
           <p:nvPr/>
         </p:nvSpPr>
@@ -16689,7 +16878,7 @@
       </p:sp>
       <p:sp>
         <p:nvSpPr>
-          <p:cNvPr id="27" name="Text 25"/>
+          <p:cNvPr id="28" name="Text 26"/>
           <p:cNvSpPr txBox="1"/>
           <p:nvPr/>
         </p:nvSpPr>
@@ -16728,7 +16917,7 @@
       </p:sp>
       <p:sp>
         <p:nvSpPr>
-          <p:cNvPr id="28" name="Shape 26"/>
+          <p:cNvPr id="29" name="Shape 27"/>
           <p:cNvSpPr/>
           <p:nvPr/>
         </p:nvSpPr>
@@ -16753,7 +16942,7 @@
       </p:sp>
       <p:sp>
         <p:nvSpPr>
-          <p:cNvPr id="29" name="Text 27"/>
+          <p:cNvPr id="30" name="Text 28"/>
           <p:cNvSpPr txBox="1"/>
           <p:nvPr/>
         </p:nvSpPr>
@@ -16792,7 +16981,7 @@
       </p:sp>
       <p:sp>
         <p:nvSpPr>
-          <p:cNvPr id="30" name="Shape 28"/>
+          <p:cNvPr id="31" name="Shape 29"/>
           <p:cNvSpPr/>
           <p:nvPr/>
         </p:nvSpPr>
@@ -16817,7 +17006,7 @@
       </p:sp>
       <p:sp>
         <p:nvSpPr>
-          <p:cNvPr id="31" name="Text 29"/>
+          <p:cNvPr id="32" name="Text 30"/>
           <p:cNvSpPr txBox="1"/>
           <p:nvPr/>
         </p:nvSpPr>
@@ -16856,7 +17045,7 @@
       </p:sp>
       <p:sp>
         <p:nvSpPr>
-          <p:cNvPr id="32" name="Shape 30"/>
+          <p:cNvPr id="33" name="Shape 31"/>
           <p:cNvSpPr/>
           <p:nvPr/>
         </p:nvSpPr>
@@ -16881,7 +17070,7 @@
       </p:sp>
       <p:sp>
         <p:nvSpPr>
-          <p:cNvPr id="33" name="Text 31"/>
+          <p:cNvPr id="34" name="Text 32"/>
           <p:cNvSpPr txBox="1"/>
           <p:nvPr/>
         </p:nvSpPr>
@@ -16920,7 +17109,7 @@
       </p:sp>
       <p:sp>
         <p:nvSpPr>
-          <p:cNvPr id="34" name="Shape 32"/>
+          <p:cNvPr id="35" name="Shape 33"/>
           <p:cNvSpPr/>
           <p:nvPr/>
         </p:nvSpPr>
@@ -16945,7 +17134,7 @@
       </p:sp>
       <p:sp>
         <p:nvSpPr>
-          <p:cNvPr id="35" name="Text 33"/>
+          <p:cNvPr id="36" name="Text 34"/>
           <p:cNvSpPr txBox="1"/>
           <p:nvPr/>
         </p:nvSpPr>
@@ -16984,7 +17173,7 @@
       </p:sp>
       <p:sp>
         <p:nvSpPr>
-          <p:cNvPr id="36" name="Shape 34"/>
+          <p:cNvPr id="37" name="Shape 35"/>
           <p:cNvSpPr/>
           <p:nvPr/>
         </p:nvSpPr>
@@ -17009,7 +17198,7 @@
       </p:sp>
       <p:sp>
         <p:nvSpPr>
-          <p:cNvPr id="37" name="Text 35"/>
+          <p:cNvPr id="38" name="Text 36"/>
           <p:cNvSpPr txBox="1"/>
           <p:nvPr/>
         </p:nvSpPr>
@@ -17048,7 +17237,7 @@
       </p:sp>
       <p:sp>
         <p:nvSpPr>
-          <p:cNvPr id="38" name="Shape 36"/>
+          <p:cNvPr id="39" name="Shape 37"/>
           <p:cNvSpPr/>
           <p:nvPr/>
         </p:nvSpPr>
@@ -17073,7 +17262,7 @@
       </p:sp>
       <p:sp>
         <p:nvSpPr>
-          <p:cNvPr id="39" name="Text 37"/>
+          <p:cNvPr id="40" name="Text 38"/>
           <p:cNvSpPr txBox="1"/>
           <p:nvPr/>
         </p:nvSpPr>
@@ -17112,7 +17301,7 @@
       </p:sp>
       <p:sp>
         <p:nvSpPr>
-          <p:cNvPr id="40" name="Shape 38"/>
+          <p:cNvPr id="41" name="Shape 39"/>
           <p:cNvSpPr/>
           <p:nvPr/>
         </p:nvSpPr>
@@ -17137,7 +17326,7 @@
       </p:sp>
       <p:sp>
         <p:nvSpPr>
-          <p:cNvPr id="41" name="Text 39"/>
+          <p:cNvPr id="42" name="Text 40"/>
           <p:cNvSpPr txBox="1"/>
           <p:nvPr/>
         </p:nvSpPr>
@@ -17176,7 +17365,7 @@
       </p:sp>
       <p:sp>
         <p:nvSpPr>
-          <p:cNvPr id="42" name="Shape 40"/>
+          <p:cNvPr id="43" name="Shape 41"/>
           <p:cNvSpPr/>
           <p:nvPr/>
         </p:nvSpPr>
@@ -17201,7 +17390,7 @@
       </p:sp>
       <p:sp>
         <p:nvSpPr>
-          <p:cNvPr id="43" name="Text 41"/>
+          <p:cNvPr id="44" name="Text 42"/>
           <p:cNvSpPr txBox="1"/>
           <p:nvPr/>
         </p:nvSpPr>
@@ -17240,7 +17429,7 @@
       </p:sp>
       <p:sp>
         <p:nvSpPr>
-          <p:cNvPr id="44" name="Shape 42"/>
+          <p:cNvPr id="45" name="Shape 43"/>
           <p:cNvSpPr/>
           <p:nvPr/>
         </p:nvSpPr>
@@ -17265,7 +17454,7 @@
       </p:sp>
       <p:sp>
         <p:nvSpPr>
-          <p:cNvPr id="45" name="Text 43"/>
+          <p:cNvPr id="46" name="Text 44"/>
           <p:cNvSpPr txBox="1"/>
           <p:nvPr/>
         </p:nvSpPr>
@@ -21708,7 +21897,70 @@
       </p:sp>
       <p:sp>
         <p:nvSpPr>
-          <p:cNvPr id="18" name="Shape 16"/>
+          <p:cNvPr id="18" name="Text 16"/>
+          <p:cNvSpPr txBox="1"/>
+          <p:nvPr/>
+        </p:nvSpPr>
+        <p:spPr>
+          <a:xfrm>
+            <a:off x="502920" y="5166360"/>
+            <a:ext cx="11201400" cy="640080"/>
+          </a:xfrm>
+          <a:prstGeom prst="rect">
+            <a:avLst/>
+          </a:prstGeom>
+          <a:noFill/>
+          <a:ln/>
+        </p:spPr>
+        <p:txBody>
+          <a:bodyPr wrap="square" lIns="0" tIns="0" rIns="0" bIns="0" rtlCol="0" anchor="ctr"/>
+          <a:lstStyle/>
+          <a:p>
+            <a:pPr indent="0" marL="0">
+              <a:lnSpc>
+                <a:spcPct val="120000"/>
+              </a:lnSpc>
+              <a:buNone/>
+            </a:pPr>
+            <a:r>
+              <a:rPr lang="en-US" sz="850" b="1" dirty="0">
+                <a:solidFill>
+                  <a:srgbClr val="8A8A8A"/>
+                </a:solidFill>
+                <a:latin typeface="Consolas" pitchFamily="34" charset="0"/>
+                <a:ea typeface="Consolas" pitchFamily="34" charset="-122"/>
+                <a:cs typeface="Consolas" pitchFamily="34" charset="-120"/>
+              </a:rPr>
+              <a:t>具体例
+</a:t>
+            </a:r>
+            <a:endParaRPr lang="en-US" sz="850" dirty="0"/>
+          </a:p>
+          <a:p>
+            <a:pPr indent="0" marL="0">
+              <a:lnSpc>
+                <a:spcPct val="120000"/>
+              </a:lnSpc>
+              <a:buNone/>
+            </a:pPr>
+            <a:r>
+              <a:rPr lang="en-US" sz="1000" dirty="0">
+                <a:solidFill>
+                  <a:srgbClr val="171717"/>
+                </a:solidFill>
+                <a:latin typeface="Yu Gothic" pitchFamily="34" charset="0"/>
+                <a:ea typeface="Yu Gothic" pitchFamily="34" charset="-122"/>
+                <a:cs typeface="Yu Gothic" pitchFamily="34" charset="-120"/>
+              </a:rPr>
+              <a:t>後継者のいない金属加工業の経営者が、廃業して従業員を解雇するのではなく、同業の企業に会社を売却（M&amp;A）することで雇用と技術を存続させるケースが近年増加している。</a:t>
+            </a:r>
+            <a:endParaRPr lang="en-US" sz="850" dirty="0"/>
+          </a:p>
+        </p:txBody>
+      </p:sp>
+      <p:sp>
+        <p:nvSpPr>
+          <p:cNvPr id="19" name="Shape 17"/>
           <p:cNvSpPr/>
           <p:nvPr/>
         </p:nvSpPr>
@@ -21731,7 +21983,7 @@
       </p:sp>
       <p:sp>
         <p:nvSpPr>
-          <p:cNvPr id="19" name="Shape 17"/>
+          <p:cNvPr id="20" name="Shape 18"/>
           <p:cNvSpPr/>
           <p:nvPr/>
         </p:nvSpPr>
@@ -21751,7 +22003,7 @@
       </p:sp>
       <p:sp>
         <p:nvSpPr>
-          <p:cNvPr id="20" name="Text 18"/>
+          <p:cNvPr id="21" name="Text 19"/>
           <p:cNvSpPr txBox="1"/>
           <p:nvPr/>
         </p:nvSpPr>
@@ -21790,7 +22042,7 @@
       </p:sp>
       <p:sp>
         <p:nvSpPr>
-          <p:cNvPr id="21" name="Text 19"/>
+          <p:cNvPr id="22" name="Text 20"/>
           <p:cNvSpPr txBox="1"/>
           <p:nvPr/>
         </p:nvSpPr>
@@ -21829,7 +22081,7 @@
       </p:sp>
       <p:sp>
         <p:nvSpPr>
-          <p:cNvPr id="22" name="Shape 20"/>
+          <p:cNvPr id="23" name="Shape 21"/>
           <p:cNvSpPr/>
           <p:nvPr/>
         </p:nvSpPr>
@@ -21852,7 +22104,7 @@
       </p:sp>
       <p:sp>
         <p:nvSpPr>
-          <p:cNvPr id="23" name="Text 21"/>
+          <p:cNvPr id="24" name="Text 22"/>
           <p:cNvSpPr txBox="1"/>
           <p:nvPr/>
         </p:nvSpPr>
@@ -21891,7 +22143,7 @@
       </p:sp>
       <p:sp>
         <p:nvSpPr>
-          <p:cNvPr id="24" name="Text 22"/>
+          <p:cNvPr id="25" name="Text 23"/>
           <p:cNvSpPr txBox="1"/>
           <p:nvPr/>
         </p:nvSpPr>
@@ -21930,7 +22182,7 @@
       </p:sp>
       <p:sp>
         <p:nvSpPr>
-          <p:cNvPr id="25" name="Shape 23"/>
+          <p:cNvPr id="26" name="Shape 24"/>
           <p:cNvSpPr/>
           <p:nvPr/>
         </p:nvSpPr>
@@ -21955,7 +22207,7 @@
       </p:sp>
       <p:sp>
         <p:nvSpPr>
-          <p:cNvPr id="26" name="Text 24"/>
+          <p:cNvPr id="27" name="Text 25"/>
           <p:cNvSpPr txBox="1"/>
           <p:nvPr/>
         </p:nvSpPr>
@@ -21994,7 +22246,7 @@
       </p:sp>
       <p:sp>
         <p:nvSpPr>
-          <p:cNvPr id="27" name="Shape 25"/>
+          <p:cNvPr id="28" name="Shape 26"/>
           <p:cNvSpPr/>
           <p:nvPr/>
         </p:nvSpPr>
@@ -22019,7 +22271,7 @@
       </p:sp>
       <p:sp>
         <p:nvSpPr>
-          <p:cNvPr id="28" name="Text 26"/>
+          <p:cNvPr id="29" name="Text 27"/>
           <p:cNvSpPr txBox="1"/>
           <p:nvPr/>
         </p:nvSpPr>
@@ -22058,7 +22310,7 @@
       </p:sp>
       <p:sp>
         <p:nvSpPr>
-          <p:cNvPr id="29" name="Shape 27"/>
+          <p:cNvPr id="30" name="Shape 28"/>
           <p:cNvSpPr/>
           <p:nvPr/>
         </p:nvSpPr>
@@ -22083,7 +22335,7 @@
       </p:sp>
       <p:sp>
         <p:nvSpPr>
-          <p:cNvPr id="30" name="Text 28"/>
+          <p:cNvPr id="31" name="Text 29"/>
           <p:cNvSpPr txBox="1"/>
           <p:nvPr/>
         </p:nvSpPr>
@@ -22122,7 +22374,7 @@
       </p:sp>
       <p:sp>
         <p:nvSpPr>
-          <p:cNvPr id="31" name="Shape 29"/>
+          <p:cNvPr id="32" name="Shape 30"/>
           <p:cNvSpPr/>
           <p:nvPr/>
         </p:nvSpPr>
@@ -22147,7 +22399,7 @@
       </p:sp>
       <p:sp>
         <p:nvSpPr>
-          <p:cNvPr id="32" name="Text 30"/>
+          <p:cNvPr id="33" name="Text 31"/>
           <p:cNvSpPr txBox="1"/>
           <p:nvPr/>
         </p:nvSpPr>
@@ -22186,7 +22438,7 @@
       </p:sp>
       <p:sp>
         <p:nvSpPr>
-          <p:cNvPr id="33" name="Shape 31"/>
+          <p:cNvPr id="34" name="Shape 32"/>
           <p:cNvSpPr/>
           <p:nvPr/>
         </p:nvSpPr>
@@ -22211,7 +22463,7 @@
       </p:sp>
       <p:sp>
         <p:nvSpPr>
-          <p:cNvPr id="34" name="Text 32"/>
+          <p:cNvPr id="35" name="Text 33"/>
           <p:cNvSpPr txBox="1"/>
           <p:nvPr/>
         </p:nvSpPr>
@@ -22250,7 +22502,7 @@
       </p:sp>
       <p:sp>
         <p:nvSpPr>
-          <p:cNvPr id="35" name="Shape 33"/>
+          <p:cNvPr id="36" name="Shape 34"/>
           <p:cNvSpPr/>
           <p:nvPr/>
         </p:nvSpPr>
@@ -22275,7 +22527,7 @@
       </p:sp>
       <p:sp>
         <p:nvSpPr>
-          <p:cNvPr id="36" name="Text 34"/>
+          <p:cNvPr id="37" name="Text 35"/>
           <p:cNvSpPr txBox="1"/>
           <p:nvPr/>
         </p:nvSpPr>
@@ -22314,7 +22566,7 @@
       </p:sp>
       <p:sp>
         <p:nvSpPr>
-          <p:cNvPr id="37" name="Shape 35"/>
+          <p:cNvPr id="38" name="Shape 36"/>
           <p:cNvSpPr/>
           <p:nvPr/>
         </p:nvSpPr>
@@ -22339,7 +22591,7 @@
       </p:sp>
       <p:sp>
         <p:nvSpPr>
-          <p:cNvPr id="38" name="Text 36"/>
+          <p:cNvPr id="39" name="Text 37"/>
           <p:cNvSpPr txBox="1"/>
           <p:nvPr/>
         </p:nvSpPr>
@@ -22378,7 +22630,7 @@
       </p:sp>
       <p:sp>
         <p:nvSpPr>
-          <p:cNvPr id="39" name="Shape 37"/>
+          <p:cNvPr id="40" name="Shape 38"/>
           <p:cNvSpPr/>
           <p:nvPr/>
         </p:nvSpPr>
@@ -22403,7 +22655,7 @@
       </p:sp>
       <p:sp>
         <p:nvSpPr>
-          <p:cNvPr id="40" name="Text 38"/>
+          <p:cNvPr id="41" name="Text 39"/>
           <p:cNvSpPr txBox="1"/>
           <p:nvPr/>
         </p:nvSpPr>
@@ -22442,7 +22694,7 @@
       </p:sp>
       <p:sp>
         <p:nvSpPr>
-          <p:cNvPr id="41" name="Shape 39"/>
+          <p:cNvPr id="42" name="Shape 40"/>
           <p:cNvSpPr/>
           <p:nvPr/>
         </p:nvSpPr>
@@ -22467,7 +22719,7 @@
       </p:sp>
       <p:sp>
         <p:nvSpPr>
-          <p:cNvPr id="42" name="Text 40"/>
+          <p:cNvPr id="43" name="Text 41"/>
           <p:cNvSpPr txBox="1"/>
           <p:nvPr/>
         </p:nvSpPr>
@@ -22506,7 +22758,7 @@
       </p:sp>
       <p:sp>
         <p:nvSpPr>
-          <p:cNvPr id="43" name="Shape 41"/>
+          <p:cNvPr id="44" name="Shape 42"/>
           <p:cNvSpPr/>
           <p:nvPr/>
         </p:nvSpPr>
@@ -22531,7 +22783,7 @@
       </p:sp>
       <p:sp>
         <p:nvSpPr>
-          <p:cNvPr id="44" name="Text 42"/>
+          <p:cNvPr id="45" name="Text 43"/>
           <p:cNvSpPr txBox="1"/>
           <p:nvPr/>
         </p:nvSpPr>
@@ -23186,7 +23438,70 @@
       </p:sp>
       <p:sp>
         <p:nvSpPr>
-          <p:cNvPr id="19" name="Shape 17"/>
+          <p:cNvPr id="19" name="Text 17"/>
+          <p:cNvSpPr txBox="1"/>
+          <p:nvPr/>
+        </p:nvSpPr>
+        <p:spPr>
+          <a:xfrm>
+            <a:off x="502920" y="3511296"/>
+            <a:ext cx="11201400" cy="777240"/>
+          </a:xfrm>
+          <a:prstGeom prst="rect">
+            <a:avLst/>
+          </a:prstGeom>
+          <a:noFill/>
+          <a:ln/>
+        </p:spPr>
+        <p:txBody>
+          <a:bodyPr wrap="square" lIns="0" tIns="0" rIns="0" bIns="0" rtlCol="0" anchor="ctr"/>
+          <a:lstStyle/>
+          <a:p>
+            <a:pPr indent="0" marL="0">
+              <a:lnSpc>
+                <a:spcPct val="120000"/>
+              </a:lnSpc>
+              <a:buNone/>
+            </a:pPr>
+            <a:r>
+              <a:rPr lang="en-US" sz="850" b="1" dirty="0">
+                <a:solidFill>
+                  <a:srgbClr val="8A8A8A"/>
+                </a:solidFill>
+                <a:latin typeface="Consolas" pitchFamily="34" charset="0"/>
+                <a:ea typeface="Consolas" pitchFamily="34" charset="-122"/>
+                <a:cs typeface="Consolas" pitchFamily="34" charset="-120"/>
+              </a:rPr>
+              <a:t>具体例
+</a:t>
+            </a:r>
+            <a:endParaRPr lang="en-US" sz="850" dirty="0"/>
+          </a:p>
+          <a:p>
+            <a:pPr indent="0" marL="0">
+              <a:lnSpc>
+                <a:spcPct val="120000"/>
+              </a:lnSpc>
+              <a:buNone/>
+            </a:pPr>
+            <a:r>
+              <a:rPr lang="en-US" sz="1000" dirty="0">
+                <a:solidFill>
+                  <a:srgbClr val="171717"/>
+                </a:solidFill>
+                <a:latin typeface="Yu Gothic" pitchFamily="34" charset="0"/>
+                <a:ea typeface="Yu Gothic" pitchFamily="34" charset="-122"/>
+                <a:cs typeface="Yu Gothic" pitchFamily="34" charset="-120"/>
+              </a:rPr>
+              <a:t>国内市場の縮小に直面した地方の食品メーカーが、まずJETROの支援を受けて海外の見本市に出展し、輸出による海外販路開拓から着手するのが中小企業の典型的な海外展開のステップ。</a:t>
+            </a:r>
+            <a:endParaRPr lang="en-US" sz="850" dirty="0"/>
+          </a:p>
+        </p:txBody>
+      </p:sp>
+      <p:sp>
+        <p:nvSpPr>
+          <p:cNvPr id="20" name="Shape 18"/>
           <p:cNvSpPr/>
           <p:nvPr/>
         </p:nvSpPr>
@@ -23209,7 +23524,7 @@
       </p:sp>
       <p:sp>
         <p:nvSpPr>
-          <p:cNvPr id="20" name="Shape 18"/>
+          <p:cNvPr id="21" name="Shape 19"/>
           <p:cNvSpPr/>
           <p:nvPr/>
         </p:nvSpPr>
@@ -23229,7 +23544,7 @@
       </p:sp>
       <p:sp>
         <p:nvSpPr>
-          <p:cNvPr id="21" name="Text 19"/>
+          <p:cNvPr id="22" name="Text 20"/>
           <p:cNvSpPr txBox="1"/>
           <p:nvPr/>
         </p:nvSpPr>
@@ -23268,7 +23583,7 @@
       </p:sp>
       <p:sp>
         <p:nvSpPr>
-          <p:cNvPr id="22" name="Text 20"/>
+          <p:cNvPr id="23" name="Text 21"/>
           <p:cNvSpPr txBox="1"/>
           <p:nvPr/>
         </p:nvSpPr>
@@ -23307,7 +23622,7 @@
       </p:sp>
       <p:sp>
         <p:nvSpPr>
-          <p:cNvPr id="23" name="Shape 21"/>
+          <p:cNvPr id="24" name="Shape 22"/>
           <p:cNvSpPr/>
           <p:nvPr/>
         </p:nvSpPr>
@@ -23330,7 +23645,7 @@
       </p:sp>
       <p:sp>
         <p:nvSpPr>
-          <p:cNvPr id="24" name="Text 22"/>
+          <p:cNvPr id="25" name="Text 23"/>
           <p:cNvSpPr txBox="1"/>
           <p:nvPr/>
         </p:nvSpPr>
@@ -23369,7 +23684,7 @@
       </p:sp>
       <p:sp>
         <p:nvSpPr>
-          <p:cNvPr id="25" name="Text 23"/>
+          <p:cNvPr id="26" name="Text 24"/>
           <p:cNvSpPr txBox="1"/>
           <p:nvPr/>
         </p:nvSpPr>
@@ -23408,7 +23723,7 @@
       </p:sp>
       <p:sp>
         <p:nvSpPr>
-          <p:cNvPr id="26" name="Shape 24"/>
+          <p:cNvPr id="27" name="Shape 25"/>
           <p:cNvSpPr/>
           <p:nvPr/>
         </p:nvSpPr>
@@ -23433,7 +23748,7 @@
       </p:sp>
       <p:sp>
         <p:nvSpPr>
-          <p:cNvPr id="27" name="Text 25"/>
+          <p:cNvPr id="28" name="Text 26"/>
           <p:cNvSpPr txBox="1"/>
           <p:nvPr/>
         </p:nvSpPr>
@@ -23472,7 +23787,7 @@
       </p:sp>
       <p:sp>
         <p:nvSpPr>
-          <p:cNvPr id="28" name="Shape 26"/>
+          <p:cNvPr id="29" name="Shape 27"/>
           <p:cNvSpPr/>
           <p:nvPr/>
         </p:nvSpPr>
@@ -23497,7 +23812,7 @@
       </p:sp>
       <p:sp>
         <p:nvSpPr>
-          <p:cNvPr id="29" name="Text 27"/>
+          <p:cNvPr id="30" name="Text 28"/>
           <p:cNvSpPr txBox="1"/>
           <p:nvPr/>
         </p:nvSpPr>
@@ -23536,7 +23851,7 @@
       </p:sp>
       <p:sp>
         <p:nvSpPr>
-          <p:cNvPr id="30" name="Shape 28"/>
+          <p:cNvPr id="31" name="Shape 29"/>
           <p:cNvSpPr/>
           <p:nvPr/>
         </p:nvSpPr>
@@ -23561,7 +23876,7 @@
       </p:sp>
       <p:sp>
         <p:nvSpPr>
-          <p:cNvPr id="31" name="Text 29"/>
+          <p:cNvPr id="32" name="Text 30"/>
           <p:cNvSpPr txBox="1"/>
           <p:nvPr/>
         </p:nvSpPr>
@@ -23600,7 +23915,7 @@
       </p:sp>
       <p:sp>
         <p:nvSpPr>
-          <p:cNvPr id="32" name="Shape 30"/>
+          <p:cNvPr id="33" name="Shape 31"/>
           <p:cNvSpPr/>
           <p:nvPr/>
         </p:nvSpPr>
@@ -23625,7 +23940,7 @@
       </p:sp>
       <p:sp>
         <p:nvSpPr>
-          <p:cNvPr id="33" name="Text 31"/>
+          <p:cNvPr id="34" name="Text 32"/>
           <p:cNvSpPr txBox="1"/>
           <p:nvPr/>
         </p:nvSpPr>
@@ -23664,7 +23979,7 @@
       </p:sp>
       <p:sp>
         <p:nvSpPr>
-          <p:cNvPr id="34" name="Shape 32"/>
+          <p:cNvPr id="35" name="Shape 33"/>
           <p:cNvSpPr/>
           <p:nvPr/>
         </p:nvSpPr>
@@ -23689,7 +24004,7 @@
       </p:sp>
       <p:sp>
         <p:nvSpPr>
-          <p:cNvPr id="35" name="Text 33"/>
+          <p:cNvPr id="36" name="Text 34"/>
           <p:cNvSpPr txBox="1"/>
           <p:nvPr/>
         </p:nvSpPr>
@@ -23728,7 +24043,7 @@
       </p:sp>
       <p:sp>
         <p:nvSpPr>
-          <p:cNvPr id="36" name="Shape 34"/>
+          <p:cNvPr id="37" name="Shape 35"/>
           <p:cNvSpPr/>
           <p:nvPr/>
         </p:nvSpPr>
@@ -23753,7 +24068,7 @@
       </p:sp>
       <p:sp>
         <p:nvSpPr>
-          <p:cNvPr id="37" name="Text 35"/>
+          <p:cNvPr id="38" name="Text 36"/>
           <p:cNvSpPr txBox="1"/>
           <p:nvPr/>
         </p:nvSpPr>
@@ -23792,7 +24107,7 @@
       </p:sp>
       <p:sp>
         <p:nvSpPr>
-          <p:cNvPr id="38" name="Shape 36"/>
+          <p:cNvPr id="39" name="Shape 37"/>
           <p:cNvSpPr/>
           <p:nvPr/>
         </p:nvSpPr>
@@ -23817,7 +24132,7 @@
       </p:sp>
       <p:sp>
         <p:nvSpPr>
-          <p:cNvPr id="39" name="Text 37"/>
+          <p:cNvPr id="40" name="Text 38"/>
           <p:cNvSpPr txBox="1"/>
           <p:nvPr/>
         </p:nvSpPr>
@@ -23856,7 +24171,7 @@
       </p:sp>
       <p:sp>
         <p:nvSpPr>
-          <p:cNvPr id="40" name="Shape 38"/>
+          <p:cNvPr id="41" name="Shape 39"/>
           <p:cNvSpPr/>
           <p:nvPr/>
         </p:nvSpPr>
@@ -23881,7 +24196,7 @@
       </p:sp>
       <p:sp>
         <p:nvSpPr>
-          <p:cNvPr id="41" name="Text 39"/>
+          <p:cNvPr id="42" name="Text 40"/>
           <p:cNvSpPr txBox="1"/>
           <p:nvPr/>
         </p:nvSpPr>
@@ -23920,7 +24235,7 @@
       </p:sp>
       <p:sp>
         <p:nvSpPr>
-          <p:cNvPr id="42" name="Shape 40"/>
+          <p:cNvPr id="43" name="Shape 41"/>
           <p:cNvSpPr/>
           <p:nvPr/>
         </p:nvSpPr>
@@ -23945,7 +24260,7 @@
       </p:sp>
       <p:sp>
         <p:nvSpPr>
-          <p:cNvPr id="43" name="Text 41"/>
+          <p:cNvPr id="44" name="Text 42"/>
           <p:cNvSpPr txBox="1"/>
           <p:nvPr/>
         </p:nvSpPr>
@@ -23984,7 +24299,7 @@
       </p:sp>
       <p:sp>
         <p:nvSpPr>
-          <p:cNvPr id="44" name="Shape 42"/>
+          <p:cNvPr id="45" name="Shape 43"/>
           <p:cNvSpPr/>
           <p:nvPr/>
         </p:nvSpPr>
@@ -24009,7 +24324,7 @@
       </p:sp>
       <p:sp>
         <p:nvSpPr>
-          <p:cNvPr id="45" name="Text 43"/>
+          <p:cNvPr id="46" name="Text 44"/>
           <p:cNvSpPr txBox="1"/>
           <p:nvPr/>
         </p:nvSpPr>
@@ -24664,7 +24979,70 @@
       </p:sp>
       <p:sp>
         <p:nvSpPr>
-          <p:cNvPr id="19" name="Shape 17"/>
+          <p:cNvPr id="19" name="Text 17"/>
+          <p:cNvSpPr txBox="1"/>
+          <p:nvPr/>
+        </p:nvSpPr>
+        <p:spPr>
+          <a:xfrm>
+            <a:off x="502920" y="3438144"/>
+            <a:ext cx="11201400" cy="777240"/>
+          </a:xfrm>
+          <a:prstGeom prst="rect">
+            <a:avLst/>
+          </a:prstGeom>
+          <a:noFill/>
+          <a:ln/>
+        </p:spPr>
+        <p:txBody>
+          <a:bodyPr wrap="square" lIns="0" tIns="0" rIns="0" bIns="0" rtlCol="0" anchor="ctr"/>
+          <a:lstStyle/>
+          <a:p>
+            <a:pPr indent="0" marL="0">
+              <a:lnSpc>
+                <a:spcPct val="120000"/>
+              </a:lnSpc>
+              <a:buNone/>
+            </a:pPr>
+            <a:r>
+              <a:rPr lang="en-US" sz="850" b="1" dirty="0">
+                <a:solidFill>
+                  <a:srgbClr val="8A8A8A"/>
+                </a:solidFill>
+                <a:latin typeface="Consolas" pitchFamily="34" charset="0"/>
+                <a:ea typeface="Consolas" pitchFamily="34" charset="-122"/>
+                <a:cs typeface="Consolas" pitchFamily="34" charset="-120"/>
+              </a:rPr>
+              <a:t>具体例
+</a:t>
+            </a:r>
+            <a:endParaRPr lang="en-US" sz="850" dirty="0"/>
+          </a:p>
+          <a:p>
+            <a:pPr indent="0" marL="0">
+              <a:lnSpc>
+                <a:spcPct val="120000"/>
+              </a:lnSpc>
+              <a:buNone/>
+            </a:pPr>
+            <a:r>
+              <a:rPr lang="en-US" sz="1000" dirty="0">
+                <a:solidFill>
+                  <a:srgbClr val="171717"/>
+                </a:solidFill>
+                <a:latin typeface="Yu Gothic" pitchFamily="34" charset="0"/>
+                <a:ea typeface="Yu Gothic" pitchFamily="34" charset="-122"/>
+                <a:cs typeface="Yu Gothic" pitchFamily="34" charset="-120"/>
+              </a:rPr>
+              <a:t>大学発のベンチャー企業が、大学の研究成果（技術シーズ）を事業化するために起業し、公的な創業支援策や投資家からの出資を受けながら成長していくのは、アントレプレナーシップと創業支援策が結びついた典型例。</a:t>
+            </a:r>
+            <a:endParaRPr lang="en-US" sz="850" dirty="0"/>
+          </a:p>
+        </p:txBody>
+      </p:sp>
+      <p:sp>
+        <p:nvSpPr>
+          <p:cNvPr id="20" name="Shape 18"/>
           <p:cNvSpPr/>
           <p:nvPr/>
         </p:nvSpPr>
@@ -24687,7 +25065,7 @@
       </p:sp>
       <p:sp>
         <p:nvSpPr>
-          <p:cNvPr id="20" name="Shape 18"/>
+          <p:cNvPr id="21" name="Shape 19"/>
           <p:cNvSpPr/>
           <p:nvPr/>
         </p:nvSpPr>
@@ -24707,7 +25085,7 @@
       </p:sp>
       <p:sp>
         <p:nvSpPr>
-          <p:cNvPr id="21" name="Text 19"/>
+          <p:cNvPr id="22" name="Text 20"/>
           <p:cNvSpPr txBox="1"/>
           <p:nvPr/>
         </p:nvSpPr>
@@ -24746,7 +25124,7 @@
       </p:sp>
       <p:sp>
         <p:nvSpPr>
-          <p:cNvPr id="22" name="Text 20"/>
+          <p:cNvPr id="23" name="Text 21"/>
           <p:cNvSpPr txBox="1"/>
           <p:nvPr/>
         </p:nvSpPr>
@@ -24785,7 +25163,7 @@
       </p:sp>
       <p:sp>
         <p:nvSpPr>
-          <p:cNvPr id="23" name="Shape 21"/>
+          <p:cNvPr id="24" name="Shape 22"/>
           <p:cNvSpPr/>
           <p:nvPr/>
         </p:nvSpPr>
@@ -24808,7 +25186,7 @@
       </p:sp>
       <p:sp>
         <p:nvSpPr>
-          <p:cNvPr id="24" name="Text 22"/>
+          <p:cNvPr id="25" name="Text 23"/>
           <p:cNvSpPr txBox="1"/>
           <p:nvPr/>
         </p:nvSpPr>
@@ -24847,7 +25225,7 @@
       </p:sp>
       <p:sp>
         <p:nvSpPr>
-          <p:cNvPr id="25" name="Text 23"/>
+          <p:cNvPr id="26" name="Text 24"/>
           <p:cNvSpPr txBox="1"/>
           <p:nvPr/>
         </p:nvSpPr>
@@ -24886,7 +25264,7 @@
       </p:sp>
       <p:sp>
         <p:nvSpPr>
-          <p:cNvPr id="26" name="Shape 24"/>
+          <p:cNvPr id="27" name="Shape 25"/>
           <p:cNvSpPr/>
           <p:nvPr/>
         </p:nvSpPr>
@@ -24911,7 +25289,7 @@
       </p:sp>
       <p:sp>
         <p:nvSpPr>
-          <p:cNvPr id="27" name="Text 25"/>
+          <p:cNvPr id="28" name="Text 26"/>
           <p:cNvSpPr txBox="1"/>
           <p:nvPr/>
         </p:nvSpPr>
@@ -24950,7 +25328,7 @@
       </p:sp>
       <p:sp>
         <p:nvSpPr>
-          <p:cNvPr id="28" name="Shape 26"/>
+          <p:cNvPr id="29" name="Shape 27"/>
           <p:cNvSpPr/>
           <p:nvPr/>
         </p:nvSpPr>
@@ -24975,7 +25353,7 @@
       </p:sp>
       <p:sp>
         <p:nvSpPr>
-          <p:cNvPr id="29" name="Text 27"/>
+          <p:cNvPr id="30" name="Text 28"/>
           <p:cNvSpPr txBox="1"/>
           <p:nvPr/>
         </p:nvSpPr>
@@ -25014,7 +25392,7 @@
       </p:sp>
       <p:sp>
         <p:nvSpPr>
-          <p:cNvPr id="30" name="Shape 28"/>
+          <p:cNvPr id="31" name="Shape 29"/>
           <p:cNvSpPr/>
           <p:nvPr/>
         </p:nvSpPr>
@@ -25039,7 +25417,7 @@
       </p:sp>
       <p:sp>
         <p:nvSpPr>
-          <p:cNvPr id="31" name="Text 29"/>
+          <p:cNvPr id="32" name="Text 30"/>
           <p:cNvSpPr txBox="1"/>
           <p:nvPr/>
         </p:nvSpPr>
@@ -25078,7 +25456,7 @@
       </p:sp>
       <p:sp>
         <p:nvSpPr>
-          <p:cNvPr id="32" name="Shape 30"/>
+          <p:cNvPr id="33" name="Shape 31"/>
           <p:cNvSpPr/>
           <p:nvPr/>
         </p:nvSpPr>
@@ -25103,7 +25481,7 @@
       </p:sp>
       <p:sp>
         <p:nvSpPr>
-          <p:cNvPr id="33" name="Text 31"/>
+          <p:cNvPr id="34" name="Text 32"/>
           <p:cNvSpPr txBox="1"/>
           <p:nvPr/>
         </p:nvSpPr>
@@ -25142,7 +25520,7 @@
       </p:sp>
       <p:sp>
         <p:nvSpPr>
-          <p:cNvPr id="34" name="Shape 32"/>
+          <p:cNvPr id="35" name="Shape 33"/>
           <p:cNvSpPr/>
           <p:nvPr/>
         </p:nvSpPr>
@@ -25167,7 +25545,7 @@
       </p:sp>
       <p:sp>
         <p:nvSpPr>
-          <p:cNvPr id="35" name="Text 33"/>
+          <p:cNvPr id="36" name="Text 34"/>
           <p:cNvSpPr txBox="1"/>
           <p:nvPr/>
         </p:nvSpPr>
@@ -25206,7 +25584,7 @@
       </p:sp>
       <p:sp>
         <p:nvSpPr>
-          <p:cNvPr id="36" name="Shape 34"/>
+          <p:cNvPr id="37" name="Shape 35"/>
           <p:cNvSpPr/>
           <p:nvPr/>
         </p:nvSpPr>
@@ -25231,7 +25609,7 @@
       </p:sp>
       <p:sp>
         <p:nvSpPr>
-          <p:cNvPr id="37" name="Text 35"/>
+          <p:cNvPr id="38" name="Text 36"/>
           <p:cNvSpPr txBox="1"/>
           <p:nvPr/>
         </p:nvSpPr>
@@ -25270,7 +25648,7 @@
       </p:sp>
       <p:sp>
         <p:nvSpPr>
-          <p:cNvPr id="38" name="Shape 36"/>
+          <p:cNvPr id="39" name="Shape 37"/>
           <p:cNvSpPr/>
           <p:nvPr/>
         </p:nvSpPr>
@@ -25295,7 +25673,7 @@
       </p:sp>
       <p:sp>
         <p:nvSpPr>
-          <p:cNvPr id="39" name="Text 37"/>
+          <p:cNvPr id="40" name="Text 38"/>
           <p:cNvSpPr txBox="1"/>
           <p:nvPr/>
         </p:nvSpPr>
@@ -25334,7 +25712,7 @@
       </p:sp>
       <p:sp>
         <p:nvSpPr>
-          <p:cNvPr id="40" name="Shape 38"/>
+          <p:cNvPr id="41" name="Shape 39"/>
           <p:cNvSpPr/>
           <p:nvPr/>
         </p:nvSpPr>
@@ -25359,7 +25737,7 @@
       </p:sp>
       <p:sp>
         <p:nvSpPr>
-          <p:cNvPr id="41" name="Text 39"/>
+          <p:cNvPr id="42" name="Text 40"/>
           <p:cNvSpPr txBox="1"/>
           <p:nvPr/>
         </p:nvSpPr>
@@ -25398,7 +25776,7 @@
       </p:sp>
       <p:sp>
         <p:nvSpPr>
-          <p:cNvPr id="42" name="Shape 40"/>
+          <p:cNvPr id="43" name="Shape 41"/>
           <p:cNvSpPr/>
           <p:nvPr/>
         </p:nvSpPr>
@@ -25423,7 +25801,7 @@
       </p:sp>
       <p:sp>
         <p:nvSpPr>
-          <p:cNvPr id="43" name="Text 41"/>
+          <p:cNvPr id="44" name="Text 42"/>
           <p:cNvSpPr txBox="1"/>
           <p:nvPr/>
         </p:nvSpPr>
@@ -25462,7 +25840,7 @@
       </p:sp>
       <p:sp>
         <p:nvSpPr>
-          <p:cNvPr id="44" name="Shape 42"/>
+          <p:cNvPr id="45" name="Shape 43"/>
           <p:cNvSpPr/>
           <p:nvPr/>
         </p:nvSpPr>
@@ -25487,7 +25865,7 @@
       </p:sp>
       <p:sp>
         <p:nvSpPr>
-          <p:cNvPr id="45" name="Text 43"/>
+          <p:cNvPr id="46" name="Text 44"/>
           <p:cNvSpPr txBox="1"/>
           <p:nvPr/>
         </p:nvSpPr>
@@ -26142,7 +26520,70 @@
       </p:sp>
       <p:sp>
         <p:nvSpPr>
-          <p:cNvPr id="19" name="Shape 17"/>
+          <p:cNvPr id="19" name="Text 17"/>
+          <p:cNvSpPr txBox="1"/>
+          <p:nvPr/>
+        </p:nvSpPr>
+        <p:spPr>
+          <a:xfrm>
+            <a:off x="502920" y="3438144"/>
+            <a:ext cx="11201400" cy="777240"/>
+          </a:xfrm>
+          <a:prstGeom prst="rect">
+            <a:avLst/>
+          </a:prstGeom>
+          <a:noFill/>
+          <a:ln/>
+        </p:spPr>
+        <p:txBody>
+          <a:bodyPr wrap="square" lIns="0" tIns="0" rIns="0" bIns="0" rtlCol="0" anchor="ctr"/>
+          <a:lstStyle/>
+          <a:p>
+            <a:pPr indent="0" marL="0">
+              <a:lnSpc>
+                <a:spcPct val="120000"/>
+              </a:lnSpc>
+              <a:buNone/>
+            </a:pPr>
+            <a:r>
+              <a:rPr lang="en-US" sz="850" b="1" dirty="0">
+                <a:solidFill>
+                  <a:srgbClr val="8A8A8A"/>
+                </a:solidFill>
+                <a:latin typeface="Consolas" pitchFamily="34" charset="0"/>
+                <a:ea typeface="Consolas" pitchFamily="34" charset="-122"/>
+                <a:cs typeface="Consolas" pitchFamily="34" charset="-120"/>
+              </a:rPr>
+              <a:t>具体例
+</a:t>
+            </a:r>
+            <a:endParaRPr lang="en-US" sz="850" dirty="0"/>
+          </a:p>
+          <a:p>
+            <a:pPr indent="0" marL="0">
+              <a:lnSpc>
+                <a:spcPct val="120000"/>
+              </a:lnSpc>
+              <a:buNone/>
+            </a:pPr>
+            <a:r>
+              <a:rPr lang="en-US" sz="1000" dirty="0">
+                <a:solidFill>
+                  <a:srgbClr val="171717"/>
+                </a:solidFill>
+                <a:latin typeface="Yu Gothic" pitchFamily="34" charset="0"/>
+                <a:ea typeface="Yu Gothic" pitchFamily="34" charset="-122"/>
+                <a:cs typeface="Yu Gothic" pitchFamily="34" charset="-120"/>
+              </a:rPr>
+              <a:t>地方の伝統工芸品の産地組合が、産地の名称を冠したブランド（地域団体商標）を取得し、模倣品との差別化や産地全体のブランド価値向上に活用するのは、無形資産を経営に活かす典型例。</a:t>
+            </a:r>
+            <a:endParaRPr lang="en-US" sz="850" dirty="0"/>
+          </a:p>
+        </p:txBody>
+      </p:sp>
+      <p:sp>
+        <p:nvSpPr>
+          <p:cNvPr id="20" name="Shape 18"/>
           <p:cNvSpPr/>
           <p:nvPr/>
         </p:nvSpPr>
@@ -26165,7 +26606,7 @@
       </p:sp>
       <p:sp>
         <p:nvSpPr>
-          <p:cNvPr id="20" name="Shape 18"/>
+          <p:cNvPr id="21" name="Shape 19"/>
           <p:cNvSpPr/>
           <p:nvPr/>
         </p:nvSpPr>
@@ -26185,7 +26626,7 @@
       </p:sp>
       <p:sp>
         <p:nvSpPr>
-          <p:cNvPr id="21" name="Text 19"/>
+          <p:cNvPr id="22" name="Text 20"/>
           <p:cNvSpPr txBox="1"/>
           <p:nvPr/>
         </p:nvSpPr>
@@ -26224,7 +26665,7 @@
       </p:sp>
       <p:sp>
         <p:nvSpPr>
-          <p:cNvPr id="22" name="Text 20"/>
+          <p:cNvPr id="23" name="Text 21"/>
           <p:cNvSpPr txBox="1"/>
           <p:nvPr/>
         </p:nvSpPr>
@@ -26263,7 +26704,7 @@
       </p:sp>
       <p:sp>
         <p:nvSpPr>
-          <p:cNvPr id="23" name="Shape 21"/>
+          <p:cNvPr id="24" name="Shape 22"/>
           <p:cNvSpPr/>
           <p:nvPr/>
         </p:nvSpPr>
@@ -26286,7 +26727,7 @@
       </p:sp>
       <p:sp>
         <p:nvSpPr>
-          <p:cNvPr id="24" name="Text 22"/>
+          <p:cNvPr id="25" name="Text 23"/>
           <p:cNvSpPr txBox="1"/>
           <p:nvPr/>
         </p:nvSpPr>
@@ -26325,7 +26766,7 @@
       </p:sp>
       <p:sp>
         <p:nvSpPr>
-          <p:cNvPr id="25" name="Text 23"/>
+          <p:cNvPr id="26" name="Text 24"/>
           <p:cNvSpPr txBox="1"/>
           <p:nvPr/>
         </p:nvSpPr>
@@ -26364,7 +26805,7 @@
       </p:sp>
       <p:sp>
         <p:nvSpPr>
-          <p:cNvPr id="26" name="Shape 24"/>
+          <p:cNvPr id="27" name="Shape 25"/>
           <p:cNvSpPr/>
           <p:nvPr/>
         </p:nvSpPr>
@@ -26389,7 +26830,7 @@
       </p:sp>
       <p:sp>
         <p:nvSpPr>
-          <p:cNvPr id="27" name="Text 25"/>
+          <p:cNvPr id="28" name="Text 26"/>
           <p:cNvSpPr txBox="1"/>
           <p:nvPr/>
         </p:nvSpPr>
@@ -26428,7 +26869,7 @@
       </p:sp>
       <p:sp>
         <p:nvSpPr>
-          <p:cNvPr id="28" name="Shape 26"/>
+          <p:cNvPr id="29" name="Shape 27"/>
           <p:cNvSpPr/>
           <p:nvPr/>
         </p:nvSpPr>
@@ -26453,7 +26894,7 @@
       </p:sp>
       <p:sp>
         <p:nvSpPr>
-          <p:cNvPr id="29" name="Text 27"/>
+          <p:cNvPr id="30" name="Text 28"/>
           <p:cNvSpPr txBox="1"/>
           <p:nvPr/>
         </p:nvSpPr>
@@ -26492,7 +26933,7 @@
       </p:sp>
       <p:sp>
         <p:nvSpPr>
-          <p:cNvPr id="30" name="Shape 28"/>
+          <p:cNvPr id="31" name="Shape 29"/>
           <p:cNvSpPr/>
           <p:nvPr/>
         </p:nvSpPr>
@@ -26517,7 +26958,7 @@
       </p:sp>
       <p:sp>
         <p:nvSpPr>
-          <p:cNvPr id="31" name="Text 29"/>
+          <p:cNvPr id="32" name="Text 30"/>
           <p:cNvSpPr txBox="1"/>
           <p:nvPr/>
         </p:nvSpPr>
@@ -26556,7 +26997,7 @@
       </p:sp>
       <p:sp>
         <p:nvSpPr>
-          <p:cNvPr id="32" name="Shape 30"/>
+          <p:cNvPr id="33" name="Shape 31"/>
           <p:cNvSpPr/>
           <p:nvPr/>
         </p:nvSpPr>
@@ -26581,7 +27022,7 @@
       </p:sp>
       <p:sp>
         <p:nvSpPr>
-          <p:cNvPr id="33" name="Text 31"/>
+          <p:cNvPr id="34" name="Text 32"/>
           <p:cNvSpPr txBox="1"/>
           <p:nvPr/>
         </p:nvSpPr>
@@ -26620,7 +27061,7 @@
       </p:sp>
       <p:sp>
         <p:nvSpPr>
-          <p:cNvPr id="34" name="Shape 32"/>
+          <p:cNvPr id="35" name="Shape 33"/>
           <p:cNvSpPr/>
           <p:nvPr/>
         </p:nvSpPr>
@@ -26645,7 +27086,7 @@
       </p:sp>
       <p:sp>
         <p:nvSpPr>
-          <p:cNvPr id="35" name="Text 33"/>
+          <p:cNvPr id="36" name="Text 34"/>
           <p:cNvSpPr txBox="1"/>
           <p:nvPr/>
         </p:nvSpPr>
@@ -26684,7 +27125,7 @@
       </p:sp>
       <p:sp>
         <p:nvSpPr>
-          <p:cNvPr id="36" name="Shape 34"/>
+          <p:cNvPr id="37" name="Shape 35"/>
           <p:cNvSpPr/>
           <p:nvPr/>
         </p:nvSpPr>
@@ -26709,7 +27150,7 @@
       </p:sp>
       <p:sp>
         <p:nvSpPr>
-          <p:cNvPr id="37" name="Text 35"/>
+          <p:cNvPr id="38" name="Text 36"/>
           <p:cNvSpPr txBox="1"/>
           <p:nvPr/>
         </p:nvSpPr>
@@ -26748,7 +27189,7 @@
       </p:sp>
       <p:sp>
         <p:nvSpPr>
-          <p:cNvPr id="38" name="Shape 36"/>
+          <p:cNvPr id="39" name="Shape 37"/>
           <p:cNvSpPr/>
           <p:nvPr/>
         </p:nvSpPr>
@@ -26773,7 +27214,7 @@
       </p:sp>
       <p:sp>
         <p:nvSpPr>
-          <p:cNvPr id="39" name="Text 37"/>
+          <p:cNvPr id="40" name="Text 38"/>
           <p:cNvSpPr txBox="1"/>
           <p:nvPr/>
         </p:nvSpPr>
@@ -26812,7 +27253,7 @@
       </p:sp>
       <p:sp>
         <p:nvSpPr>
-          <p:cNvPr id="40" name="Shape 38"/>
+          <p:cNvPr id="41" name="Shape 39"/>
           <p:cNvSpPr/>
           <p:nvPr/>
         </p:nvSpPr>
@@ -26837,7 +27278,7 @@
       </p:sp>
       <p:sp>
         <p:nvSpPr>
-          <p:cNvPr id="41" name="Text 39"/>
+          <p:cNvPr id="42" name="Text 40"/>
           <p:cNvSpPr txBox="1"/>
           <p:nvPr/>
         </p:nvSpPr>
@@ -26876,7 +27317,7 @@
       </p:sp>
       <p:sp>
         <p:nvSpPr>
-          <p:cNvPr id="42" name="Shape 40"/>
+          <p:cNvPr id="43" name="Shape 41"/>
           <p:cNvSpPr/>
           <p:nvPr/>
         </p:nvSpPr>
@@ -26901,7 +27342,7 @@
       </p:sp>
       <p:sp>
         <p:nvSpPr>
-          <p:cNvPr id="43" name="Text 41"/>
+          <p:cNvPr id="44" name="Text 42"/>
           <p:cNvSpPr txBox="1"/>
           <p:nvPr/>
         </p:nvSpPr>
@@ -26940,7 +27381,7 @@
       </p:sp>
       <p:sp>
         <p:nvSpPr>
-          <p:cNvPr id="44" name="Shape 42"/>
+          <p:cNvPr id="45" name="Shape 43"/>
           <p:cNvSpPr/>
           <p:nvPr/>
         </p:nvSpPr>
@@ -26965,7 +27406,7 @@
       </p:sp>
       <p:sp>
         <p:nvSpPr>
-          <p:cNvPr id="45" name="Text 43"/>
+          <p:cNvPr id="46" name="Text 44"/>
           <p:cNvSpPr txBox="1"/>
           <p:nvPr/>
         </p:nvSpPr>
@@ -27912,7 +28353,70 @@
       </p:sp>
       <p:sp>
         <p:nvSpPr>
-          <p:cNvPr id="16" name="Shape 14"/>
+          <p:cNvPr id="16" name="Text 14"/>
+          <p:cNvSpPr txBox="1"/>
+          <p:nvPr/>
+        </p:nvSpPr>
+        <p:spPr>
+          <a:xfrm>
+            <a:off x="502920" y="5166360"/>
+            <a:ext cx="11201400" cy="640080"/>
+          </a:xfrm>
+          <a:prstGeom prst="rect">
+            <a:avLst/>
+          </a:prstGeom>
+          <a:noFill/>
+          <a:ln/>
+        </p:spPr>
+        <p:txBody>
+          <a:bodyPr wrap="square" lIns="0" tIns="0" rIns="0" bIns="0" rtlCol="0" anchor="ctr"/>
+          <a:lstStyle/>
+          <a:p>
+            <a:pPr indent="0" marL="0">
+              <a:lnSpc>
+                <a:spcPct val="120000"/>
+              </a:lnSpc>
+              <a:buNone/>
+            </a:pPr>
+            <a:r>
+              <a:rPr lang="en-US" sz="850" b="1" dirty="0">
+                <a:solidFill>
+                  <a:srgbClr val="8A8A8A"/>
+                </a:solidFill>
+                <a:latin typeface="Consolas" pitchFamily="34" charset="0"/>
+                <a:ea typeface="Consolas" pitchFamily="34" charset="-122"/>
+                <a:cs typeface="Consolas" pitchFamily="34" charset="-120"/>
+              </a:rPr>
+              <a:t>具体例
+</a:t>
+            </a:r>
+            <a:endParaRPr lang="en-US" sz="850" dirty="0"/>
+          </a:p>
+          <a:p>
+            <a:pPr indent="0" marL="0">
+              <a:lnSpc>
+                <a:spcPct val="120000"/>
+              </a:lnSpc>
+              <a:buNone/>
+            </a:pPr>
+            <a:r>
+              <a:rPr lang="en-US" sz="1000" dirty="0">
+                <a:solidFill>
+                  <a:srgbClr val="171717"/>
+                </a:solidFill>
+                <a:latin typeface="Yu Gothic" pitchFamily="34" charset="0"/>
+                <a:ea typeface="Yu Gothic" pitchFamily="34" charset="-122"/>
+                <a:cs typeface="Yu Gothic" pitchFamily="34" charset="-120"/>
+              </a:rPr>
+              <a:t>ある中小企業が新しい事業活動に取り組む計画を都道府県に申請し承認を受けると（経営革新計画、中小企業等経営強化法に基づく）、日本政策金融公庫の低利融資や信用保証の特例を受けられる。中小企業基本法という理念法の下に個別の実施法がある構造の一例。</a:t>
+            </a:r>
+            <a:endParaRPr lang="en-US" sz="850" dirty="0"/>
+          </a:p>
+        </p:txBody>
+      </p:sp>
+      <p:sp>
+        <p:nvSpPr>
+          <p:cNvPr id="17" name="Shape 15"/>
           <p:cNvSpPr/>
           <p:nvPr/>
         </p:nvSpPr>
@@ -27935,7 +28439,7 @@
       </p:sp>
       <p:sp>
         <p:nvSpPr>
-          <p:cNvPr id="17" name="Shape 15"/>
+          <p:cNvPr id="18" name="Shape 16"/>
           <p:cNvSpPr/>
           <p:nvPr/>
         </p:nvSpPr>
@@ -27955,7 +28459,7 @@
       </p:sp>
       <p:sp>
         <p:nvSpPr>
-          <p:cNvPr id="18" name="Text 16"/>
+          <p:cNvPr id="19" name="Text 17"/>
           <p:cNvSpPr txBox="1"/>
           <p:nvPr/>
         </p:nvSpPr>
@@ -27994,7 +28498,7 @@
       </p:sp>
       <p:sp>
         <p:nvSpPr>
-          <p:cNvPr id="19" name="Text 17"/>
+          <p:cNvPr id="20" name="Text 18"/>
           <p:cNvSpPr txBox="1"/>
           <p:nvPr/>
         </p:nvSpPr>
@@ -28033,7 +28537,7 @@
       </p:sp>
       <p:sp>
         <p:nvSpPr>
-          <p:cNvPr id="20" name="Shape 18"/>
+          <p:cNvPr id="21" name="Shape 19"/>
           <p:cNvSpPr/>
           <p:nvPr/>
         </p:nvSpPr>
@@ -28056,7 +28560,7 @@
       </p:sp>
       <p:sp>
         <p:nvSpPr>
-          <p:cNvPr id="21" name="Text 19"/>
+          <p:cNvPr id="22" name="Text 20"/>
           <p:cNvSpPr txBox="1"/>
           <p:nvPr/>
         </p:nvSpPr>
@@ -28095,7 +28599,7 @@
       </p:sp>
       <p:sp>
         <p:nvSpPr>
-          <p:cNvPr id="22" name="Text 20"/>
+          <p:cNvPr id="23" name="Text 21"/>
           <p:cNvSpPr txBox="1"/>
           <p:nvPr/>
         </p:nvSpPr>
@@ -28134,7 +28638,7 @@
       </p:sp>
       <p:sp>
         <p:nvSpPr>
-          <p:cNvPr id="23" name="Shape 21"/>
+          <p:cNvPr id="24" name="Shape 22"/>
           <p:cNvSpPr/>
           <p:nvPr/>
         </p:nvSpPr>
@@ -28159,7 +28663,7 @@
       </p:sp>
       <p:sp>
         <p:nvSpPr>
-          <p:cNvPr id="24" name="Text 22"/>
+          <p:cNvPr id="25" name="Text 23"/>
           <p:cNvSpPr txBox="1"/>
           <p:nvPr/>
         </p:nvSpPr>
@@ -28198,7 +28702,7 @@
       </p:sp>
       <p:sp>
         <p:nvSpPr>
-          <p:cNvPr id="25" name="Shape 23"/>
+          <p:cNvPr id="26" name="Shape 24"/>
           <p:cNvSpPr/>
           <p:nvPr/>
         </p:nvSpPr>
@@ -28223,7 +28727,7 @@
       </p:sp>
       <p:sp>
         <p:nvSpPr>
-          <p:cNvPr id="26" name="Text 24"/>
+          <p:cNvPr id="27" name="Text 25"/>
           <p:cNvSpPr txBox="1"/>
           <p:nvPr/>
         </p:nvSpPr>
@@ -28262,7 +28766,7 @@
       </p:sp>
       <p:sp>
         <p:nvSpPr>
-          <p:cNvPr id="27" name="Shape 25"/>
+          <p:cNvPr id="28" name="Shape 26"/>
           <p:cNvSpPr/>
           <p:nvPr/>
         </p:nvSpPr>
@@ -28287,7 +28791,7 @@
       </p:sp>
       <p:sp>
         <p:nvSpPr>
-          <p:cNvPr id="28" name="Text 26"/>
+          <p:cNvPr id="29" name="Text 27"/>
           <p:cNvSpPr txBox="1"/>
           <p:nvPr/>
         </p:nvSpPr>
@@ -28326,7 +28830,7 @@
       </p:sp>
       <p:sp>
         <p:nvSpPr>
-          <p:cNvPr id="29" name="Shape 27"/>
+          <p:cNvPr id="30" name="Shape 28"/>
           <p:cNvSpPr/>
           <p:nvPr/>
         </p:nvSpPr>
@@ -28351,7 +28855,7 @@
       </p:sp>
       <p:sp>
         <p:nvSpPr>
-          <p:cNvPr id="30" name="Text 28"/>
+          <p:cNvPr id="31" name="Text 29"/>
           <p:cNvSpPr txBox="1"/>
           <p:nvPr/>
         </p:nvSpPr>
@@ -28390,7 +28894,7 @@
       </p:sp>
       <p:sp>
         <p:nvSpPr>
-          <p:cNvPr id="31" name="Shape 29"/>
+          <p:cNvPr id="32" name="Shape 30"/>
           <p:cNvSpPr/>
           <p:nvPr/>
         </p:nvSpPr>
@@ -28415,7 +28919,7 @@
       </p:sp>
       <p:sp>
         <p:nvSpPr>
-          <p:cNvPr id="32" name="Text 30"/>
+          <p:cNvPr id="33" name="Text 31"/>
           <p:cNvSpPr txBox="1"/>
           <p:nvPr/>
         </p:nvSpPr>
@@ -28454,7 +28958,7 @@
       </p:sp>
       <p:sp>
         <p:nvSpPr>
-          <p:cNvPr id="33" name="Shape 31"/>
+          <p:cNvPr id="34" name="Shape 32"/>
           <p:cNvSpPr/>
           <p:nvPr/>
         </p:nvSpPr>
@@ -28479,7 +28983,7 @@
       </p:sp>
       <p:sp>
         <p:nvSpPr>
-          <p:cNvPr id="34" name="Text 32"/>
+          <p:cNvPr id="35" name="Text 33"/>
           <p:cNvSpPr txBox="1"/>
           <p:nvPr/>
         </p:nvSpPr>
@@ -28518,7 +29022,7 @@
       </p:sp>
       <p:sp>
         <p:nvSpPr>
-          <p:cNvPr id="35" name="Shape 33"/>
+          <p:cNvPr id="36" name="Shape 34"/>
           <p:cNvSpPr/>
           <p:nvPr/>
         </p:nvSpPr>
@@ -28543,7 +29047,7 @@
       </p:sp>
       <p:sp>
         <p:nvSpPr>
-          <p:cNvPr id="36" name="Text 34"/>
+          <p:cNvPr id="37" name="Text 35"/>
           <p:cNvSpPr txBox="1"/>
           <p:nvPr/>
         </p:nvSpPr>
@@ -28582,7 +29086,7 @@
       </p:sp>
       <p:sp>
         <p:nvSpPr>
-          <p:cNvPr id="37" name="Shape 35"/>
+          <p:cNvPr id="38" name="Shape 36"/>
           <p:cNvSpPr/>
           <p:nvPr/>
         </p:nvSpPr>
@@ -28607,7 +29111,7 @@
       </p:sp>
       <p:sp>
         <p:nvSpPr>
-          <p:cNvPr id="38" name="Text 36"/>
+          <p:cNvPr id="39" name="Text 37"/>
           <p:cNvSpPr txBox="1"/>
           <p:nvPr/>
         </p:nvSpPr>
@@ -28646,7 +29150,7 @@
       </p:sp>
       <p:sp>
         <p:nvSpPr>
-          <p:cNvPr id="39" name="Shape 37"/>
+          <p:cNvPr id="40" name="Shape 38"/>
           <p:cNvSpPr/>
           <p:nvPr/>
         </p:nvSpPr>
@@ -28671,7 +29175,7 @@
       </p:sp>
       <p:sp>
         <p:nvSpPr>
-          <p:cNvPr id="40" name="Text 38"/>
+          <p:cNvPr id="41" name="Text 39"/>
           <p:cNvSpPr txBox="1"/>
           <p:nvPr/>
         </p:nvSpPr>
@@ -28710,7 +29214,7 @@
       </p:sp>
       <p:sp>
         <p:nvSpPr>
-          <p:cNvPr id="41" name="Shape 39"/>
+          <p:cNvPr id="42" name="Shape 40"/>
           <p:cNvSpPr/>
           <p:nvPr/>
         </p:nvSpPr>
@@ -28735,7 +29239,7 @@
       </p:sp>
       <p:sp>
         <p:nvSpPr>
-          <p:cNvPr id="42" name="Text 40"/>
+          <p:cNvPr id="43" name="Text 41"/>
           <p:cNvSpPr txBox="1"/>
           <p:nvPr/>
         </p:nvSpPr>
@@ -34364,7 +34868,70 @@
       </p:sp>
       <p:sp>
         <p:nvSpPr>
-          <p:cNvPr id="19" name="Shape 17"/>
+          <p:cNvPr id="19" name="Text 17"/>
+          <p:cNvSpPr txBox="1"/>
+          <p:nvPr/>
+        </p:nvSpPr>
+        <p:spPr>
+          <a:xfrm>
+            <a:off x="502920" y="3438144"/>
+            <a:ext cx="11201400" cy="777240"/>
+          </a:xfrm>
+          <a:prstGeom prst="rect">
+            <a:avLst/>
+          </a:prstGeom>
+          <a:noFill/>
+          <a:ln/>
+        </p:spPr>
+        <p:txBody>
+          <a:bodyPr wrap="square" lIns="0" tIns="0" rIns="0" bIns="0" rtlCol="0" anchor="ctr"/>
+          <a:lstStyle/>
+          <a:p>
+            <a:pPr indent="0" marL="0">
+              <a:lnSpc>
+                <a:spcPct val="120000"/>
+              </a:lnSpc>
+              <a:buNone/>
+            </a:pPr>
+            <a:r>
+              <a:rPr lang="en-US" sz="850" b="1" dirty="0">
+                <a:solidFill>
+                  <a:srgbClr val="8A8A8A"/>
+                </a:solidFill>
+                <a:latin typeface="Consolas" pitchFamily="34" charset="0"/>
+                <a:ea typeface="Consolas" pitchFamily="34" charset="-122"/>
+                <a:cs typeface="Consolas" pitchFamily="34" charset="-120"/>
+              </a:rPr>
+              <a:t>具体例
+</a:t>
+            </a:r>
+            <a:endParaRPr lang="en-US" sz="850" dirty="0"/>
+          </a:p>
+          <a:p>
+            <a:pPr indent="0" marL="0">
+              <a:lnSpc>
+                <a:spcPct val="120000"/>
+              </a:lnSpc>
+              <a:buNone/>
+            </a:pPr>
+            <a:r>
+              <a:rPr lang="en-US" sz="1000" dirty="0">
+                <a:solidFill>
+                  <a:srgbClr val="171717"/>
+                </a:solidFill>
+                <a:latin typeface="Yu Gothic" pitchFamily="34" charset="0"/>
+                <a:ea typeface="Yu Gothic" pitchFamily="34" charset="-122"/>
+                <a:cs typeface="Yu Gothic" pitchFamily="34" charset="-120"/>
+              </a:rPr>
+              <a:t>食品加工業の中小企業が新しい味付けの商品開発を経営革新計画として都道府県に申請し承認を受けると、日本政策金融公庫の特別貸付や信用保証の特例といった資金面の支援を受けられる。</a:t>
+            </a:r>
+            <a:endParaRPr lang="en-US" sz="850" dirty="0"/>
+          </a:p>
+        </p:txBody>
+      </p:sp>
+      <p:sp>
+        <p:nvSpPr>
+          <p:cNvPr id="20" name="Shape 18"/>
           <p:cNvSpPr/>
           <p:nvPr/>
         </p:nvSpPr>
@@ -34387,7 +34954,7 @@
       </p:sp>
       <p:sp>
         <p:nvSpPr>
-          <p:cNvPr id="20" name="Shape 18"/>
+          <p:cNvPr id="21" name="Shape 19"/>
           <p:cNvSpPr/>
           <p:nvPr/>
         </p:nvSpPr>
@@ -34407,7 +34974,7 @@
       </p:sp>
       <p:sp>
         <p:nvSpPr>
-          <p:cNvPr id="21" name="Text 19"/>
+          <p:cNvPr id="22" name="Text 20"/>
           <p:cNvSpPr txBox="1"/>
           <p:nvPr/>
         </p:nvSpPr>
@@ -34446,7 +35013,7 @@
       </p:sp>
       <p:sp>
         <p:nvSpPr>
-          <p:cNvPr id="22" name="Text 20"/>
+          <p:cNvPr id="23" name="Text 21"/>
           <p:cNvSpPr txBox="1"/>
           <p:nvPr/>
         </p:nvSpPr>
@@ -34485,7 +35052,7 @@
       </p:sp>
       <p:sp>
         <p:nvSpPr>
-          <p:cNvPr id="23" name="Shape 21"/>
+          <p:cNvPr id="24" name="Shape 22"/>
           <p:cNvSpPr/>
           <p:nvPr/>
         </p:nvSpPr>
@@ -34508,7 +35075,7 @@
       </p:sp>
       <p:sp>
         <p:nvSpPr>
-          <p:cNvPr id="24" name="Text 22"/>
+          <p:cNvPr id="25" name="Text 23"/>
           <p:cNvSpPr txBox="1"/>
           <p:nvPr/>
         </p:nvSpPr>
@@ -34547,7 +35114,7 @@
       </p:sp>
       <p:sp>
         <p:nvSpPr>
-          <p:cNvPr id="25" name="Text 23"/>
+          <p:cNvPr id="26" name="Text 24"/>
           <p:cNvSpPr txBox="1"/>
           <p:nvPr/>
         </p:nvSpPr>
@@ -34586,7 +35153,7 @@
       </p:sp>
       <p:sp>
         <p:nvSpPr>
-          <p:cNvPr id="26" name="Shape 24"/>
+          <p:cNvPr id="27" name="Shape 25"/>
           <p:cNvSpPr/>
           <p:nvPr/>
         </p:nvSpPr>
@@ -34611,7 +35178,7 @@
       </p:sp>
       <p:sp>
         <p:nvSpPr>
-          <p:cNvPr id="27" name="Text 25"/>
+          <p:cNvPr id="28" name="Text 26"/>
           <p:cNvSpPr txBox="1"/>
           <p:nvPr/>
         </p:nvSpPr>
@@ -34650,7 +35217,7 @@
       </p:sp>
       <p:sp>
         <p:nvSpPr>
-          <p:cNvPr id="28" name="Shape 26"/>
+          <p:cNvPr id="29" name="Shape 27"/>
           <p:cNvSpPr/>
           <p:nvPr/>
         </p:nvSpPr>
@@ -34675,7 +35242,7 @@
       </p:sp>
       <p:sp>
         <p:nvSpPr>
-          <p:cNvPr id="29" name="Text 27"/>
+          <p:cNvPr id="30" name="Text 28"/>
           <p:cNvSpPr txBox="1"/>
           <p:nvPr/>
         </p:nvSpPr>
@@ -34714,7 +35281,7 @@
       </p:sp>
       <p:sp>
         <p:nvSpPr>
-          <p:cNvPr id="30" name="Shape 28"/>
+          <p:cNvPr id="31" name="Shape 29"/>
           <p:cNvSpPr/>
           <p:nvPr/>
         </p:nvSpPr>
@@ -34739,7 +35306,7 @@
       </p:sp>
       <p:sp>
         <p:nvSpPr>
-          <p:cNvPr id="31" name="Text 29"/>
+          <p:cNvPr id="32" name="Text 30"/>
           <p:cNvSpPr txBox="1"/>
           <p:nvPr/>
         </p:nvSpPr>
@@ -34778,7 +35345,7 @@
       </p:sp>
       <p:sp>
         <p:nvSpPr>
-          <p:cNvPr id="32" name="Shape 30"/>
+          <p:cNvPr id="33" name="Shape 31"/>
           <p:cNvSpPr/>
           <p:nvPr/>
         </p:nvSpPr>
@@ -34803,7 +35370,7 @@
       </p:sp>
       <p:sp>
         <p:nvSpPr>
-          <p:cNvPr id="33" name="Text 31"/>
+          <p:cNvPr id="34" name="Text 32"/>
           <p:cNvSpPr txBox="1"/>
           <p:nvPr/>
         </p:nvSpPr>
@@ -34842,7 +35409,7 @@
       </p:sp>
       <p:sp>
         <p:nvSpPr>
-          <p:cNvPr id="34" name="Shape 32"/>
+          <p:cNvPr id="35" name="Shape 33"/>
           <p:cNvSpPr/>
           <p:nvPr/>
         </p:nvSpPr>
@@ -34867,7 +35434,7 @@
       </p:sp>
       <p:sp>
         <p:nvSpPr>
-          <p:cNvPr id="35" name="Text 33"/>
+          <p:cNvPr id="36" name="Text 34"/>
           <p:cNvSpPr txBox="1"/>
           <p:nvPr/>
         </p:nvSpPr>
@@ -34906,7 +35473,7 @@
       </p:sp>
       <p:sp>
         <p:nvSpPr>
-          <p:cNvPr id="36" name="Shape 34"/>
+          <p:cNvPr id="37" name="Shape 35"/>
           <p:cNvSpPr/>
           <p:nvPr/>
         </p:nvSpPr>
@@ -34931,7 +35498,7 @@
       </p:sp>
       <p:sp>
         <p:nvSpPr>
-          <p:cNvPr id="37" name="Text 35"/>
+          <p:cNvPr id="38" name="Text 36"/>
           <p:cNvSpPr txBox="1"/>
           <p:nvPr/>
         </p:nvSpPr>
@@ -34970,7 +35537,7 @@
       </p:sp>
       <p:sp>
         <p:nvSpPr>
-          <p:cNvPr id="38" name="Shape 36"/>
+          <p:cNvPr id="39" name="Shape 37"/>
           <p:cNvSpPr/>
           <p:nvPr/>
         </p:nvSpPr>
@@ -34995,7 +35562,7 @@
       </p:sp>
       <p:sp>
         <p:nvSpPr>
-          <p:cNvPr id="39" name="Text 37"/>
+          <p:cNvPr id="40" name="Text 38"/>
           <p:cNvSpPr txBox="1"/>
           <p:nvPr/>
         </p:nvSpPr>
@@ -35034,7 +35601,7 @@
       </p:sp>
       <p:sp>
         <p:nvSpPr>
-          <p:cNvPr id="40" name="Shape 38"/>
+          <p:cNvPr id="41" name="Shape 39"/>
           <p:cNvSpPr/>
           <p:nvPr/>
         </p:nvSpPr>
@@ -35059,7 +35626,7 @@
       </p:sp>
       <p:sp>
         <p:nvSpPr>
-          <p:cNvPr id="41" name="Text 39"/>
+          <p:cNvPr id="42" name="Text 40"/>
           <p:cNvSpPr txBox="1"/>
           <p:nvPr/>
         </p:nvSpPr>
@@ -35098,7 +35665,7 @@
       </p:sp>
       <p:sp>
         <p:nvSpPr>
-          <p:cNvPr id="42" name="Shape 40"/>
+          <p:cNvPr id="43" name="Shape 41"/>
           <p:cNvSpPr/>
           <p:nvPr/>
         </p:nvSpPr>
@@ -35123,7 +35690,7 @@
       </p:sp>
       <p:sp>
         <p:nvSpPr>
-          <p:cNvPr id="43" name="Text 41"/>
+          <p:cNvPr id="44" name="Text 42"/>
           <p:cNvSpPr txBox="1"/>
           <p:nvPr/>
         </p:nvSpPr>
@@ -35162,7 +35729,7 @@
       </p:sp>
       <p:sp>
         <p:nvSpPr>
-          <p:cNvPr id="44" name="Shape 42"/>
+          <p:cNvPr id="45" name="Shape 43"/>
           <p:cNvSpPr/>
           <p:nvPr/>
         </p:nvSpPr>
@@ -35187,7 +35754,7 @@
       </p:sp>
       <p:sp>
         <p:nvSpPr>
-          <p:cNvPr id="45" name="Text 43"/>
+          <p:cNvPr id="46" name="Text 44"/>
           <p:cNvSpPr txBox="1"/>
           <p:nvPr/>
         </p:nvSpPr>
@@ -36818,7 +37385,7 @@
         <p:spPr>
           <a:xfrm>
             <a:off x="3520440" y="1810512"/>
-            <a:ext cx="8183880" cy="1216152"/>
+            <a:ext cx="8183880" cy="758952"/>
           </a:xfrm>
           <a:prstGeom prst="rect">
             <a:avLst/>
@@ -36859,7 +37426,7 @@
         </p:nvSpPr>
         <p:spPr>
           <a:xfrm>
-            <a:off x="502920" y="3108960"/>
+            <a:off x="502920" y="2651760"/>
             <a:ext cx="11201400" cy="0"/>
           </a:xfrm>
           <a:prstGeom prst="line">
@@ -36882,7 +37449,7 @@
         </p:nvSpPr>
         <p:spPr>
           <a:xfrm>
-            <a:off x="502920" y="3218688"/>
+            <a:off x="502920" y="2761488"/>
             <a:ext cx="2926080" cy="320040"/>
           </a:xfrm>
           <a:prstGeom prst="rect">
@@ -36921,8 +37488,8 @@
         </p:nvSpPr>
         <p:spPr>
           <a:xfrm>
-            <a:off x="3520440" y="3182112"/>
-            <a:ext cx="8183880" cy="1216152"/>
+            <a:off x="3520440" y="2724912"/>
+            <a:ext cx="8183880" cy="758952"/>
           </a:xfrm>
           <a:prstGeom prst="rect">
             <a:avLst/>
@@ -36963,7 +37530,7 @@
         </p:nvSpPr>
         <p:spPr>
           <a:xfrm>
-            <a:off x="502920" y="4480560"/>
+            <a:off x="502920" y="3566160"/>
             <a:ext cx="11201400" cy="0"/>
           </a:xfrm>
           <a:prstGeom prst="line">
@@ -36986,7 +37553,7 @@
         </p:nvSpPr>
         <p:spPr>
           <a:xfrm>
-            <a:off x="502920" y="4590288"/>
+            <a:off x="502920" y="3675888"/>
             <a:ext cx="2926080" cy="320040"/>
           </a:xfrm>
           <a:prstGeom prst="rect">
@@ -37025,8 +37592,8 @@
         </p:nvSpPr>
         <p:spPr>
           <a:xfrm>
-            <a:off x="3520440" y="4553712"/>
-            <a:ext cx="8183880" cy="1216152"/>
+            <a:off x="3520440" y="3639312"/>
+            <a:ext cx="8183880" cy="758952"/>
           </a:xfrm>
           <a:prstGeom prst="rect">
             <a:avLst/>
@@ -37061,7 +37628,70 @@
       </p:sp>
       <p:sp>
         <p:nvSpPr>
-          <p:cNvPr id="16" name="Shape 14"/>
+          <p:cNvPr id="16" name="Text 14"/>
+          <p:cNvSpPr txBox="1"/>
+          <p:nvPr/>
+        </p:nvSpPr>
+        <p:spPr>
+          <a:xfrm>
+            <a:off x="502920" y="4572000"/>
+            <a:ext cx="11201400" cy="777240"/>
+          </a:xfrm>
+          <a:prstGeom prst="rect">
+            <a:avLst/>
+          </a:prstGeom>
+          <a:noFill/>
+          <a:ln/>
+        </p:spPr>
+        <p:txBody>
+          <a:bodyPr wrap="square" lIns="0" tIns="0" rIns="0" bIns="0" rtlCol="0" anchor="ctr"/>
+          <a:lstStyle/>
+          <a:p>
+            <a:pPr indent="0" marL="0">
+              <a:lnSpc>
+                <a:spcPct val="120000"/>
+              </a:lnSpc>
+              <a:buNone/>
+            </a:pPr>
+            <a:r>
+              <a:rPr lang="en-US" sz="850" b="1" dirty="0">
+                <a:solidFill>
+                  <a:srgbClr val="8A8A8A"/>
+                </a:solidFill>
+                <a:latin typeface="Consolas" pitchFamily="34" charset="0"/>
+                <a:ea typeface="Consolas" pitchFamily="34" charset="-122"/>
+                <a:cs typeface="Consolas" pitchFamily="34" charset="-120"/>
+              </a:rPr>
+              <a:t>具体例
+</a:t>
+            </a:r>
+            <a:endParaRPr lang="en-US" sz="850" dirty="0"/>
+          </a:p>
+          <a:p>
+            <a:pPr indent="0" marL="0">
+              <a:lnSpc>
+                <a:spcPct val="120000"/>
+              </a:lnSpc>
+              <a:buNone/>
+            </a:pPr>
+            <a:r>
+              <a:rPr lang="en-US" sz="1000" dirty="0">
+                <a:solidFill>
+                  <a:srgbClr val="171717"/>
+                </a:solidFill>
+                <a:latin typeface="Yu Gothic" pitchFamily="34" charset="0"/>
+                <a:ea typeface="Yu Gothic" pitchFamily="34" charset="-122"/>
+                <a:cs typeface="Yu Gothic" pitchFamily="34" charset="-120"/>
+              </a:rPr>
+              <a:t>業績が悪化し金融機関への返済負担が重くなった中小企業が、中小企業活性化協議会に相談し、専門家の支援を受けながら返済条件の見直し（リスケジュール）を含む経営改善計画を策定するのは、再生支援の典型的な活用例。</a:t>
+            </a:r>
+            <a:endParaRPr lang="en-US" sz="850" dirty="0"/>
+          </a:p>
+        </p:txBody>
+      </p:sp>
+      <p:sp>
+        <p:nvSpPr>
+          <p:cNvPr id="17" name="Shape 15"/>
           <p:cNvSpPr/>
           <p:nvPr/>
         </p:nvSpPr>
@@ -37084,7 +37714,7 @@
       </p:sp>
       <p:sp>
         <p:nvSpPr>
-          <p:cNvPr id="17" name="Shape 15"/>
+          <p:cNvPr id="18" name="Shape 16"/>
           <p:cNvSpPr/>
           <p:nvPr/>
         </p:nvSpPr>
@@ -37104,7 +37734,7 @@
       </p:sp>
       <p:sp>
         <p:nvSpPr>
-          <p:cNvPr id="18" name="Text 16"/>
+          <p:cNvPr id="19" name="Text 17"/>
           <p:cNvSpPr txBox="1"/>
           <p:nvPr/>
         </p:nvSpPr>
@@ -37143,7 +37773,7 @@
       </p:sp>
       <p:sp>
         <p:nvSpPr>
-          <p:cNvPr id="19" name="Text 17"/>
+          <p:cNvPr id="20" name="Text 18"/>
           <p:cNvSpPr txBox="1"/>
           <p:nvPr/>
         </p:nvSpPr>
@@ -37182,7 +37812,7 @@
       </p:sp>
       <p:sp>
         <p:nvSpPr>
-          <p:cNvPr id="20" name="Shape 18"/>
+          <p:cNvPr id="21" name="Shape 19"/>
           <p:cNvSpPr/>
           <p:nvPr/>
         </p:nvSpPr>
@@ -37205,7 +37835,7 @@
       </p:sp>
       <p:sp>
         <p:nvSpPr>
-          <p:cNvPr id="21" name="Text 19"/>
+          <p:cNvPr id="22" name="Text 20"/>
           <p:cNvSpPr txBox="1"/>
           <p:nvPr/>
         </p:nvSpPr>
@@ -37244,7 +37874,7 @@
       </p:sp>
       <p:sp>
         <p:nvSpPr>
-          <p:cNvPr id="22" name="Text 20"/>
+          <p:cNvPr id="23" name="Text 21"/>
           <p:cNvSpPr txBox="1"/>
           <p:nvPr/>
         </p:nvSpPr>
@@ -37283,7 +37913,7 @@
       </p:sp>
       <p:sp>
         <p:nvSpPr>
-          <p:cNvPr id="23" name="Shape 21"/>
+          <p:cNvPr id="24" name="Shape 22"/>
           <p:cNvSpPr/>
           <p:nvPr/>
         </p:nvSpPr>
@@ -37308,7 +37938,7 @@
       </p:sp>
       <p:sp>
         <p:nvSpPr>
-          <p:cNvPr id="24" name="Text 22"/>
+          <p:cNvPr id="25" name="Text 23"/>
           <p:cNvSpPr txBox="1"/>
           <p:nvPr/>
         </p:nvSpPr>
@@ -37347,7 +37977,7 @@
       </p:sp>
       <p:sp>
         <p:nvSpPr>
-          <p:cNvPr id="25" name="Shape 23"/>
+          <p:cNvPr id="26" name="Shape 24"/>
           <p:cNvSpPr/>
           <p:nvPr/>
         </p:nvSpPr>
@@ -37372,7 +38002,7 @@
       </p:sp>
       <p:sp>
         <p:nvSpPr>
-          <p:cNvPr id="26" name="Text 24"/>
+          <p:cNvPr id="27" name="Text 25"/>
           <p:cNvSpPr txBox="1"/>
           <p:nvPr/>
         </p:nvSpPr>
@@ -37411,7 +38041,7 @@
       </p:sp>
       <p:sp>
         <p:nvSpPr>
-          <p:cNvPr id="27" name="Shape 25"/>
+          <p:cNvPr id="28" name="Shape 26"/>
           <p:cNvSpPr/>
           <p:nvPr/>
         </p:nvSpPr>
@@ -37436,7 +38066,7 @@
       </p:sp>
       <p:sp>
         <p:nvSpPr>
-          <p:cNvPr id="28" name="Text 26"/>
+          <p:cNvPr id="29" name="Text 27"/>
           <p:cNvSpPr txBox="1"/>
           <p:nvPr/>
         </p:nvSpPr>
@@ -37475,7 +38105,7 @@
       </p:sp>
       <p:sp>
         <p:nvSpPr>
-          <p:cNvPr id="29" name="Shape 27"/>
+          <p:cNvPr id="30" name="Shape 28"/>
           <p:cNvSpPr/>
           <p:nvPr/>
         </p:nvSpPr>
@@ -37500,7 +38130,7 @@
       </p:sp>
       <p:sp>
         <p:nvSpPr>
-          <p:cNvPr id="30" name="Text 28"/>
+          <p:cNvPr id="31" name="Text 29"/>
           <p:cNvSpPr txBox="1"/>
           <p:nvPr/>
         </p:nvSpPr>
@@ -37539,7 +38169,7 @@
       </p:sp>
       <p:sp>
         <p:nvSpPr>
-          <p:cNvPr id="31" name="Shape 29"/>
+          <p:cNvPr id="32" name="Shape 30"/>
           <p:cNvSpPr/>
           <p:nvPr/>
         </p:nvSpPr>
@@ -37564,7 +38194,7 @@
       </p:sp>
       <p:sp>
         <p:nvSpPr>
-          <p:cNvPr id="32" name="Text 30"/>
+          <p:cNvPr id="33" name="Text 31"/>
           <p:cNvSpPr txBox="1"/>
           <p:nvPr/>
         </p:nvSpPr>
@@ -37603,7 +38233,7 @@
       </p:sp>
       <p:sp>
         <p:nvSpPr>
-          <p:cNvPr id="33" name="Shape 31"/>
+          <p:cNvPr id="34" name="Shape 32"/>
           <p:cNvSpPr/>
           <p:nvPr/>
         </p:nvSpPr>
@@ -37628,7 +38258,7 @@
       </p:sp>
       <p:sp>
         <p:nvSpPr>
-          <p:cNvPr id="34" name="Text 32"/>
+          <p:cNvPr id="35" name="Text 33"/>
           <p:cNvSpPr txBox="1"/>
           <p:nvPr/>
         </p:nvSpPr>
@@ -37667,7 +38297,7 @@
       </p:sp>
       <p:sp>
         <p:nvSpPr>
-          <p:cNvPr id="35" name="Shape 33"/>
+          <p:cNvPr id="36" name="Shape 34"/>
           <p:cNvSpPr/>
           <p:nvPr/>
         </p:nvSpPr>
@@ -37692,7 +38322,7 @@
       </p:sp>
       <p:sp>
         <p:nvSpPr>
-          <p:cNvPr id="36" name="Text 34"/>
+          <p:cNvPr id="37" name="Text 35"/>
           <p:cNvSpPr txBox="1"/>
           <p:nvPr/>
         </p:nvSpPr>
@@ -37731,7 +38361,7 @@
       </p:sp>
       <p:sp>
         <p:nvSpPr>
-          <p:cNvPr id="37" name="Shape 35"/>
+          <p:cNvPr id="38" name="Shape 36"/>
           <p:cNvSpPr/>
           <p:nvPr/>
         </p:nvSpPr>
@@ -37756,7 +38386,7 @@
       </p:sp>
       <p:sp>
         <p:nvSpPr>
-          <p:cNvPr id="38" name="Text 36"/>
+          <p:cNvPr id="39" name="Text 37"/>
           <p:cNvSpPr txBox="1"/>
           <p:nvPr/>
         </p:nvSpPr>
@@ -37795,7 +38425,7 @@
       </p:sp>
       <p:sp>
         <p:nvSpPr>
-          <p:cNvPr id="39" name="Shape 37"/>
+          <p:cNvPr id="40" name="Shape 38"/>
           <p:cNvSpPr/>
           <p:nvPr/>
         </p:nvSpPr>
@@ -37820,7 +38450,7 @@
       </p:sp>
       <p:sp>
         <p:nvSpPr>
-          <p:cNvPr id="40" name="Text 38"/>
+          <p:cNvPr id="41" name="Text 39"/>
           <p:cNvSpPr txBox="1"/>
           <p:nvPr/>
         </p:nvSpPr>
@@ -37859,7 +38489,7 @@
       </p:sp>
       <p:sp>
         <p:nvSpPr>
-          <p:cNvPr id="41" name="Shape 39"/>
+          <p:cNvPr id="42" name="Shape 40"/>
           <p:cNvSpPr/>
           <p:nvPr/>
         </p:nvSpPr>
@@ -37884,7 +38514,7 @@
       </p:sp>
       <p:sp>
         <p:nvSpPr>
-          <p:cNvPr id="42" name="Text 40"/>
+          <p:cNvPr id="43" name="Text 41"/>
           <p:cNvSpPr txBox="1"/>
           <p:nvPr/>
         </p:nvSpPr>
@@ -40022,7 +40652,70 @@
       </p:sp>
       <p:sp>
         <p:nvSpPr>
-          <p:cNvPr id="16" name="Shape 14"/>
+          <p:cNvPr id="16" name="Text 14"/>
+          <p:cNvSpPr txBox="1"/>
+          <p:nvPr/>
+        </p:nvSpPr>
+        <p:spPr>
+          <a:xfrm>
+            <a:off x="502920" y="4389120"/>
+            <a:ext cx="11201400" cy="640080"/>
+          </a:xfrm>
+          <a:prstGeom prst="rect">
+            <a:avLst/>
+          </a:prstGeom>
+          <a:noFill/>
+          <a:ln/>
+        </p:spPr>
+        <p:txBody>
+          <a:bodyPr wrap="square" lIns="0" tIns="0" rIns="0" bIns="0" rtlCol="0" anchor="ctr"/>
+          <a:lstStyle/>
+          <a:p>
+            <a:pPr indent="0" marL="0">
+              <a:lnSpc>
+                <a:spcPct val="120000"/>
+              </a:lnSpc>
+              <a:buNone/>
+            </a:pPr>
+            <a:r>
+              <a:rPr lang="en-US" sz="850" b="1" dirty="0">
+                <a:solidFill>
+                  <a:srgbClr val="8A8A8A"/>
+                </a:solidFill>
+                <a:latin typeface="Consolas" pitchFamily="34" charset="0"/>
+                <a:ea typeface="Consolas" pitchFamily="34" charset="-122"/>
+                <a:cs typeface="Consolas" pitchFamily="34" charset="-120"/>
+              </a:rPr>
+              <a:t>具体例
+</a:t>
+            </a:r>
+            <a:endParaRPr lang="en-US" sz="850" dirty="0"/>
+          </a:p>
+          <a:p>
+            <a:pPr indent="0" marL="0">
+              <a:lnSpc>
+                <a:spcPct val="120000"/>
+              </a:lnSpc>
+              <a:buNone/>
+            </a:pPr>
+            <a:r>
+              <a:rPr lang="en-US" sz="1000" dirty="0">
+                <a:solidFill>
+                  <a:srgbClr val="171717"/>
+                </a:solidFill>
+                <a:latin typeface="Yu Gothic" pitchFamily="34" charset="0"/>
+                <a:ea typeface="Yu Gothic" pitchFamily="34" charset="-122"/>
+                <a:cs typeface="Yu Gothic" pitchFamily="34" charset="-120"/>
+              </a:rPr>
+              <a:t>大手メーカーが下請の部品メーカーに対し、発注後に一方的に代金を減額したり支払いを長期間遅延させたりする行為は、下請代金支払遅延等防止法で禁止される典型的な違反行為。</a:t>
+            </a:r>
+            <a:endParaRPr lang="en-US" sz="850" dirty="0"/>
+          </a:p>
+        </p:txBody>
+      </p:sp>
+      <p:sp>
+        <p:nvSpPr>
+          <p:cNvPr id="17" name="Shape 15"/>
           <p:cNvSpPr/>
           <p:nvPr/>
         </p:nvSpPr>
@@ -40045,7 +40738,7 @@
       </p:sp>
       <p:sp>
         <p:nvSpPr>
-          <p:cNvPr id="17" name="Shape 15"/>
+          <p:cNvPr id="18" name="Shape 16"/>
           <p:cNvSpPr/>
           <p:nvPr/>
         </p:nvSpPr>
@@ -40065,7 +40758,7 @@
       </p:sp>
       <p:sp>
         <p:nvSpPr>
-          <p:cNvPr id="18" name="Text 16"/>
+          <p:cNvPr id="19" name="Text 17"/>
           <p:cNvSpPr txBox="1"/>
           <p:nvPr/>
         </p:nvSpPr>
@@ -40104,7 +40797,7 @@
       </p:sp>
       <p:sp>
         <p:nvSpPr>
-          <p:cNvPr id="19" name="Text 17"/>
+          <p:cNvPr id="20" name="Text 18"/>
           <p:cNvSpPr txBox="1"/>
           <p:nvPr/>
         </p:nvSpPr>
@@ -40143,7 +40836,7 @@
       </p:sp>
       <p:sp>
         <p:nvSpPr>
-          <p:cNvPr id="20" name="Shape 18"/>
+          <p:cNvPr id="21" name="Shape 19"/>
           <p:cNvSpPr/>
           <p:nvPr/>
         </p:nvSpPr>
@@ -40166,7 +40859,7 @@
       </p:sp>
       <p:sp>
         <p:nvSpPr>
-          <p:cNvPr id="21" name="Text 19"/>
+          <p:cNvPr id="22" name="Text 20"/>
           <p:cNvSpPr txBox="1"/>
           <p:nvPr/>
         </p:nvSpPr>
@@ -40205,7 +40898,7 @@
       </p:sp>
       <p:sp>
         <p:nvSpPr>
-          <p:cNvPr id="22" name="Text 20"/>
+          <p:cNvPr id="23" name="Text 21"/>
           <p:cNvSpPr txBox="1"/>
           <p:nvPr/>
         </p:nvSpPr>
@@ -40244,7 +40937,7 @@
       </p:sp>
       <p:sp>
         <p:nvSpPr>
-          <p:cNvPr id="23" name="Shape 21"/>
+          <p:cNvPr id="24" name="Shape 22"/>
           <p:cNvSpPr/>
           <p:nvPr/>
         </p:nvSpPr>
@@ -40269,7 +40962,7 @@
       </p:sp>
       <p:sp>
         <p:nvSpPr>
-          <p:cNvPr id="24" name="Text 22"/>
+          <p:cNvPr id="25" name="Text 23"/>
           <p:cNvSpPr txBox="1"/>
           <p:nvPr/>
         </p:nvSpPr>
@@ -40308,7 +41001,7 @@
       </p:sp>
       <p:sp>
         <p:nvSpPr>
-          <p:cNvPr id="25" name="Shape 23"/>
+          <p:cNvPr id="26" name="Shape 24"/>
           <p:cNvSpPr/>
           <p:nvPr/>
         </p:nvSpPr>
@@ -40333,7 +41026,7 @@
       </p:sp>
       <p:sp>
         <p:nvSpPr>
-          <p:cNvPr id="26" name="Text 24"/>
+          <p:cNvPr id="27" name="Text 25"/>
           <p:cNvSpPr txBox="1"/>
           <p:nvPr/>
         </p:nvSpPr>
@@ -40372,7 +41065,7 @@
       </p:sp>
       <p:sp>
         <p:nvSpPr>
-          <p:cNvPr id="27" name="Shape 25"/>
+          <p:cNvPr id="28" name="Shape 26"/>
           <p:cNvSpPr/>
           <p:nvPr/>
         </p:nvSpPr>
@@ -40397,7 +41090,7 @@
       </p:sp>
       <p:sp>
         <p:nvSpPr>
-          <p:cNvPr id="28" name="Text 26"/>
+          <p:cNvPr id="29" name="Text 27"/>
           <p:cNvSpPr txBox="1"/>
           <p:nvPr/>
         </p:nvSpPr>
@@ -40436,7 +41129,7 @@
       </p:sp>
       <p:sp>
         <p:nvSpPr>
-          <p:cNvPr id="29" name="Shape 27"/>
+          <p:cNvPr id="30" name="Shape 28"/>
           <p:cNvSpPr/>
           <p:nvPr/>
         </p:nvSpPr>
@@ -40461,7 +41154,7 @@
       </p:sp>
       <p:sp>
         <p:nvSpPr>
-          <p:cNvPr id="30" name="Text 28"/>
+          <p:cNvPr id="31" name="Text 29"/>
           <p:cNvSpPr txBox="1"/>
           <p:nvPr/>
         </p:nvSpPr>
@@ -40500,7 +41193,7 @@
       </p:sp>
       <p:sp>
         <p:nvSpPr>
-          <p:cNvPr id="31" name="Shape 29"/>
+          <p:cNvPr id="32" name="Shape 30"/>
           <p:cNvSpPr/>
           <p:nvPr/>
         </p:nvSpPr>
@@ -40525,7 +41218,7 @@
       </p:sp>
       <p:sp>
         <p:nvSpPr>
-          <p:cNvPr id="32" name="Text 30"/>
+          <p:cNvPr id="33" name="Text 31"/>
           <p:cNvSpPr txBox="1"/>
           <p:nvPr/>
         </p:nvSpPr>
@@ -40564,7 +41257,7 @@
       </p:sp>
       <p:sp>
         <p:nvSpPr>
-          <p:cNvPr id="33" name="Shape 31"/>
+          <p:cNvPr id="34" name="Shape 32"/>
           <p:cNvSpPr/>
           <p:nvPr/>
         </p:nvSpPr>
@@ -40589,7 +41282,7 @@
       </p:sp>
       <p:sp>
         <p:nvSpPr>
-          <p:cNvPr id="34" name="Text 32"/>
+          <p:cNvPr id="35" name="Text 33"/>
           <p:cNvSpPr txBox="1"/>
           <p:nvPr/>
         </p:nvSpPr>
@@ -40628,7 +41321,7 @@
       </p:sp>
       <p:sp>
         <p:nvSpPr>
-          <p:cNvPr id="35" name="Shape 33"/>
+          <p:cNvPr id="36" name="Shape 34"/>
           <p:cNvSpPr/>
           <p:nvPr/>
         </p:nvSpPr>
@@ -40653,7 +41346,7 @@
       </p:sp>
       <p:sp>
         <p:nvSpPr>
-          <p:cNvPr id="36" name="Text 34"/>
+          <p:cNvPr id="37" name="Text 35"/>
           <p:cNvSpPr txBox="1"/>
           <p:nvPr/>
         </p:nvSpPr>
@@ -40692,7 +41385,7 @@
       </p:sp>
       <p:sp>
         <p:nvSpPr>
-          <p:cNvPr id="37" name="Shape 35"/>
+          <p:cNvPr id="38" name="Shape 36"/>
           <p:cNvSpPr/>
           <p:nvPr/>
         </p:nvSpPr>
@@ -40717,7 +41410,7 @@
       </p:sp>
       <p:sp>
         <p:nvSpPr>
-          <p:cNvPr id="38" name="Text 36"/>
+          <p:cNvPr id="39" name="Text 37"/>
           <p:cNvSpPr txBox="1"/>
           <p:nvPr/>
         </p:nvSpPr>
@@ -40756,7 +41449,7 @@
       </p:sp>
       <p:sp>
         <p:nvSpPr>
-          <p:cNvPr id="39" name="Shape 37"/>
+          <p:cNvPr id="40" name="Shape 38"/>
           <p:cNvSpPr/>
           <p:nvPr/>
         </p:nvSpPr>
@@ -40781,7 +41474,7 @@
       </p:sp>
       <p:sp>
         <p:nvSpPr>
-          <p:cNvPr id="40" name="Text 38"/>
+          <p:cNvPr id="41" name="Text 39"/>
           <p:cNvSpPr txBox="1"/>
           <p:nvPr/>
         </p:nvSpPr>
@@ -40820,7 +41513,7 @@
       </p:sp>
       <p:sp>
         <p:nvSpPr>
-          <p:cNvPr id="41" name="Shape 39"/>
+          <p:cNvPr id="42" name="Shape 40"/>
           <p:cNvSpPr/>
           <p:nvPr/>
         </p:nvSpPr>
@@ -40845,7 +41538,7 @@
       </p:sp>
       <p:sp>
         <p:nvSpPr>
-          <p:cNvPr id="42" name="Text 40"/>
+          <p:cNvPr id="43" name="Text 41"/>
           <p:cNvSpPr txBox="1"/>
           <p:nvPr/>
         </p:nvSpPr>
@@ -45037,7 +45730,70 @@
       </p:sp>
       <p:sp>
         <p:nvSpPr>
-          <p:cNvPr id="19" name="Shape 17"/>
+          <p:cNvPr id="19" name="Text 17"/>
+          <p:cNvSpPr txBox="1"/>
+          <p:nvPr/>
+        </p:nvSpPr>
+        <p:spPr>
+          <a:xfrm>
+            <a:off x="502920" y="3438144"/>
+            <a:ext cx="11201400" cy="777240"/>
+          </a:xfrm>
+          <a:prstGeom prst="rect">
+            <a:avLst/>
+          </a:prstGeom>
+          <a:noFill/>
+          <a:ln/>
+        </p:spPr>
+        <p:txBody>
+          <a:bodyPr wrap="square" lIns="0" tIns="0" rIns="0" bIns="0" rtlCol="0" anchor="ctr"/>
+          <a:lstStyle/>
+          <a:p>
+            <a:pPr indent="0" marL="0">
+              <a:lnSpc>
+                <a:spcPct val="120000"/>
+              </a:lnSpc>
+              <a:buNone/>
+            </a:pPr>
+            <a:r>
+              <a:rPr lang="en-US" sz="850" b="1" dirty="0">
+                <a:solidFill>
+                  <a:srgbClr val="8A8A8A"/>
+                </a:solidFill>
+                <a:latin typeface="Consolas" pitchFamily="34" charset="0"/>
+                <a:ea typeface="Consolas" pitchFamily="34" charset="-122"/>
+                <a:cs typeface="Consolas" pitchFamily="34" charset="-120"/>
+              </a:rPr>
+              <a:t>具体例
+</a:t>
+            </a:r>
+            <a:endParaRPr lang="en-US" sz="850" dirty="0"/>
+          </a:p>
+          <a:p>
+            <a:pPr indent="0" marL="0">
+              <a:lnSpc>
+                <a:spcPct val="120000"/>
+              </a:lnSpc>
+              <a:buNone/>
+            </a:pPr>
+            <a:r>
+              <a:rPr lang="en-US" sz="1000" dirty="0">
+                <a:solidFill>
+                  <a:srgbClr val="171717"/>
+                </a:solidFill>
+                <a:latin typeface="Yu Gothic" pitchFamily="34" charset="0"/>
+                <a:ea typeface="Yu Gothic" pitchFamily="34" charset="-122"/>
+                <a:cs typeface="Yu Gothic" pitchFamily="34" charset="-120"/>
+              </a:rPr>
+              <a:t>多額の相続税負担が事業承継の障害になっていた非上場の製造業で、先代経営者が特例承継計画を提出した上で自社株式を後継者に贈与すれば、上限なし・猶予割合100％の特例措置により贈与税の負担を実質ゼロにしたまま経営権を引き継げる。</a:t>
+            </a:r>
+            <a:endParaRPr lang="en-US" sz="850" dirty="0"/>
+          </a:p>
+        </p:txBody>
+      </p:sp>
+      <p:sp>
+        <p:nvSpPr>
+          <p:cNvPr id="20" name="Shape 18"/>
           <p:cNvSpPr/>
           <p:nvPr/>
         </p:nvSpPr>
@@ -45060,7 +45816,7 @@
       </p:sp>
       <p:sp>
         <p:nvSpPr>
-          <p:cNvPr id="20" name="Shape 18"/>
+          <p:cNvPr id="21" name="Shape 19"/>
           <p:cNvSpPr/>
           <p:nvPr/>
         </p:nvSpPr>
@@ -45080,7 +45836,7 @@
       </p:sp>
       <p:sp>
         <p:nvSpPr>
-          <p:cNvPr id="21" name="Text 19"/>
+          <p:cNvPr id="22" name="Text 20"/>
           <p:cNvSpPr txBox="1"/>
           <p:nvPr/>
         </p:nvSpPr>
@@ -45119,7 +45875,7 @@
       </p:sp>
       <p:sp>
         <p:nvSpPr>
-          <p:cNvPr id="22" name="Text 20"/>
+          <p:cNvPr id="23" name="Text 21"/>
           <p:cNvSpPr txBox="1"/>
           <p:nvPr/>
         </p:nvSpPr>
@@ -45158,7 +45914,7 @@
       </p:sp>
       <p:sp>
         <p:nvSpPr>
-          <p:cNvPr id="23" name="Shape 21"/>
+          <p:cNvPr id="24" name="Shape 22"/>
           <p:cNvSpPr/>
           <p:nvPr/>
         </p:nvSpPr>
@@ -45181,7 +45937,7 @@
       </p:sp>
       <p:sp>
         <p:nvSpPr>
-          <p:cNvPr id="24" name="Text 22"/>
+          <p:cNvPr id="25" name="Text 23"/>
           <p:cNvSpPr txBox="1"/>
           <p:nvPr/>
         </p:nvSpPr>
@@ -45220,7 +45976,7 @@
       </p:sp>
       <p:sp>
         <p:nvSpPr>
-          <p:cNvPr id="25" name="Text 23"/>
+          <p:cNvPr id="26" name="Text 24"/>
           <p:cNvSpPr txBox="1"/>
           <p:nvPr/>
         </p:nvSpPr>
@@ -45259,7 +46015,7 @@
       </p:sp>
       <p:sp>
         <p:nvSpPr>
-          <p:cNvPr id="26" name="Shape 24"/>
+          <p:cNvPr id="27" name="Shape 25"/>
           <p:cNvSpPr/>
           <p:nvPr/>
         </p:nvSpPr>
@@ -45284,7 +46040,7 @@
       </p:sp>
       <p:sp>
         <p:nvSpPr>
-          <p:cNvPr id="27" name="Text 25"/>
+          <p:cNvPr id="28" name="Text 26"/>
           <p:cNvSpPr txBox="1"/>
           <p:nvPr/>
         </p:nvSpPr>
@@ -45323,7 +46079,7 @@
       </p:sp>
       <p:sp>
         <p:nvSpPr>
-          <p:cNvPr id="28" name="Shape 26"/>
+          <p:cNvPr id="29" name="Shape 27"/>
           <p:cNvSpPr/>
           <p:nvPr/>
         </p:nvSpPr>
@@ -45348,7 +46104,7 @@
       </p:sp>
       <p:sp>
         <p:nvSpPr>
-          <p:cNvPr id="29" name="Text 27"/>
+          <p:cNvPr id="30" name="Text 28"/>
           <p:cNvSpPr txBox="1"/>
           <p:nvPr/>
         </p:nvSpPr>
@@ -45387,7 +46143,7 @@
       </p:sp>
       <p:sp>
         <p:nvSpPr>
-          <p:cNvPr id="30" name="Shape 28"/>
+          <p:cNvPr id="31" name="Shape 29"/>
           <p:cNvSpPr/>
           <p:nvPr/>
         </p:nvSpPr>
@@ -45412,7 +46168,7 @@
       </p:sp>
       <p:sp>
         <p:nvSpPr>
-          <p:cNvPr id="31" name="Text 29"/>
+          <p:cNvPr id="32" name="Text 30"/>
           <p:cNvSpPr txBox="1"/>
           <p:nvPr/>
         </p:nvSpPr>
@@ -45451,7 +46207,7 @@
       </p:sp>
       <p:sp>
         <p:nvSpPr>
-          <p:cNvPr id="32" name="Shape 30"/>
+          <p:cNvPr id="33" name="Shape 31"/>
           <p:cNvSpPr/>
           <p:nvPr/>
         </p:nvSpPr>
@@ -45476,7 +46232,7 @@
       </p:sp>
       <p:sp>
         <p:nvSpPr>
-          <p:cNvPr id="33" name="Text 31"/>
+          <p:cNvPr id="34" name="Text 32"/>
           <p:cNvSpPr txBox="1"/>
           <p:nvPr/>
         </p:nvSpPr>
@@ -45515,7 +46271,7 @@
       </p:sp>
       <p:sp>
         <p:nvSpPr>
-          <p:cNvPr id="34" name="Shape 32"/>
+          <p:cNvPr id="35" name="Shape 33"/>
           <p:cNvSpPr/>
           <p:nvPr/>
         </p:nvSpPr>
@@ -45540,7 +46296,7 @@
       </p:sp>
       <p:sp>
         <p:nvSpPr>
-          <p:cNvPr id="35" name="Text 33"/>
+          <p:cNvPr id="36" name="Text 34"/>
           <p:cNvSpPr txBox="1"/>
           <p:nvPr/>
         </p:nvSpPr>
@@ -45579,7 +46335,7 @@
       </p:sp>
       <p:sp>
         <p:nvSpPr>
-          <p:cNvPr id="36" name="Shape 34"/>
+          <p:cNvPr id="37" name="Shape 35"/>
           <p:cNvSpPr/>
           <p:nvPr/>
         </p:nvSpPr>
@@ -45604,7 +46360,7 @@
       </p:sp>
       <p:sp>
         <p:nvSpPr>
-          <p:cNvPr id="37" name="Text 35"/>
+          <p:cNvPr id="38" name="Text 36"/>
           <p:cNvSpPr txBox="1"/>
           <p:nvPr/>
         </p:nvSpPr>
@@ -45643,7 +46399,7 @@
       </p:sp>
       <p:sp>
         <p:nvSpPr>
-          <p:cNvPr id="38" name="Shape 36"/>
+          <p:cNvPr id="39" name="Shape 37"/>
           <p:cNvSpPr/>
           <p:nvPr/>
         </p:nvSpPr>
@@ -45668,7 +46424,7 @@
       </p:sp>
       <p:sp>
         <p:nvSpPr>
-          <p:cNvPr id="39" name="Text 37"/>
+          <p:cNvPr id="40" name="Text 38"/>
           <p:cNvSpPr txBox="1"/>
           <p:nvPr/>
         </p:nvSpPr>
@@ -45707,7 +46463,7 @@
       </p:sp>
       <p:sp>
         <p:nvSpPr>
-          <p:cNvPr id="40" name="Shape 38"/>
+          <p:cNvPr id="41" name="Shape 39"/>
           <p:cNvSpPr/>
           <p:nvPr/>
         </p:nvSpPr>
@@ -45732,7 +46488,7 @@
       </p:sp>
       <p:sp>
         <p:nvSpPr>
-          <p:cNvPr id="41" name="Text 39"/>
+          <p:cNvPr id="42" name="Text 40"/>
           <p:cNvSpPr txBox="1"/>
           <p:nvPr/>
         </p:nvSpPr>
@@ -45771,7 +46527,7 @@
       </p:sp>
       <p:sp>
         <p:nvSpPr>
-          <p:cNvPr id="42" name="Shape 40"/>
+          <p:cNvPr id="43" name="Shape 41"/>
           <p:cNvSpPr/>
           <p:nvPr/>
         </p:nvSpPr>
@@ -45796,7 +46552,7 @@
       </p:sp>
       <p:sp>
         <p:nvSpPr>
-          <p:cNvPr id="43" name="Text 41"/>
+          <p:cNvPr id="44" name="Text 42"/>
           <p:cNvSpPr txBox="1"/>
           <p:nvPr/>
         </p:nvSpPr>
@@ -45835,7 +46591,7 @@
       </p:sp>
       <p:sp>
         <p:nvSpPr>
-          <p:cNvPr id="44" name="Shape 42"/>
+          <p:cNvPr id="45" name="Shape 43"/>
           <p:cNvSpPr/>
           <p:nvPr/>
         </p:nvSpPr>
@@ -45860,7 +46616,7 @@
       </p:sp>
       <p:sp>
         <p:nvSpPr>
-          <p:cNvPr id="45" name="Text 43"/>
+          <p:cNvPr id="46" name="Text 44"/>
           <p:cNvSpPr txBox="1"/>
           <p:nvPr/>
         </p:nvSpPr>
@@ -46419,7 +47175,70 @@
       </p:sp>
       <p:sp>
         <p:nvSpPr>
-          <p:cNvPr id="16" name="Shape 14"/>
+          <p:cNvPr id="16" name="Text 14"/>
+          <p:cNvSpPr txBox="1"/>
+          <p:nvPr/>
+        </p:nvSpPr>
+        <p:spPr>
+          <a:xfrm>
+            <a:off x="502920" y="4389120"/>
+            <a:ext cx="11201400" cy="777240"/>
+          </a:xfrm>
+          <a:prstGeom prst="rect">
+            <a:avLst/>
+          </a:prstGeom>
+          <a:noFill/>
+          <a:ln/>
+        </p:spPr>
+        <p:txBody>
+          <a:bodyPr wrap="square" lIns="0" tIns="0" rIns="0" bIns="0" rtlCol="0" anchor="ctr"/>
+          <a:lstStyle/>
+          <a:p>
+            <a:pPr indent="0" marL="0">
+              <a:lnSpc>
+                <a:spcPct val="120000"/>
+              </a:lnSpc>
+              <a:buNone/>
+            </a:pPr>
+            <a:r>
+              <a:rPr lang="en-US" sz="850" b="1" dirty="0">
+                <a:solidFill>
+                  <a:srgbClr val="8A8A8A"/>
+                </a:solidFill>
+                <a:latin typeface="Consolas" pitchFamily="34" charset="0"/>
+                <a:ea typeface="Consolas" pitchFamily="34" charset="-122"/>
+                <a:cs typeface="Consolas" pitchFamily="34" charset="-120"/>
+              </a:rPr>
+              <a:t>具体例
+</a:t>
+            </a:r>
+            <a:endParaRPr lang="en-US" sz="850" dirty="0"/>
+          </a:p>
+          <a:p>
+            <a:pPr indent="0" marL="0">
+              <a:lnSpc>
+                <a:spcPct val="120000"/>
+              </a:lnSpc>
+              <a:buNone/>
+            </a:pPr>
+            <a:r>
+              <a:rPr lang="en-US" sz="1000" dirty="0">
+                <a:solidFill>
+                  <a:srgbClr val="171717"/>
+                </a:solidFill>
+                <a:latin typeface="Yu Gothic" pitchFamily="34" charset="0"/>
+                <a:ea typeface="Yu Gothic" pitchFamily="34" charset="-122"/>
+                <a:cs typeface="Yu Gothic" pitchFamily="34" charset="-120"/>
+              </a:rPr>
+              <a:t>郊外に大型ショッピングモールが出店したことで衰退した中心市街地の商店街が、空き店舗を活用したチャレンジショップ（新規開業者向けの低家賃店舗）の誘致やイベント開催を通じて回遊性・にぎわいの回復を図るのは、商業・地域サポートの典型例。</a:t>
+            </a:r>
+            <a:endParaRPr lang="en-US" sz="850" dirty="0"/>
+          </a:p>
+        </p:txBody>
+      </p:sp>
+      <p:sp>
+        <p:nvSpPr>
+          <p:cNvPr id="17" name="Shape 15"/>
           <p:cNvSpPr/>
           <p:nvPr/>
         </p:nvSpPr>
@@ -46442,7 +47261,7 @@
       </p:sp>
       <p:sp>
         <p:nvSpPr>
-          <p:cNvPr id="17" name="Shape 15"/>
+          <p:cNvPr id="18" name="Shape 16"/>
           <p:cNvSpPr/>
           <p:nvPr/>
         </p:nvSpPr>
@@ -46462,7 +47281,7 @@
       </p:sp>
       <p:sp>
         <p:nvSpPr>
-          <p:cNvPr id="18" name="Text 16"/>
+          <p:cNvPr id="19" name="Text 17"/>
           <p:cNvSpPr txBox="1"/>
           <p:nvPr/>
         </p:nvSpPr>
@@ -46501,7 +47320,7 @@
       </p:sp>
       <p:sp>
         <p:nvSpPr>
-          <p:cNvPr id="19" name="Text 17"/>
+          <p:cNvPr id="20" name="Text 18"/>
           <p:cNvSpPr txBox="1"/>
           <p:nvPr/>
         </p:nvSpPr>
@@ -46540,7 +47359,7 @@
       </p:sp>
       <p:sp>
         <p:nvSpPr>
-          <p:cNvPr id="20" name="Shape 18"/>
+          <p:cNvPr id="21" name="Shape 19"/>
           <p:cNvSpPr/>
           <p:nvPr/>
         </p:nvSpPr>
@@ -46563,7 +47382,7 @@
       </p:sp>
       <p:sp>
         <p:nvSpPr>
-          <p:cNvPr id="21" name="Text 19"/>
+          <p:cNvPr id="22" name="Text 20"/>
           <p:cNvSpPr txBox="1"/>
           <p:nvPr/>
         </p:nvSpPr>
@@ -46602,7 +47421,7 @@
       </p:sp>
       <p:sp>
         <p:nvSpPr>
-          <p:cNvPr id="22" name="Text 20"/>
+          <p:cNvPr id="23" name="Text 21"/>
           <p:cNvSpPr txBox="1"/>
           <p:nvPr/>
         </p:nvSpPr>
@@ -46641,7 +47460,7 @@
       </p:sp>
       <p:sp>
         <p:nvSpPr>
-          <p:cNvPr id="23" name="Shape 21"/>
+          <p:cNvPr id="24" name="Shape 22"/>
           <p:cNvSpPr/>
           <p:nvPr/>
         </p:nvSpPr>
@@ -46666,7 +47485,7 @@
       </p:sp>
       <p:sp>
         <p:nvSpPr>
-          <p:cNvPr id="24" name="Text 22"/>
+          <p:cNvPr id="25" name="Text 23"/>
           <p:cNvSpPr txBox="1"/>
           <p:nvPr/>
         </p:nvSpPr>
@@ -46705,7 +47524,7 @@
       </p:sp>
       <p:sp>
         <p:nvSpPr>
-          <p:cNvPr id="25" name="Shape 23"/>
+          <p:cNvPr id="26" name="Shape 24"/>
           <p:cNvSpPr/>
           <p:nvPr/>
         </p:nvSpPr>
@@ -46730,7 +47549,7 @@
       </p:sp>
       <p:sp>
         <p:nvSpPr>
-          <p:cNvPr id="26" name="Text 24"/>
+          <p:cNvPr id="27" name="Text 25"/>
           <p:cNvSpPr txBox="1"/>
           <p:nvPr/>
         </p:nvSpPr>
@@ -46769,7 +47588,7 @@
       </p:sp>
       <p:sp>
         <p:nvSpPr>
-          <p:cNvPr id="27" name="Shape 25"/>
+          <p:cNvPr id="28" name="Shape 26"/>
           <p:cNvSpPr/>
           <p:nvPr/>
         </p:nvSpPr>
@@ -46794,7 +47613,7 @@
       </p:sp>
       <p:sp>
         <p:nvSpPr>
-          <p:cNvPr id="28" name="Text 26"/>
+          <p:cNvPr id="29" name="Text 27"/>
           <p:cNvSpPr txBox="1"/>
           <p:nvPr/>
         </p:nvSpPr>
@@ -46833,7 +47652,7 @@
       </p:sp>
       <p:sp>
         <p:nvSpPr>
-          <p:cNvPr id="29" name="Shape 27"/>
+          <p:cNvPr id="30" name="Shape 28"/>
           <p:cNvSpPr/>
           <p:nvPr/>
         </p:nvSpPr>
@@ -46858,7 +47677,7 @@
       </p:sp>
       <p:sp>
         <p:nvSpPr>
-          <p:cNvPr id="30" name="Text 28"/>
+          <p:cNvPr id="31" name="Text 29"/>
           <p:cNvSpPr txBox="1"/>
           <p:nvPr/>
         </p:nvSpPr>
@@ -46897,7 +47716,7 @@
       </p:sp>
       <p:sp>
         <p:nvSpPr>
-          <p:cNvPr id="31" name="Shape 29"/>
+          <p:cNvPr id="32" name="Shape 30"/>
           <p:cNvSpPr/>
           <p:nvPr/>
         </p:nvSpPr>
@@ -46922,7 +47741,7 @@
       </p:sp>
       <p:sp>
         <p:nvSpPr>
-          <p:cNvPr id="32" name="Text 30"/>
+          <p:cNvPr id="33" name="Text 31"/>
           <p:cNvSpPr txBox="1"/>
           <p:nvPr/>
         </p:nvSpPr>
@@ -46961,7 +47780,7 @@
       </p:sp>
       <p:sp>
         <p:nvSpPr>
-          <p:cNvPr id="33" name="Shape 31"/>
+          <p:cNvPr id="34" name="Shape 32"/>
           <p:cNvSpPr/>
           <p:nvPr/>
         </p:nvSpPr>
@@ -46986,7 +47805,7 @@
       </p:sp>
       <p:sp>
         <p:nvSpPr>
-          <p:cNvPr id="34" name="Text 32"/>
+          <p:cNvPr id="35" name="Text 33"/>
           <p:cNvSpPr txBox="1"/>
           <p:nvPr/>
         </p:nvSpPr>
@@ -47025,7 +47844,7 @@
       </p:sp>
       <p:sp>
         <p:nvSpPr>
-          <p:cNvPr id="35" name="Shape 33"/>
+          <p:cNvPr id="36" name="Shape 34"/>
           <p:cNvSpPr/>
           <p:nvPr/>
         </p:nvSpPr>
@@ -47050,7 +47869,7 @@
       </p:sp>
       <p:sp>
         <p:nvSpPr>
-          <p:cNvPr id="36" name="Text 34"/>
+          <p:cNvPr id="37" name="Text 35"/>
           <p:cNvSpPr txBox="1"/>
           <p:nvPr/>
         </p:nvSpPr>
@@ -47089,7 +47908,7 @@
       </p:sp>
       <p:sp>
         <p:nvSpPr>
-          <p:cNvPr id="37" name="Shape 35"/>
+          <p:cNvPr id="38" name="Shape 36"/>
           <p:cNvSpPr/>
           <p:nvPr/>
         </p:nvSpPr>
@@ -47114,7 +47933,7 @@
       </p:sp>
       <p:sp>
         <p:nvSpPr>
-          <p:cNvPr id="38" name="Text 36"/>
+          <p:cNvPr id="39" name="Text 37"/>
           <p:cNvSpPr txBox="1"/>
           <p:nvPr/>
         </p:nvSpPr>
@@ -47153,7 +47972,7 @@
       </p:sp>
       <p:sp>
         <p:nvSpPr>
-          <p:cNvPr id="39" name="Shape 37"/>
+          <p:cNvPr id="40" name="Shape 38"/>
           <p:cNvSpPr/>
           <p:nvPr/>
         </p:nvSpPr>
@@ -47178,7 +47997,7 @@
       </p:sp>
       <p:sp>
         <p:nvSpPr>
-          <p:cNvPr id="40" name="Text 38"/>
+          <p:cNvPr id="41" name="Text 39"/>
           <p:cNvSpPr txBox="1"/>
           <p:nvPr/>
         </p:nvSpPr>
@@ -47217,7 +48036,7 @@
       </p:sp>
       <p:sp>
         <p:nvSpPr>
-          <p:cNvPr id="41" name="Shape 39"/>
+          <p:cNvPr id="42" name="Shape 40"/>
           <p:cNvSpPr/>
           <p:nvPr/>
         </p:nvSpPr>
@@ -47242,7 +48061,7 @@
       </p:sp>
       <p:sp>
         <p:nvSpPr>
-          <p:cNvPr id="42" name="Text 40"/>
+          <p:cNvPr id="43" name="Text 41"/>
           <p:cNvSpPr txBox="1"/>
           <p:nvPr/>
         </p:nvSpPr>
@@ -47897,7 +48716,70 @@
       </p:sp>
       <p:sp>
         <p:nvSpPr>
-          <p:cNvPr id="19" name="Shape 17"/>
+          <p:cNvPr id="19" name="Text 17"/>
+          <p:cNvSpPr txBox="1"/>
+          <p:nvPr/>
+        </p:nvSpPr>
+        <p:spPr>
+          <a:xfrm>
+            <a:off x="502920" y="3438144"/>
+            <a:ext cx="11201400" cy="777240"/>
+          </a:xfrm>
+          <a:prstGeom prst="rect">
+            <a:avLst/>
+          </a:prstGeom>
+          <a:noFill/>
+          <a:ln/>
+        </p:spPr>
+        <p:txBody>
+          <a:bodyPr wrap="square" lIns="0" tIns="0" rIns="0" bIns="0" rtlCol="0" anchor="ctr"/>
+          <a:lstStyle/>
+          <a:p>
+            <a:pPr indent="0" marL="0">
+              <a:lnSpc>
+                <a:spcPct val="120000"/>
+              </a:lnSpc>
+              <a:buNone/>
+            </a:pPr>
+            <a:r>
+              <a:rPr lang="en-US" sz="850" b="1" dirty="0">
+                <a:solidFill>
+                  <a:srgbClr val="8A8A8A"/>
+                </a:solidFill>
+                <a:latin typeface="Consolas" pitchFamily="34" charset="0"/>
+                <a:ea typeface="Consolas" pitchFamily="34" charset="-122"/>
+                <a:cs typeface="Consolas" pitchFamily="34" charset="-120"/>
+              </a:rPr>
+              <a:t>具体例
+</a:t>
+            </a:r>
+            <a:endParaRPr lang="en-US" sz="850" dirty="0"/>
+          </a:p>
+          <a:p>
+            <a:pPr indent="0" marL="0">
+              <a:lnSpc>
+                <a:spcPct val="120000"/>
+              </a:lnSpc>
+              <a:buNone/>
+            </a:pPr>
+            <a:r>
+              <a:rPr lang="en-US" sz="1000" dirty="0">
+                <a:solidFill>
+                  <a:srgbClr val="171717"/>
+                </a:solidFill>
+                <a:latin typeface="Yu Gothic" pitchFamily="34" charset="0"/>
+                <a:ea typeface="Yu Gothic" pitchFamily="34" charset="-122"/>
+                <a:cs typeface="Yu Gothic" pitchFamily="34" charset="-120"/>
+              </a:rPr>
+              <a:t>創業を考えている個人が、まず地元の商工会議所で記帳や税務の基礎知識を相談し、より専門的な販路開拓やITツール活用は「よろず支援拠点」で無料相談を受ける、というように複数の支援機関を目的に応じて使い分けられる。</a:t>
+            </a:r>
+            <a:endParaRPr lang="en-US" sz="850" dirty="0"/>
+          </a:p>
+        </p:txBody>
+      </p:sp>
+      <p:sp>
+        <p:nvSpPr>
+          <p:cNvPr id="20" name="Shape 18"/>
           <p:cNvSpPr/>
           <p:nvPr/>
         </p:nvSpPr>
@@ -47920,7 +48802,7 @@
       </p:sp>
       <p:sp>
         <p:nvSpPr>
-          <p:cNvPr id="20" name="Shape 18"/>
+          <p:cNvPr id="21" name="Shape 19"/>
           <p:cNvSpPr/>
           <p:nvPr/>
         </p:nvSpPr>
@@ -47940,7 +48822,7 @@
       </p:sp>
       <p:sp>
         <p:nvSpPr>
-          <p:cNvPr id="21" name="Text 19"/>
+          <p:cNvPr id="22" name="Text 20"/>
           <p:cNvSpPr txBox="1"/>
           <p:nvPr/>
         </p:nvSpPr>
@@ -47979,7 +48861,7 @@
       </p:sp>
       <p:sp>
         <p:nvSpPr>
-          <p:cNvPr id="22" name="Text 20"/>
+          <p:cNvPr id="23" name="Text 21"/>
           <p:cNvSpPr txBox="1"/>
           <p:nvPr/>
         </p:nvSpPr>
@@ -48018,7 +48900,7 @@
       </p:sp>
       <p:sp>
         <p:nvSpPr>
-          <p:cNvPr id="23" name="Shape 21"/>
+          <p:cNvPr id="24" name="Shape 22"/>
           <p:cNvSpPr/>
           <p:nvPr/>
         </p:nvSpPr>
@@ -48041,7 +48923,7 @@
       </p:sp>
       <p:sp>
         <p:nvSpPr>
-          <p:cNvPr id="24" name="Text 22"/>
+          <p:cNvPr id="25" name="Text 23"/>
           <p:cNvSpPr txBox="1"/>
           <p:nvPr/>
         </p:nvSpPr>
@@ -48080,7 +48962,7 @@
       </p:sp>
       <p:sp>
         <p:nvSpPr>
-          <p:cNvPr id="25" name="Text 23"/>
+          <p:cNvPr id="26" name="Text 24"/>
           <p:cNvSpPr txBox="1"/>
           <p:nvPr/>
         </p:nvSpPr>
@@ -48119,7 +49001,7 @@
       </p:sp>
       <p:sp>
         <p:nvSpPr>
-          <p:cNvPr id="26" name="Shape 24"/>
+          <p:cNvPr id="27" name="Shape 25"/>
           <p:cNvSpPr/>
           <p:nvPr/>
         </p:nvSpPr>
@@ -48144,7 +49026,7 @@
       </p:sp>
       <p:sp>
         <p:nvSpPr>
-          <p:cNvPr id="27" name="Text 25"/>
+          <p:cNvPr id="28" name="Text 26"/>
           <p:cNvSpPr txBox="1"/>
           <p:nvPr/>
         </p:nvSpPr>
@@ -48183,7 +49065,7 @@
       </p:sp>
       <p:sp>
         <p:nvSpPr>
-          <p:cNvPr id="28" name="Shape 26"/>
+          <p:cNvPr id="29" name="Shape 27"/>
           <p:cNvSpPr/>
           <p:nvPr/>
         </p:nvSpPr>
@@ -48208,7 +49090,7 @@
       </p:sp>
       <p:sp>
         <p:nvSpPr>
-          <p:cNvPr id="29" name="Text 27"/>
+          <p:cNvPr id="30" name="Text 28"/>
           <p:cNvSpPr txBox="1"/>
           <p:nvPr/>
         </p:nvSpPr>
@@ -48247,7 +49129,7 @@
       </p:sp>
       <p:sp>
         <p:nvSpPr>
-          <p:cNvPr id="30" name="Shape 28"/>
+          <p:cNvPr id="31" name="Shape 29"/>
           <p:cNvSpPr/>
           <p:nvPr/>
         </p:nvSpPr>
@@ -48272,7 +49154,7 @@
       </p:sp>
       <p:sp>
         <p:nvSpPr>
-          <p:cNvPr id="31" name="Text 29"/>
+          <p:cNvPr id="32" name="Text 30"/>
           <p:cNvSpPr txBox="1"/>
           <p:nvPr/>
         </p:nvSpPr>
@@ -48311,7 +49193,7 @@
       </p:sp>
       <p:sp>
         <p:nvSpPr>
-          <p:cNvPr id="32" name="Shape 30"/>
+          <p:cNvPr id="33" name="Shape 31"/>
           <p:cNvSpPr/>
           <p:nvPr/>
         </p:nvSpPr>
@@ -48336,7 +49218,7 @@
       </p:sp>
       <p:sp>
         <p:nvSpPr>
-          <p:cNvPr id="33" name="Text 31"/>
+          <p:cNvPr id="34" name="Text 32"/>
           <p:cNvSpPr txBox="1"/>
           <p:nvPr/>
         </p:nvSpPr>
@@ -48375,7 +49257,7 @@
       </p:sp>
       <p:sp>
         <p:nvSpPr>
-          <p:cNvPr id="34" name="Shape 32"/>
+          <p:cNvPr id="35" name="Shape 33"/>
           <p:cNvSpPr/>
           <p:nvPr/>
         </p:nvSpPr>
@@ -48400,7 +49282,7 @@
       </p:sp>
       <p:sp>
         <p:nvSpPr>
-          <p:cNvPr id="35" name="Text 33"/>
+          <p:cNvPr id="36" name="Text 34"/>
           <p:cNvSpPr txBox="1"/>
           <p:nvPr/>
         </p:nvSpPr>
@@ -48439,7 +49321,7 @@
       </p:sp>
       <p:sp>
         <p:nvSpPr>
-          <p:cNvPr id="36" name="Shape 34"/>
+          <p:cNvPr id="37" name="Shape 35"/>
           <p:cNvSpPr/>
           <p:nvPr/>
         </p:nvSpPr>
@@ -48464,7 +49346,7 @@
       </p:sp>
       <p:sp>
         <p:nvSpPr>
-          <p:cNvPr id="37" name="Text 35"/>
+          <p:cNvPr id="38" name="Text 36"/>
           <p:cNvSpPr txBox="1"/>
           <p:nvPr/>
         </p:nvSpPr>
@@ -48503,7 +49385,7 @@
       </p:sp>
       <p:sp>
         <p:nvSpPr>
-          <p:cNvPr id="38" name="Shape 36"/>
+          <p:cNvPr id="39" name="Shape 37"/>
           <p:cNvSpPr/>
           <p:nvPr/>
         </p:nvSpPr>
@@ -48528,7 +49410,7 @@
       </p:sp>
       <p:sp>
         <p:nvSpPr>
-          <p:cNvPr id="39" name="Text 37"/>
+          <p:cNvPr id="40" name="Text 38"/>
           <p:cNvSpPr txBox="1"/>
           <p:nvPr/>
         </p:nvSpPr>
@@ -48567,7 +49449,7 @@
       </p:sp>
       <p:sp>
         <p:nvSpPr>
-          <p:cNvPr id="40" name="Shape 38"/>
+          <p:cNvPr id="41" name="Shape 39"/>
           <p:cNvSpPr/>
           <p:nvPr/>
         </p:nvSpPr>
@@ -48592,7 +49474,7 @@
       </p:sp>
       <p:sp>
         <p:nvSpPr>
-          <p:cNvPr id="41" name="Text 39"/>
+          <p:cNvPr id="42" name="Text 40"/>
           <p:cNvSpPr txBox="1"/>
           <p:nvPr/>
         </p:nvSpPr>
@@ -48631,7 +49513,7 @@
       </p:sp>
       <p:sp>
         <p:nvSpPr>
-          <p:cNvPr id="42" name="Shape 40"/>
+          <p:cNvPr id="43" name="Shape 41"/>
           <p:cNvSpPr/>
           <p:nvPr/>
         </p:nvSpPr>
@@ -48656,7 +49538,7 @@
       </p:sp>
       <p:sp>
         <p:nvSpPr>
-          <p:cNvPr id="43" name="Text 41"/>
+          <p:cNvPr id="44" name="Text 42"/>
           <p:cNvSpPr txBox="1"/>
           <p:nvPr/>
         </p:nvSpPr>
@@ -48695,7 +49577,7 @@
       </p:sp>
       <p:sp>
         <p:nvSpPr>
-          <p:cNvPr id="44" name="Shape 42"/>
+          <p:cNvPr id="45" name="Shape 43"/>
           <p:cNvSpPr/>
           <p:nvPr/>
         </p:nvSpPr>
@@ -48720,7 +49602,7 @@
       </p:sp>
       <p:sp>
         <p:nvSpPr>
-          <p:cNvPr id="45" name="Text 43"/>
+          <p:cNvPr id="46" name="Text 44"/>
           <p:cNvSpPr txBox="1"/>
           <p:nvPr/>
         </p:nvSpPr>
@@ -49253,7 +50135,70 @@
       </p:sp>
       <p:sp>
         <p:nvSpPr>
-          <p:cNvPr id="15" name="Shape 13"/>
+          <p:cNvPr id="15" name="Text 13"/>
+          <p:cNvSpPr txBox="1"/>
+          <p:nvPr/>
+        </p:nvSpPr>
+        <p:spPr>
+          <a:xfrm>
+            <a:off x="502920" y="4434840"/>
+            <a:ext cx="11201400" cy="822960"/>
+          </a:xfrm>
+          <a:prstGeom prst="rect">
+            <a:avLst/>
+          </a:prstGeom>
+          <a:noFill/>
+          <a:ln/>
+        </p:spPr>
+        <p:txBody>
+          <a:bodyPr wrap="square" lIns="0" tIns="0" rIns="0" bIns="0" rtlCol="0" anchor="ctr"/>
+          <a:lstStyle/>
+          <a:p>
+            <a:pPr indent="0" marL="0">
+              <a:lnSpc>
+                <a:spcPct val="120000"/>
+              </a:lnSpc>
+              <a:buNone/>
+            </a:pPr>
+            <a:r>
+              <a:rPr lang="en-US" sz="850" b="1" dirty="0">
+                <a:solidFill>
+                  <a:srgbClr val="8A8A8A"/>
+                </a:solidFill>
+                <a:latin typeface="Consolas" pitchFamily="34" charset="0"/>
+                <a:ea typeface="Consolas" pitchFamily="34" charset="-122"/>
+                <a:cs typeface="Consolas" pitchFamily="34" charset="-120"/>
+              </a:rPr>
+              <a:t>具体例
+</a:t>
+            </a:r>
+            <a:endParaRPr lang="en-US" sz="850" dirty="0"/>
+          </a:p>
+          <a:p>
+            <a:pPr indent="0" marL="0">
+              <a:lnSpc>
+                <a:spcPct val="120000"/>
+              </a:lnSpc>
+              <a:buNone/>
+            </a:pPr>
+            <a:r>
+              <a:rPr lang="en-US" sz="1000" dirty="0">
+                <a:solidFill>
+                  <a:srgbClr val="171717"/>
+                </a:solidFill>
+                <a:latin typeface="Yu Gothic" pitchFamily="34" charset="0"/>
+                <a:ea typeface="Yu Gothic" pitchFamily="34" charset="-122"/>
+                <a:cs typeface="Yu Gothic" pitchFamily="34" charset="-120"/>
+              </a:rPr>
+              <a:t>1963年の基本法は「大企業に比べ生産性が低く格差があるので是正すべき」という発想が土台だったが、1999年の改正後は「中小企業は画一的な弱者ではなく、それぞれ多様な強みを持つ経済の担い手であり、その自主的な取り組みを支援する」という発想に転換した。</a:t>
+            </a:r>
+            <a:endParaRPr lang="en-US" sz="850" dirty="0"/>
+          </a:p>
+        </p:txBody>
+      </p:sp>
+      <p:sp>
+        <p:nvSpPr>
+          <p:cNvPr id="16" name="Shape 14"/>
           <p:cNvSpPr/>
           <p:nvPr/>
         </p:nvSpPr>
@@ -49276,7 +50221,7 @@
       </p:sp>
       <p:sp>
         <p:nvSpPr>
-          <p:cNvPr id="16" name="Shape 14"/>
+          <p:cNvPr id="17" name="Shape 15"/>
           <p:cNvSpPr/>
           <p:nvPr/>
         </p:nvSpPr>
@@ -49296,7 +50241,7 @@
       </p:sp>
       <p:sp>
         <p:nvSpPr>
-          <p:cNvPr id="17" name="Text 15"/>
+          <p:cNvPr id="18" name="Text 16"/>
           <p:cNvSpPr txBox="1"/>
           <p:nvPr/>
         </p:nvSpPr>
@@ -49335,7 +50280,7 @@
       </p:sp>
       <p:sp>
         <p:nvSpPr>
-          <p:cNvPr id="18" name="Text 16"/>
+          <p:cNvPr id="19" name="Text 17"/>
           <p:cNvSpPr txBox="1"/>
           <p:nvPr/>
         </p:nvSpPr>
@@ -49374,7 +50319,7 @@
       </p:sp>
       <p:sp>
         <p:nvSpPr>
-          <p:cNvPr id="19" name="Shape 17"/>
+          <p:cNvPr id="20" name="Shape 18"/>
           <p:cNvSpPr/>
           <p:nvPr/>
         </p:nvSpPr>
@@ -49397,7 +50342,7 @@
       </p:sp>
       <p:sp>
         <p:nvSpPr>
-          <p:cNvPr id="20" name="Text 18"/>
+          <p:cNvPr id="21" name="Text 19"/>
           <p:cNvSpPr txBox="1"/>
           <p:nvPr/>
         </p:nvSpPr>
@@ -49436,7 +50381,7 @@
       </p:sp>
       <p:sp>
         <p:nvSpPr>
-          <p:cNvPr id="21" name="Text 19"/>
+          <p:cNvPr id="22" name="Text 20"/>
           <p:cNvSpPr txBox="1"/>
           <p:nvPr/>
         </p:nvSpPr>
@@ -49475,7 +50420,7 @@
       </p:sp>
       <p:sp>
         <p:nvSpPr>
-          <p:cNvPr id="22" name="Shape 20"/>
+          <p:cNvPr id="23" name="Shape 21"/>
           <p:cNvSpPr/>
           <p:nvPr/>
         </p:nvSpPr>
@@ -49500,7 +50445,7 @@
       </p:sp>
       <p:sp>
         <p:nvSpPr>
-          <p:cNvPr id="23" name="Text 21"/>
+          <p:cNvPr id="24" name="Text 22"/>
           <p:cNvSpPr txBox="1"/>
           <p:nvPr/>
         </p:nvSpPr>
@@ -49539,7 +50484,7 @@
       </p:sp>
       <p:sp>
         <p:nvSpPr>
-          <p:cNvPr id="24" name="Shape 22"/>
+          <p:cNvPr id="25" name="Shape 23"/>
           <p:cNvSpPr/>
           <p:nvPr/>
         </p:nvSpPr>
@@ -49564,7 +50509,7 @@
       </p:sp>
       <p:sp>
         <p:nvSpPr>
-          <p:cNvPr id="25" name="Text 23"/>
+          <p:cNvPr id="26" name="Text 24"/>
           <p:cNvSpPr txBox="1"/>
           <p:nvPr/>
         </p:nvSpPr>
@@ -49603,7 +50548,7 @@
       </p:sp>
       <p:sp>
         <p:nvSpPr>
-          <p:cNvPr id="26" name="Shape 24"/>
+          <p:cNvPr id="27" name="Shape 25"/>
           <p:cNvSpPr/>
           <p:nvPr/>
         </p:nvSpPr>
@@ -49628,7 +50573,7 @@
       </p:sp>
       <p:sp>
         <p:nvSpPr>
-          <p:cNvPr id="27" name="Text 25"/>
+          <p:cNvPr id="28" name="Text 26"/>
           <p:cNvSpPr txBox="1"/>
           <p:nvPr/>
         </p:nvSpPr>
@@ -49667,7 +50612,7 @@
       </p:sp>
       <p:sp>
         <p:nvSpPr>
-          <p:cNvPr id="28" name="Shape 26"/>
+          <p:cNvPr id="29" name="Shape 27"/>
           <p:cNvSpPr/>
           <p:nvPr/>
         </p:nvSpPr>
@@ -49692,7 +50637,7 @@
       </p:sp>
       <p:sp>
         <p:nvSpPr>
-          <p:cNvPr id="29" name="Text 27"/>
+          <p:cNvPr id="30" name="Text 28"/>
           <p:cNvSpPr txBox="1"/>
           <p:nvPr/>
         </p:nvSpPr>
@@ -49731,7 +50676,7 @@
       </p:sp>
       <p:sp>
         <p:nvSpPr>
-          <p:cNvPr id="30" name="Shape 28"/>
+          <p:cNvPr id="31" name="Shape 29"/>
           <p:cNvSpPr/>
           <p:nvPr/>
         </p:nvSpPr>
@@ -49756,7 +50701,7 @@
       </p:sp>
       <p:sp>
         <p:nvSpPr>
-          <p:cNvPr id="31" name="Text 29"/>
+          <p:cNvPr id="32" name="Text 30"/>
           <p:cNvSpPr txBox="1"/>
           <p:nvPr/>
         </p:nvSpPr>
@@ -49795,7 +50740,7 @@
       </p:sp>
       <p:sp>
         <p:nvSpPr>
-          <p:cNvPr id="32" name="Shape 30"/>
+          <p:cNvPr id="33" name="Shape 31"/>
           <p:cNvSpPr/>
           <p:nvPr/>
         </p:nvSpPr>
@@ -49820,7 +50765,7 @@
       </p:sp>
       <p:sp>
         <p:nvSpPr>
-          <p:cNvPr id="33" name="Text 31"/>
+          <p:cNvPr id="34" name="Text 32"/>
           <p:cNvSpPr txBox="1"/>
           <p:nvPr/>
         </p:nvSpPr>
@@ -49859,7 +50804,7 @@
       </p:sp>
       <p:sp>
         <p:nvSpPr>
-          <p:cNvPr id="34" name="Shape 32"/>
+          <p:cNvPr id="35" name="Shape 33"/>
           <p:cNvSpPr/>
           <p:nvPr/>
         </p:nvSpPr>
@@ -49884,7 +50829,7 @@
       </p:sp>
       <p:sp>
         <p:nvSpPr>
-          <p:cNvPr id="35" name="Text 33"/>
+          <p:cNvPr id="36" name="Text 34"/>
           <p:cNvSpPr txBox="1"/>
           <p:nvPr/>
         </p:nvSpPr>
@@ -49923,7 +50868,7 @@
       </p:sp>
       <p:sp>
         <p:nvSpPr>
-          <p:cNvPr id="36" name="Shape 34"/>
+          <p:cNvPr id="37" name="Shape 35"/>
           <p:cNvSpPr/>
           <p:nvPr/>
         </p:nvSpPr>
@@ -49948,7 +50893,7 @@
       </p:sp>
       <p:sp>
         <p:nvSpPr>
-          <p:cNvPr id="37" name="Text 35"/>
+          <p:cNvPr id="38" name="Text 36"/>
           <p:cNvSpPr txBox="1"/>
           <p:nvPr/>
         </p:nvSpPr>
@@ -49987,7 +50932,7 @@
       </p:sp>
       <p:sp>
         <p:nvSpPr>
-          <p:cNvPr id="38" name="Shape 36"/>
+          <p:cNvPr id="39" name="Shape 37"/>
           <p:cNvSpPr/>
           <p:nvPr/>
         </p:nvSpPr>
@@ -50012,7 +50957,7 @@
       </p:sp>
       <p:sp>
         <p:nvSpPr>
-          <p:cNvPr id="39" name="Text 37"/>
+          <p:cNvPr id="40" name="Text 38"/>
           <p:cNvSpPr txBox="1"/>
           <p:nvPr/>
         </p:nvSpPr>
@@ -50051,7 +50996,7 @@
       </p:sp>
       <p:sp>
         <p:nvSpPr>
-          <p:cNvPr id="40" name="Shape 38"/>
+          <p:cNvPr id="41" name="Shape 39"/>
           <p:cNvSpPr/>
           <p:nvPr/>
         </p:nvSpPr>
@@ -50076,7 +51021,7 @@
       </p:sp>
       <p:sp>
         <p:nvSpPr>
-          <p:cNvPr id="41" name="Text 39"/>
+          <p:cNvPr id="42" name="Text 40"/>
           <p:cNvSpPr txBox="1"/>
           <p:nvPr/>
         </p:nvSpPr>
@@ -53077,7 +54022,70 @@
       </p:sp>
       <p:sp>
         <p:nvSpPr>
-          <p:cNvPr id="19" name="Shape 17"/>
+          <p:cNvPr id="19" name="Text 17"/>
+          <p:cNvSpPr txBox="1"/>
+          <p:nvPr/>
+        </p:nvSpPr>
+        <p:spPr>
+          <a:xfrm>
+            <a:off x="502920" y="3493008"/>
+            <a:ext cx="11201400" cy="777240"/>
+          </a:xfrm>
+          <a:prstGeom prst="rect">
+            <a:avLst/>
+          </a:prstGeom>
+          <a:noFill/>
+          <a:ln/>
+        </p:spPr>
+        <p:txBody>
+          <a:bodyPr wrap="square" lIns="0" tIns="0" rIns="0" bIns="0" rtlCol="0" anchor="ctr"/>
+          <a:lstStyle/>
+          <a:p>
+            <a:pPr indent="0" marL="0">
+              <a:lnSpc>
+                <a:spcPct val="120000"/>
+              </a:lnSpc>
+              <a:buNone/>
+            </a:pPr>
+            <a:r>
+              <a:rPr lang="en-US" sz="850" b="1" dirty="0">
+                <a:solidFill>
+                  <a:srgbClr val="8A8A8A"/>
+                </a:solidFill>
+                <a:latin typeface="Consolas" pitchFamily="34" charset="0"/>
+                <a:ea typeface="Consolas" pitchFamily="34" charset="-122"/>
+                <a:cs typeface="Consolas" pitchFamily="34" charset="-120"/>
+              </a:rPr>
+              <a:t>具体例
+</a:t>
+            </a:r>
+            <a:endParaRPr lang="en-US" sz="850" dirty="0"/>
+          </a:p>
+          <a:p>
+            <a:pPr indent="0" marL="0">
+              <a:lnSpc>
+                <a:spcPct val="120000"/>
+              </a:lnSpc>
+              <a:buNone/>
+            </a:pPr>
+            <a:r>
+              <a:rPr lang="en-US" sz="1000" dirty="0">
+                <a:solidFill>
+                  <a:srgbClr val="171717"/>
+                </a:solidFill>
+                <a:latin typeface="Yu Gothic" pitchFamily="34" charset="0"/>
+                <a:ea typeface="Yu Gothic" pitchFamily="34" charset="-122"/>
+                <a:cs typeface="Yu Gothic" pitchFamily="34" charset="-120"/>
+              </a:rPr>
+              <a:t>伝統的な酒蔵や陶磁器の窯元は、地域固有の原材料・技術・ブランドに依存するため大企業が同じやり方で大量生産に乗り出しにくく、零細な蔵元・窯元が中心的な担い手であり続けている。中小企業性業種の典型例。</a:t>
+            </a:r>
+            <a:endParaRPr lang="en-US" sz="850" dirty="0"/>
+          </a:p>
+        </p:txBody>
+      </p:sp>
+      <p:sp>
+        <p:nvSpPr>
+          <p:cNvPr id="20" name="Shape 18"/>
           <p:cNvSpPr/>
           <p:nvPr/>
         </p:nvSpPr>
@@ -53100,7 +54108,7 @@
       </p:sp>
       <p:sp>
         <p:nvSpPr>
-          <p:cNvPr id="20" name="Shape 18"/>
+          <p:cNvPr id="21" name="Shape 19"/>
           <p:cNvSpPr/>
           <p:nvPr/>
         </p:nvSpPr>
@@ -53120,7 +54128,7 @@
       </p:sp>
       <p:sp>
         <p:nvSpPr>
-          <p:cNvPr id="21" name="Text 19"/>
+          <p:cNvPr id="22" name="Text 20"/>
           <p:cNvSpPr txBox="1"/>
           <p:nvPr/>
         </p:nvSpPr>
@@ -53159,7 +54167,7 @@
       </p:sp>
       <p:sp>
         <p:nvSpPr>
-          <p:cNvPr id="22" name="Text 20"/>
+          <p:cNvPr id="23" name="Text 21"/>
           <p:cNvSpPr txBox="1"/>
           <p:nvPr/>
         </p:nvSpPr>
@@ -53198,7 +54206,7 @@
       </p:sp>
       <p:sp>
         <p:nvSpPr>
-          <p:cNvPr id="23" name="Shape 21"/>
+          <p:cNvPr id="24" name="Shape 22"/>
           <p:cNvSpPr/>
           <p:nvPr/>
         </p:nvSpPr>
@@ -53221,7 +54229,7 @@
       </p:sp>
       <p:sp>
         <p:nvSpPr>
-          <p:cNvPr id="24" name="Text 22"/>
+          <p:cNvPr id="25" name="Text 23"/>
           <p:cNvSpPr txBox="1"/>
           <p:nvPr/>
         </p:nvSpPr>
@@ -53260,7 +54268,7 @@
       </p:sp>
       <p:sp>
         <p:nvSpPr>
-          <p:cNvPr id="25" name="Text 23"/>
+          <p:cNvPr id="26" name="Text 24"/>
           <p:cNvSpPr txBox="1"/>
           <p:nvPr/>
         </p:nvSpPr>
@@ -53299,7 +54307,7 @@
       </p:sp>
       <p:sp>
         <p:nvSpPr>
-          <p:cNvPr id="26" name="Shape 24"/>
+          <p:cNvPr id="27" name="Shape 25"/>
           <p:cNvSpPr/>
           <p:nvPr/>
         </p:nvSpPr>
@@ -53324,7 +54332,7 @@
       </p:sp>
       <p:sp>
         <p:nvSpPr>
-          <p:cNvPr id="27" name="Text 25"/>
+          <p:cNvPr id="28" name="Text 26"/>
           <p:cNvSpPr txBox="1"/>
           <p:nvPr/>
         </p:nvSpPr>
@@ -53363,7 +54371,7 @@
       </p:sp>
       <p:sp>
         <p:nvSpPr>
-          <p:cNvPr id="28" name="Shape 26"/>
+          <p:cNvPr id="29" name="Shape 27"/>
           <p:cNvSpPr/>
           <p:nvPr/>
         </p:nvSpPr>
@@ -53388,7 +54396,7 @@
       </p:sp>
       <p:sp>
         <p:nvSpPr>
-          <p:cNvPr id="29" name="Text 27"/>
+          <p:cNvPr id="30" name="Text 28"/>
           <p:cNvSpPr txBox="1"/>
           <p:nvPr/>
         </p:nvSpPr>
@@ -53427,7 +54435,7 @@
       </p:sp>
       <p:sp>
         <p:nvSpPr>
-          <p:cNvPr id="30" name="Shape 28"/>
+          <p:cNvPr id="31" name="Shape 29"/>
           <p:cNvSpPr/>
           <p:nvPr/>
         </p:nvSpPr>
@@ -53452,7 +54460,7 @@
       </p:sp>
       <p:sp>
         <p:nvSpPr>
-          <p:cNvPr id="31" name="Text 29"/>
+          <p:cNvPr id="32" name="Text 30"/>
           <p:cNvSpPr txBox="1"/>
           <p:nvPr/>
         </p:nvSpPr>
@@ -53491,7 +54499,7 @@
       </p:sp>
       <p:sp>
         <p:nvSpPr>
-          <p:cNvPr id="32" name="Shape 30"/>
+          <p:cNvPr id="33" name="Shape 31"/>
           <p:cNvSpPr/>
           <p:nvPr/>
         </p:nvSpPr>
@@ -53516,7 +54524,7 @@
       </p:sp>
       <p:sp>
         <p:nvSpPr>
-          <p:cNvPr id="33" name="Text 31"/>
+          <p:cNvPr id="34" name="Text 32"/>
           <p:cNvSpPr txBox="1"/>
           <p:nvPr/>
         </p:nvSpPr>
@@ -53555,7 +54563,7 @@
       </p:sp>
       <p:sp>
         <p:nvSpPr>
-          <p:cNvPr id="34" name="Shape 32"/>
+          <p:cNvPr id="35" name="Shape 33"/>
           <p:cNvSpPr/>
           <p:nvPr/>
         </p:nvSpPr>
@@ -53580,7 +54588,7 @@
       </p:sp>
       <p:sp>
         <p:nvSpPr>
-          <p:cNvPr id="35" name="Text 33"/>
+          <p:cNvPr id="36" name="Text 34"/>
           <p:cNvSpPr txBox="1"/>
           <p:nvPr/>
         </p:nvSpPr>
@@ -53619,7 +54627,7 @@
       </p:sp>
       <p:sp>
         <p:nvSpPr>
-          <p:cNvPr id="36" name="Shape 34"/>
+          <p:cNvPr id="37" name="Shape 35"/>
           <p:cNvSpPr/>
           <p:nvPr/>
         </p:nvSpPr>
@@ -53644,7 +54652,7 @@
       </p:sp>
       <p:sp>
         <p:nvSpPr>
-          <p:cNvPr id="37" name="Text 35"/>
+          <p:cNvPr id="38" name="Text 36"/>
           <p:cNvSpPr txBox="1"/>
           <p:nvPr/>
         </p:nvSpPr>
@@ -53683,7 +54691,7 @@
       </p:sp>
       <p:sp>
         <p:nvSpPr>
-          <p:cNvPr id="38" name="Shape 36"/>
+          <p:cNvPr id="39" name="Shape 37"/>
           <p:cNvSpPr/>
           <p:nvPr/>
         </p:nvSpPr>
@@ -53708,7 +54716,7 @@
       </p:sp>
       <p:sp>
         <p:nvSpPr>
-          <p:cNvPr id="39" name="Text 37"/>
+          <p:cNvPr id="40" name="Text 38"/>
           <p:cNvSpPr txBox="1"/>
           <p:nvPr/>
         </p:nvSpPr>
@@ -53747,7 +54755,7 @@
       </p:sp>
       <p:sp>
         <p:nvSpPr>
-          <p:cNvPr id="40" name="Shape 38"/>
+          <p:cNvPr id="41" name="Shape 39"/>
           <p:cNvSpPr/>
           <p:nvPr/>
         </p:nvSpPr>
@@ -53772,7 +54780,7 @@
       </p:sp>
       <p:sp>
         <p:nvSpPr>
-          <p:cNvPr id="41" name="Text 39"/>
+          <p:cNvPr id="42" name="Text 40"/>
           <p:cNvSpPr txBox="1"/>
           <p:nvPr/>
         </p:nvSpPr>
@@ -53811,7 +54819,7 @@
       </p:sp>
       <p:sp>
         <p:nvSpPr>
-          <p:cNvPr id="42" name="Shape 40"/>
+          <p:cNvPr id="43" name="Shape 41"/>
           <p:cNvSpPr/>
           <p:nvPr/>
         </p:nvSpPr>
@@ -53836,7 +54844,7 @@
       </p:sp>
       <p:sp>
         <p:nvSpPr>
-          <p:cNvPr id="43" name="Text 41"/>
+          <p:cNvPr id="44" name="Text 42"/>
           <p:cNvSpPr txBox="1"/>
           <p:nvPr/>
         </p:nvSpPr>
@@ -53875,7 +54883,7 @@
       </p:sp>
       <p:sp>
         <p:nvSpPr>
-          <p:cNvPr id="44" name="Shape 42"/>
+          <p:cNvPr id="45" name="Shape 43"/>
           <p:cNvSpPr/>
           <p:nvPr/>
         </p:nvSpPr>
@@ -53900,7 +54908,7 @@
       </p:sp>
       <p:sp>
         <p:nvSpPr>
-          <p:cNvPr id="45" name="Text 43"/>
+          <p:cNvPr id="46" name="Text 44"/>
           <p:cNvSpPr txBox="1"/>
           <p:nvPr/>
         </p:nvSpPr>
@@ -54459,7 +55467,70 @@
       </p:sp>
       <p:sp>
         <p:nvSpPr>
-          <p:cNvPr id="16" name="Shape 14"/>
+          <p:cNvPr id="16" name="Text 14"/>
+          <p:cNvSpPr txBox="1"/>
+          <p:nvPr/>
+        </p:nvSpPr>
+        <p:spPr>
+          <a:xfrm>
+            <a:off x="502920" y="4389120"/>
+            <a:ext cx="11201400" cy="777240"/>
+          </a:xfrm>
+          <a:prstGeom prst="rect">
+            <a:avLst/>
+          </a:prstGeom>
+          <a:noFill/>
+          <a:ln/>
+        </p:spPr>
+        <p:txBody>
+          <a:bodyPr wrap="square" lIns="0" tIns="0" rIns="0" bIns="0" rtlCol="0" anchor="ctr"/>
+          <a:lstStyle/>
+          <a:p>
+            <a:pPr indent="0" marL="0">
+              <a:lnSpc>
+                <a:spcPct val="120000"/>
+              </a:lnSpc>
+              <a:buNone/>
+            </a:pPr>
+            <a:r>
+              <a:rPr lang="en-US" sz="850" b="1" dirty="0">
+                <a:solidFill>
+                  <a:srgbClr val="8A8A8A"/>
+                </a:solidFill>
+                <a:latin typeface="Consolas" pitchFamily="34" charset="0"/>
+                <a:ea typeface="Consolas" pitchFamily="34" charset="-122"/>
+                <a:cs typeface="Consolas" pitchFamily="34" charset="-120"/>
+              </a:rPr>
+              <a:t>具体例
+</a:t>
+            </a:r>
+            <a:endParaRPr lang="en-US" sz="850" dirty="0"/>
+          </a:p>
+          <a:p>
+            <a:pPr indent="0" marL="0">
+              <a:lnSpc>
+                <a:spcPct val="120000"/>
+              </a:lnSpc>
+              <a:buNone/>
+            </a:pPr>
+            <a:r>
+              <a:rPr lang="en-US" sz="1000" dirty="0">
+                <a:solidFill>
+                  <a:srgbClr val="171717"/>
+                </a:solidFill>
+                <a:latin typeface="Yu Gothic" pitchFamily="34" charset="0"/>
+                <a:ea typeface="Yu Gothic" pitchFamily="34" charset="-122"/>
+                <a:cs typeface="Yu Gothic" pitchFamily="34" charset="-120"/>
+              </a:rPr>
+              <a:t>ある地方都市では、金属加工の中小企業数十社が「切削」「メッキ」「組立」など異なる工程を分業して受け持ち、地域全体で一つの製造ラインのような機能を果たしている。産地型の産業集積の典型例。</a:t>
+            </a:r>
+            <a:endParaRPr lang="en-US" sz="850" dirty="0"/>
+          </a:p>
+        </p:txBody>
+      </p:sp>
+      <p:sp>
+        <p:nvSpPr>
+          <p:cNvPr id="17" name="Shape 15"/>
           <p:cNvSpPr/>
           <p:nvPr/>
         </p:nvSpPr>
@@ -54482,7 +55553,7 @@
       </p:sp>
       <p:sp>
         <p:nvSpPr>
-          <p:cNvPr id="17" name="Shape 15"/>
+          <p:cNvPr id="18" name="Shape 16"/>
           <p:cNvSpPr/>
           <p:nvPr/>
         </p:nvSpPr>
@@ -54502,7 +55573,7 @@
       </p:sp>
       <p:sp>
         <p:nvSpPr>
-          <p:cNvPr id="18" name="Text 16"/>
+          <p:cNvPr id="19" name="Text 17"/>
           <p:cNvSpPr txBox="1"/>
           <p:nvPr/>
         </p:nvSpPr>
@@ -54541,7 +55612,7 @@
       </p:sp>
       <p:sp>
         <p:nvSpPr>
-          <p:cNvPr id="19" name="Text 17"/>
+          <p:cNvPr id="20" name="Text 18"/>
           <p:cNvSpPr txBox="1"/>
           <p:nvPr/>
         </p:nvSpPr>
@@ -54580,7 +55651,7 @@
       </p:sp>
       <p:sp>
         <p:nvSpPr>
-          <p:cNvPr id="20" name="Shape 18"/>
+          <p:cNvPr id="21" name="Shape 19"/>
           <p:cNvSpPr/>
           <p:nvPr/>
         </p:nvSpPr>
@@ -54603,7 +55674,7 @@
       </p:sp>
       <p:sp>
         <p:nvSpPr>
-          <p:cNvPr id="21" name="Text 19"/>
+          <p:cNvPr id="22" name="Text 20"/>
           <p:cNvSpPr txBox="1"/>
           <p:nvPr/>
         </p:nvSpPr>
@@ -54642,7 +55713,7 @@
       </p:sp>
       <p:sp>
         <p:nvSpPr>
-          <p:cNvPr id="22" name="Text 20"/>
+          <p:cNvPr id="23" name="Text 21"/>
           <p:cNvSpPr txBox="1"/>
           <p:nvPr/>
         </p:nvSpPr>
@@ -54681,7 +55752,7 @@
       </p:sp>
       <p:sp>
         <p:nvSpPr>
-          <p:cNvPr id="23" name="Shape 21"/>
+          <p:cNvPr id="24" name="Shape 22"/>
           <p:cNvSpPr/>
           <p:nvPr/>
         </p:nvSpPr>
@@ -54706,7 +55777,7 @@
       </p:sp>
       <p:sp>
         <p:nvSpPr>
-          <p:cNvPr id="24" name="Text 22"/>
+          <p:cNvPr id="25" name="Text 23"/>
           <p:cNvSpPr txBox="1"/>
           <p:nvPr/>
         </p:nvSpPr>
@@ -54745,7 +55816,7 @@
       </p:sp>
       <p:sp>
         <p:nvSpPr>
-          <p:cNvPr id="25" name="Shape 23"/>
+          <p:cNvPr id="26" name="Shape 24"/>
           <p:cNvSpPr/>
           <p:nvPr/>
         </p:nvSpPr>
@@ -54770,7 +55841,7 @@
       </p:sp>
       <p:sp>
         <p:nvSpPr>
-          <p:cNvPr id="26" name="Text 24"/>
+          <p:cNvPr id="27" name="Text 25"/>
           <p:cNvSpPr txBox="1"/>
           <p:nvPr/>
         </p:nvSpPr>
@@ -54809,7 +55880,7 @@
       </p:sp>
       <p:sp>
         <p:nvSpPr>
-          <p:cNvPr id="27" name="Shape 25"/>
+          <p:cNvPr id="28" name="Shape 26"/>
           <p:cNvSpPr/>
           <p:nvPr/>
         </p:nvSpPr>
@@ -54834,7 +55905,7 @@
       </p:sp>
       <p:sp>
         <p:nvSpPr>
-          <p:cNvPr id="28" name="Text 26"/>
+          <p:cNvPr id="29" name="Text 27"/>
           <p:cNvSpPr txBox="1"/>
           <p:nvPr/>
         </p:nvSpPr>
@@ -54873,7 +55944,7 @@
       </p:sp>
       <p:sp>
         <p:nvSpPr>
-          <p:cNvPr id="29" name="Shape 27"/>
+          <p:cNvPr id="30" name="Shape 28"/>
           <p:cNvSpPr/>
           <p:nvPr/>
         </p:nvSpPr>
@@ -54898,7 +55969,7 @@
       </p:sp>
       <p:sp>
         <p:nvSpPr>
-          <p:cNvPr id="30" name="Text 28"/>
+          <p:cNvPr id="31" name="Text 29"/>
           <p:cNvSpPr txBox="1"/>
           <p:nvPr/>
         </p:nvSpPr>
@@ -54937,7 +56008,7 @@
       </p:sp>
       <p:sp>
         <p:nvSpPr>
-          <p:cNvPr id="31" name="Shape 29"/>
+          <p:cNvPr id="32" name="Shape 30"/>
           <p:cNvSpPr/>
           <p:nvPr/>
         </p:nvSpPr>
@@ -54962,7 +56033,7 @@
       </p:sp>
       <p:sp>
         <p:nvSpPr>
-          <p:cNvPr id="32" name="Text 30"/>
+          <p:cNvPr id="33" name="Text 31"/>
           <p:cNvSpPr txBox="1"/>
           <p:nvPr/>
         </p:nvSpPr>
@@ -55001,7 +56072,7 @@
       </p:sp>
       <p:sp>
         <p:nvSpPr>
-          <p:cNvPr id="33" name="Shape 31"/>
+          <p:cNvPr id="34" name="Shape 32"/>
           <p:cNvSpPr/>
           <p:nvPr/>
         </p:nvSpPr>
@@ -55026,7 +56097,7 @@
       </p:sp>
       <p:sp>
         <p:nvSpPr>
-          <p:cNvPr id="34" name="Text 32"/>
+          <p:cNvPr id="35" name="Text 33"/>
           <p:cNvSpPr txBox="1"/>
           <p:nvPr/>
         </p:nvSpPr>
@@ -55065,7 +56136,7 @@
       </p:sp>
       <p:sp>
         <p:nvSpPr>
-          <p:cNvPr id="35" name="Shape 33"/>
+          <p:cNvPr id="36" name="Shape 34"/>
           <p:cNvSpPr/>
           <p:nvPr/>
         </p:nvSpPr>
@@ -55090,7 +56161,7 @@
       </p:sp>
       <p:sp>
         <p:nvSpPr>
-          <p:cNvPr id="36" name="Text 34"/>
+          <p:cNvPr id="37" name="Text 35"/>
           <p:cNvSpPr txBox="1"/>
           <p:nvPr/>
         </p:nvSpPr>
@@ -55129,7 +56200,7 @@
       </p:sp>
       <p:sp>
         <p:nvSpPr>
-          <p:cNvPr id="37" name="Shape 35"/>
+          <p:cNvPr id="38" name="Shape 36"/>
           <p:cNvSpPr/>
           <p:nvPr/>
         </p:nvSpPr>
@@ -55154,7 +56225,7 @@
       </p:sp>
       <p:sp>
         <p:nvSpPr>
-          <p:cNvPr id="38" name="Text 36"/>
+          <p:cNvPr id="39" name="Text 37"/>
           <p:cNvSpPr txBox="1"/>
           <p:nvPr/>
         </p:nvSpPr>
@@ -55193,7 +56264,7 @@
       </p:sp>
       <p:sp>
         <p:nvSpPr>
-          <p:cNvPr id="39" name="Shape 37"/>
+          <p:cNvPr id="40" name="Shape 38"/>
           <p:cNvSpPr/>
           <p:nvPr/>
         </p:nvSpPr>
@@ -55218,7 +56289,7 @@
       </p:sp>
       <p:sp>
         <p:nvSpPr>
-          <p:cNvPr id="40" name="Text 38"/>
+          <p:cNvPr id="41" name="Text 39"/>
           <p:cNvSpPr txBox="1"/>
           <p:nvPr/>
         </p:nvSpPr>
@@ -55257,7 +56328,7 @@
       </p:sp>
       <p:sp>
         <p:nvSpPr>
-          <p:cNvPr id="41" name="Shape 39"/>
+          <p:cNvPr id="42" name="Shape 40"/>
           <p:cNvSpPr/>
           <p:nvPr/>
         </p:nvSpPr>
@@ -55282,7 +56353,7 @@
       </p:sp>
       <p:sp>
         <p:nvSpPr>
-          <p:cNvPr id="42" name="Text 40"/>
+          <p:cNvPr id="43" name="Text 41"/>
           <p:cNvSpPr txBox="1"/>
           <p:nvPr/>
         </p:nvSpPr>
